--- a/07_Project_Documentation/Project_Presentation.pptx
+++ b/07_Project_Documentation/Project_Presentation.pptx
@@ -10,8 +10,22 @@
     <p:sldId id="258" r:id="rId9"/>
     <p:sldId id="259" r:id="rId10"/>
     <p:sldId id="260" r:id="rId11"/>
+    <p:sldId id="261" r:id="rId12"/>
+    <p:sldId id="262" r:id="rId13"/>
+    <p:sldId id="263" r:id="rId14"/>
+    <p:sldId id="264" r:id="rId15"/>
+    <p:sldId id="265" r:id="rId16"/>
+    <p:sldId id="266" r:id="rId17"/>
+    <p:sldId id="267" r:id="rId18"/>
+    <p:sldId id="268" r:id="rId19"/>
+    <p:sldId id="269" r:id="rId20"/>
+    <p:sldId id="270" r:id="rId21"/>
+    <p:sldId id="271" r:id="rId22"/>
+    <p:sldId id="272" r:id="rId23"/>
+    <p:sldId id="273" r:id="rId24"/>
+    <p:sldId id="274" r:id="rId25"/>
   </p:sldIdLst>
-  <p:sldSz cx="9144000" cy="6858000" type="screen4x3"/>
+  <p:sldSz cx="12191695" cy="6858000" type="screen4x3"/>
   <p:notesSz cx="6858000" cy="9144000"/>
   <p:defaultTextStyle>
     <a:defPPr>
@@ -3088,7 +3102,7 @@
     <p:bg>
       <p:bgPr>
         <a:solidFill>
-          <a:srgbClr val="0F172A"/>
+          <a:srgbClr val="1E3A8A"/>
         </a:solidFill>
         <a:effectLst/>
       </p:bgPr>
@@ -3102,31 +3116,14 @@
       <p:grpSpPr/>
       <p:sp>
         <p:nvSpPr>
-          <p:cNvPr id="2" name="Title 1"/>
-          <p:cNvSpPr>
-            <a:spLocks noGrp="1"/>
-          </p:cNvSpPr>
-          <p:nvPr>
-            <p:ph type="title"/>
-          </p:nvPr>
-        </p:nvSpPr>
-        <p:spPr/>
-        <p:txBody>
-          <a:bodyPr/>
-          <a:lstStyle/>
-          <a:p/>
-        </p:txBody>
-      </p:sp>
-      <p:sp>
-        <p:nvSpPr>
-          <p:cNvPr id="3" name="TextBox 2"/>
+          <p:cNvPr id="2" name="TextBox 1"/>
           <p:cNvSpPr txBox="1"/>
           <p:nvPr/>
         </p:nvSpPr>
         <p:spPr>
           <a:xfrm>
-            <a:off x="457200" y="1828800"/>
-            <a:ext cx="8229600" cy="1828800"/>
+            <a:off x="731520" y="1645920"/>
+            <a:ext cx="10728655" cy="1371600"/>
           </a:xfrm>
           <a:prstGeom prst="rect">
             <a:avLst/>
@@ -3134,33 +3131,3527 @@
           <a:noFill/>
         </p:spPr>
         <p:txBody>
-          <a:bodyPr wrap="none">
+          <a:bodyPr wrap="square">
             <a:spAutoFit/>
           </a:bodyPr>
           <a:lstStyle/>
-          <a:p/>
           <a:p>
             <a:pPr>
-              <a:defRPr b="1" sz="4400">
+              <a:defRPr b="1" sz="5400">
                 <a:solidFill>
                   <a:srgbClr val="FFFFFF"/>
                 </a:solidFill>
-              </a:defRPr>
-            </a:pPr>
-            <a:r>
-              <a:t>HDI Insight AI</a:t>
+                <a:latin typeface="Helvetica"/>
+              </a:defRPr>
+            </a:pPr>
+            <a:r>
+              <a:t>HDI INSIGHT AI</a:t>
             </a:r>
           </a:p>
           <a:p>
             <a:pPr>
+              <a:spcBef>
+                <a:spcPts val="1000"/>
+              </a:spcBef>
               <a:defRPr sz="2000">
                 <a:solidFill>
-                  <a:srgbClr val="4F46E5"/>
-                </a:solidFill>
-              </a:defRPr>
-            </a:pPr>
-            <a:r>
-              <a:t>Smart Human Development Analytics Platform</a:t>
+                  <a:srgbClr val="0F766E"/>
+                </a:solidFill>
+                <a:latin typeface="Helvetica"/>
+              </a:defRPr>
+            </a:pPr>
+            <a:r>
+              <a:t>AI-Powered Human Development Analytics Platform using Machine Learning</a:t>
+            </a:r>
+          </a:p>
+        </p:txBody>
+      </p:sp>
+      <p:sp>
+        <p:nvSpPr>
+          <p:cNvPr id="3" name="TextBox 2"/>
+          <p:cNvSpPr txBox="1"/>
+          <p:nvPr/>
+        </p:nvSpPr>
+        <p:spPr>
+          <a:xfrm>
+            <a:off x="731520" y="4114800"/>
+            <a:ext cx="10728655" cy="2011680"/>
+          </a:xfrm>
+          <a:prstGeom prst="rect">
+            <a:avLst/>
+          </a:prstGeom>
+          <a:noFill/>
+        </p:spPr>
+        <p:txBody>
+          <a:bodyPr wrap="square" lIns="0" tIns="0" rIns="0" bIns="0">
+            <a:spAutoFit/>
+          </a:bodyPr>
+          <a:lstStyle/>
+          <a:p>
+            <a:pPr>
+              <a:spcAft>
+                <a:spcPts val="800"/>
+              </a:spcAft>
+              <a:defRPr sz="1300">
+                <a:solidFill>
+                  <a:srgbClr val="FFFFFF"/>
+                </a:solidFill>
+                <a:latin typeface="Helvetica"/>
+              </a:defRPr>
+            </a:pPr>
+            <a:r>
+              <a:t>Academic &amp; Portfolio Review Submission deck</a:t>
+            </a:r>
+          </a:p>
+          <a:p>
+            <a:pPr>
+              <a:spcAft>
+                <a:spcPts val="800"/>
+              </a:spcAft>
+              <a:defRPr sz="1300">
+                <a:solidFill>
+                  <a:srgbClr val="FFFFFF"/>
+                </a:solidFill>
+                <a:latin typeface="Helvetica"/>
+              </a:defRPr>
+            </a:pPr>
+            <a:r>
+              <a:t>Created by: Varigeti Karthikeya (Lead), Veera Ajay Kumar Adapa, Gulla Chandana,</a:t>
+            </a:r>
+          </a:p>
+          <a:p>
+            <a:pPr>
+              <a:spcAft>
+                <a:spcPts val="800"/>
+              </a:spcAft>
+              <a:defRPr sz="1300">
+                <a:solidFill>
+                  <a:srgbClr val="FFFFFF"/>
+                </a:solidFill>
+                <a:latin typeface="Helvetica"/>
+              </a:defRPr>
+            </a:pPr>
+            <a:r>
+              <a:t>Ambati Krupa Jesudas, Mohammad Tayyab</a:t>
+            </a:r>
+          </a:p>
+          <a:p>
+            <a:pPr>
+              <a:spcAft>
+                <a:spcPts val="800"/>
+              </a:spcAft>
+              <a:defRPr sz="1300">
+                <a:solidFill>
+                  <a:srgbClr val="FFFFFF"/>
+                </a:solidFill>
+                <a:latin typeface="Helvetica"/>
+              </a:defRPr>
+            </a:pPr>
+            <a:r>
+              <a:t>Socioeconomic Indicators Simulation • July 2026</a:t>
+            </a:r>
+          </a:p>
+        </p:txBody>
+      </p:sp>
+    </p:spTree>
+  </p:cSld>
+  <p:clrMapOvr>
+    <a:masterClrMapping/>
+  </p:clrMapOvr>
+</p:sld>
+</file>
+
+<file path=ppt/slides/slide10.xml><?xml version="1.0" encoding="utf-8"?>
+<p:sld xmlns:a="http://schemas.openxmlformats.org/drawingml/2006/main" xmlns:p="http://schemas.openxmlformats.org/presentationml/2006/main" xmlns:r="http://schemas.openxmlformats.org/officeDocument/2006/relationships">
+  <p:cSld>
+    <p:bg>
+      <p:bgPr>
+        <a:solidFill>
+          <a:srgbClr val="F3F4F6"/>
+        </a:solidFill>
+        <a:effectLst/>
+      </p:bgPr>
+    </p:bg>
+    <p:spTree>
+      <p:nvGrpSpPr>
+        <p:cNvPr id="1" name=""/>
+        <p:cNvGrpSpPr/>
+        <p:nvPr/>
+      </p:nvGrpSpPr>
+      <p:grpSpPr/>
+      <p:sp>
+        <p:nvSpPr>
+          <p:cNvPr id="2" name="TextBox 1"/>
+          <p:cNvSpPr txBox="1"/>
+          <p:nvPr/>
+        </p:nvSpPr>
+        <p:spPr>
+          <a:xfrm>
+            <a:off x="548640" y="365760"/>
+            <a:ext cx="11094415" cy="731520"/>
+          </a:xfrm>
+          <a:prstGeom prst="rect">
+            <a:avLst/>
+          </a:prstGeom>
+          <a:noFill/>
+        </p:spPr>
+        <p:txBody>
+          <a:bodyPr wrap="square" lIns="0" tIns="0" rIns="0" bIns="0">
+            <a:spAutoFit/>
+          </a:bodyPr>
+          <a:lstStyle/>
+          <a:p>
+            <a:pPr>
+              <a:defRPr b="1" sz="2800">
+                <a:solidFill>
+                  <a:srgbClr val="1E3A8A"/>
+                </a:solidFill>
+                <a:latin typeface="Helvetica"/>
+              </a:defRPr>
+            </a:pPr>
+            <a:r>
+              <a:t>Selected Classifier Details: SVM</a:t>
+            </a:r>
+          </a:p>
+        </p:txBody>
+      </p:sp>
+      <p:sp>
+        <p:nvSpPr>
+          <p:cNvPr id="3" name="Rectangle 2"/>
+          <p:cNvSpPr/>
+          <p:nvPr/>
+        </p:nvSpPr>
+        <p:spPr>
+          <a:xfrm>
+            <a:off x="548640" y="1143000"/>
+            <a:ext cx="11094415" cy="36576"/>
+          </a:xfrm>
+          <a:prstGeom prst="rect">
+            <a:avLst/>
+          </a:prstGeom>
+          <a:solidFill>
+            <a:srgbClr val="0F766E"/>
+          </a:solidFill>
+          <a:ln>
+            <a:solidFill>
+              <a:srgbClr val="0F766E"/>
+            </a:solidFill>
+          </a:ln>
+        </p:spPr>
+        <p:style>
+          <a:lnRef idx="1">
+            <a:schemeClr val="accent1"/>
+          </a:lnRef>
+          <a:fillRef idx="3">
+            <a:schemeClr val="accent1"/>
+          </a:fillRef>
+          <a:effectRef idx="2">
+            <a:schemeClr val="accent1"/>
+          </a:effectRef>
+          <a:fontRef idx="minor">
+            <a:schemeClr val="lt1"/>
+          </a:fontRef>
+        </p:style>
+        <p:txBody>
+          <a:bodyPr rtlCol="0" anchor="ctr"/>
+          <a:lstStyle/>
+          <a:p>
+            <a:pPr algn="ctr"/>
+          </a:p>
+        </p:txBody>
+      </p:sp>
+      <p:sp>
+        <p:nvSpPr>
+          <p:cNvPr id="4" name="TextBox 3"/>
+          <p:cNvSpPr txBox="1"/>
+          <p:nvPr/>
+        </p:nvSpPr>
+        <p:spPr>
+          <a:xfrm>
+            <a:off x="731520" y="1645920"/>
+            <a:ext cx="10728655" cy="4572000"/>
+          </a:xfrm>
+          <a:prstGeom prst="rect">
+            <a:avLst/>
+          </a:prstGeom>
+          <a:noFill/>
+        </p:spPr>
+        <p:txBody>
+          <a:bodyPr wrap="square" lIns="0" tIns="0" rIns="0" bIns="0">
+            <a:spAutoFit/>
+          </a:bodyPr>
+          <a:lstStyle/>
+          <a:p>
+            <a:pPr>
+              <a:spcAft>
+                <a:spcPts val="800"/>
+              </a:spcAft>
+              <a:defRPr sz="1500">
+                <a:solidFill>
+                  <a:srgbClr val="1F2937"/>
+                </a:solidFill>
+                <a:latin typeface="Helvetica"/>
+              </a:defRPr>
+            </a:pPr>
+            <a:r>
+              <a:t>• Algorithm Details: Support Vector Classifier (SVC) with Radial Basis Function (RBF) kernel.</a:t>
+            </a:r>
+          </a:p>
+          <a:p>
+            <a:pPr>
+              <a:spcAft>
+                <a:spcPts val="800"/>
+              </a:spcAft>
+              <a:defRPr sz="1500">
+                <a:solidFill>
+                  <a:srgbClr val="1F2937"/>
+                </a:solidFill>
+                <a:latin typeface="Helvetica"/>
+              </a:defRPr>
+            </a:pPr>
+            <a:r>
+              <a:t>• Confusion Matrix Breakdown on Test Set (476 records total):</a:t>
+            </a:r>
+          </a:p>
+          <a:p>
+            <a:pPr lvl="1">
+              <a:spcAft>
+                <a:spcPts val="400"/>
+              </a:spcAft>
+              <a:defRPr sz="1250" i="1">
+                <a:solidFill>
+                  <a:srgbClr val="1F2937"/>
+                </a:solidFill>
+                <a:latin typeface="Helvetica"/>
+              </a:defRPr>
+            </a:pPr>
+            <a:r>
+              <a:t>  - Low Class: 105 actual records | 105 predicted correctly (100% accuracy)</a:t>
+            </a:r>
+          </a:p>
+          <a:p>
+            <a:pPr lvl="1">
+              <a:spcAft>
+                <a:spcPts val="400"/>
+              </a:spcAft>
+              <a:defRPr sz="1250" i="1">
+                <a:solidFill>
+                  <a:srgbClr val="1F2937"/>
+                </a:solidFill>
+                <a:latin typeface="Helvetica"/>
+              </a:defRPr>
+            </a:pPr>
+            <a:r>
+              <a:t>  - Medium Class: 96 actual records | 93 predicted correctly (3 errors, misclassified as Low/High)</a:t>
+            </a:r>
+          </a:p>
+          <a:p>
+            <a:pPr lvl="1">
+              <a:spcAft>
+                <a:spcPts val="400"/>
+              </a:spcAft>
+              <a:defRPr sz="1250" i="1">
+                <a:solidFill>
+                  <a:srgbClr val="1F2937"/>
+                </a:solidFill>
+                <a:latin typeface="Helvetica"/>
+              </a:defRPr>
+            </a:pPr>
+            <a:r>
+              <a:t>  - High Class: 71 actual records | 69 predicted correctly (2 errors, misclassified as Medium/Very High)</a:t>
+            </a:r>
+          </a:p>
+          <a:p>
+            <a:pPr lvl="1">
+              <a:spcAft>
+                <a:spcPts val="400"/>
+              </a:spcAft>
+              <a:defRPr sz="1250" i="1">
+                <a:solidFill>
+                  <a:srgbClr val="1F2937"/>
+                </a:solidFill>
+                <a:latin typeface="Helvetica"/>
+              </a:defRPr>
+            </a:pPr>
+            <a:r>
+              <a:t>  - Very High Class: 204 actual records | 204 predicted correctly (100% accuracy)</a:t>
+            </a:r>
+          </a:p>
+          <a:p>
+            <a:pPr>
+              <a:spcAft>
+                <a:spcPts val="800"/>
+              </a:spcAft>
+              <a:defRPr sz="1500">
+                <a:solidFill>
+                  <a:srgbClr val="1F2937"/>
+                </a:solidFill>
+                <a:latin typeface="Helvetica"/>
+              </a:defRPr>
+            </a:pPr>
+            <a:r>
+              <a:t>• Evaluation Synthesis:</a:t>
+            </a:r>
+          </a:p>
+          <a:p>
+            <a:pPr lvl="1">
+              <a:spcAft>
+                <a:spcPts val="400"/>
+              </a:spcAft>
+              <a:defRPr sz="1250" i="1">
+                <a:solidFill>
+                  <a:srgbClr val="1F2937"/>
+                </a:solidFill>
+                <a:latin typeface="Helvetica"/>
+              </a:defRPr>
+            </a:pPr>
+            <a:r>
+              <a:t>  - SVM demonstrates high separating boundaries on edge threshold values.</a:t>
+            </a:r>
+          </a:p>
+          <a:p>
+            <a:pPr lvl="1">
+              <a:spcAft>
+                <a:spcPts val="400"/>
+              </a:spcAft>
+              <a:defRPr sz="1250" i="1">
+                <a:solidFill>
+                  <a:srgbClr val="1F2937"/>
+                </a:solidFill>
+                <a:latin typeface="Helvetica"/>
+              </a:defRPr>
+            </a:pPr>
+            <a:r>
+              <a:t>  - Outliers show zero impact due to log-scaling of GNI and robust standardized scaling.</a:t>
+            </a:r>
+          </a:p>
+        </p:txBody>
+      </p:sp>
+    </p:spTree>
+  </p:cSld>
+  <p:clrMapOvr>
+    <a:masterClrMapping/>
+  </p:clrMapOvr>
+</p:sld>
+</file>
+
+<file path=ppt/slides/slide11.xml><?xml version="1.0" encoding="utf-8"?>
+<p:sld xmlns:a="http://schemas.openxmlformats.org/drawingml/2006/main" xmlns:p="http://schemas.openxmlformats.org/presentationml/2006/main" xmlns:r="http://schemas.openxmlformats.org/officeDocument/2006/relationships">
+  <p:cSld>
+    <p:bg>
+      <p:bgPr>
+        <a:solidFill>
+          <a:srgbClr val="F3F4F6"/>
+        </a:solidFill>
+        <a:effectLst/>
+      </p:bgPr>
+    </p:bg>
+    <p:spTree>
+      <p:nvGrpSpPr>
+        <p:cNvPr id="1" name=""/>
+        <p:cNvGrpSpPr/>
+        <p:nvPr/>
+      </p:nvGrpSpPr>
+      <p:grpSpPr/>
+      <p:sp>
+        <p:nvSpPr>
+          <p:cNvPr id="2" name="TextBox 1"/>
+          <p:cNvSpPr txBox="1"/>
+          <p:nvPr/>
+        </p:nvSpPr>
+        <p:spPr>
+          <a:xfrm>
+            <a:off x="548640" y="365760"/>
+            <a:ext cx="11094415" cy="731520"/>
+          </a:xfrm>
+          <a:prstGeom prst="rect">
+            <a:avLst/>
+          </a:prstGeom>
+          <a:noFill/>
+        </p:spPr>
+        <p:txBody>
+          <a:bodyPr wrap="square" lIns="0" tIns="0" rIns="0" bIns="0">
+            <a:spAutoFit/>
+          </a:bodyPr>
+          <a:lstStyle/>
+          <a:p>
+            <a:pPr>
+              <a:defRPr b="1" sz="2800">
+                <a:solidFill>
+                  <a:srgbClr val="1E3A8A"/>
+                </a:solidFill>
+                <a:latin typeface="Helvetica"/>
+              </a:defRPr>
+            </a:pPr>
+            <a:r>
+              <a:t>Core Platform Features: Prediction &amp; XAI</a:t>
+            </a:r>
+          </a:p>
+        </p:txBody>
+      </p:sp>
+      <p:sp>
+        <p:nvSpPr>
+          <p:cNvPr id="3" name="Rectangle 2"/>
+          <p:cNvSpPr/>
+          <p:nvPr/>
+        </p:nvSpPr>
+        <p:spPr>
+          <a:xfrm>
+            <a:off x="548640" y="1143000"/>
+            <a:ext cx="11094415" cy="36576"/>
+          </a:xfrm>
+          <a:prstGeom prst="rect">
+            <a:avLst/>
+          </a:prstGeom>
+          <a:solidFill>
+            <a:srgbClr val="0F766E"/>
+          </a:solidFill>
+          <a:ln>
+            <a:solidFill>
+              <a:srgbClr val="0F766E"/>
+            </a:solidFill>
+          </a:ln>
+        </p:spPr>
+        <p:style>
+          <a:lnRef idx="1">
+            <a:schemeClr val="accent1"/>
+          </a:lnRef>
+          <a:fillRef idx="3">
+            <a:schemeClr val="accent1"/>
+          </a:fillRef>
+          <a:effectRef idx="2">
+            <a:schemeClr val="accent1"/>
+          </a:effectRef>
+          <a:fontRef idx="minor">
+            <a:schemeClr val="lt1"/>
+          </a:fontRef>
+        </p:style>
+        <p:txBody>
+          <a:bodyPr rtlCol="0" anchor="ctr"/>
+          <a:lstStyle/>
+          <a:p>
+            <a:pPr algn="ctr"/>
+          </a:p>
+        </p:txBody>
+      </p:sp>
+      <p:sp>
+        <p:nvSpPr>
+          <p:cNvPr id="4" name="TextBox 3"/>
+          <p:cNvSpPr txBox="1"/>
+          <p:nvPr/>
+        </p:nvSpPr>
+        <p:spPr>
+          <a:xfrm>
+            <a:off x="731520" y="1645920"/>
+            <a:ext cx="10728655" cy="4572000"/>
+          </a:xfrm>
+          <a:prstGeom prst="rect">
+            <a:avLst/>
+          </a:prstGeom>
+          <a:noFill/>
+        </p:spPr>
+        <p:txBody>
+          <a:bodyPr wrap="square" lIns="0" tIns="0" rIns="0" bIns="0">
+            <a:spAutoFit/>
+          </a:bodyPr>
+          <a:lstStyle/>
+          <a:p>
+            <a:pPr>
+              <a:spcAft>
+                <a:spcPts val="800"/>
+              </a:spcAft>
+              <a:defRPr sz="1500">
+                <a:solidFill>
+                  <a:srgbClr val="1F2937"/>
+                </a:solidFill>
+                <a:latin typeface="Helvetica"/>
+              </a:defRPr>
+            </a:pPr>
+            <a:r>
+              <a:t>• Real-time Predictive Simulator:</a:t>
+            </a:r>
+          </a:p>
+          <a:p>
+            <a:pPr lvl="1">
+              <a:spcAft>
+                <a:spcPts val="400"/>
+              </a:spcAft>
+              <a:defRPr sz="1250" i="1">
+                <a:solidFill>
+                  <a:srgbClr val="1F2937"/>
+                </a:solidFill>
+                <a:latin typeface="Helvetica"/>
+              </a:defRPr>
+            </a:pPr>
+            <a:r>
+              <a:t>  - Responsive sliders capturing variables in natural units.</a:t>
+            </a:r>
+          </a:p>
+          <a:p>
+            <a:pPr lvl="1">
+              <a:spcAft>
+                <a:spcPts val="400"/>
+              </a:spcAft>
+              <a:defRPr sz="1250" i="1">
+                <a:solidFill>
+                  <a:srgbClr val="1F2937"/>
+                </a:solidFill>
+                <a:latin typeface="Helvetica"/>
+              </a:defRPr>
+            </a:pPr>
+            <a:r>
+              <a:t>  - Validations ensure out-of-bounds parameters are rejected.</a:t>
+            </a:r>
+          </a:p>
+          <a:p>
+            <a:pPr>
+              <a:spcAft>
+                <a:spcPts val="800"/>
+              </a:spcAft>
+              <a:defRPr sz="1500">
+                <a:solidFill>
+                  <a:srgbClr val="1F2937"/>
+                </a:solidFill>
+                <a:latin typeface="Helvetica"/>
+              </a:defRPr>
+            </a:pPr>
+            <a:r>
+              <a:t>• Dual Prediction Output:</a:t>
+            </a:r>
+          </a:p>
+          <a:p>
+            <a:pPr lvl="1">
+              <a:spcAft>
+                <a:spcPts val="400"/>
+              </a:spcAft>
+              <a:defRPr sz="1250" i="1">
+                <a:solidFill>
+                  <a:srgbClr val="1F2937"/>
+                </a:solidFill>
+                <a:latin typeface="Helvetica"/>
+              </a:defRPr>
+            </a:pPr>
+            <a:r>
+              <a:t>  - Category: Deployed SVM classifier outputs Low, Medium, High, or Very High.</a:t>
+            </a:r>
+          </a:p>
+          <a:p>
+            <a:pPr lvl="1">
+              <a:spcAft>
+                <a:spcPts val="400"/>
+              </a:spcAft>
+              <a:defRPr sz="1250" i="1">
+                <a:solidFill>
+                  <a:srgbClr val="1F2937"/>
+                </a:solidFill>
+                <a:latin typeface="Helvetica"/>
+              </a:defRPr>
+            </a:pPr>
+            <a:r>
+              <a:t>  - Score: Deployed companion RF Regressor outputs continuous estimation (e.g. 0.785).</a:t>
+            </a:r>
+          </a:p>
+          <a:p>
+            <a:pPr>
+              <a:spcAft>
+                <a:spcPts val="800"/>
+              </a:spcAft>
+              <a:defRPr sz="1500">
+                <a:solidFill>
+                  <a:srgbClr val="1F2937"/>
+                </a:solidFill>
+                <a:latin typeface="Helvetica"/>
+              </a:defRPr>
+            </a:pPr>
+            <a:r>
+              <a:t>• Interactive Confidence Gauge:</a:t>
+            </a:r>
+          </a:p>
+          <a:p>
+            <a:pPr lvl="1">
+              <a:spcAft>
+                <a:spcPts val="400"/>
+              </a:spcAft>
+              <a:defRPr sz="1250" i="1">
+                <a:solidFill>
+                  <a:srgbClr val="1F2937"/>
+                </a:solidFill>
+                <a:latin typeface="Helvetica"/>
+              </a:defRPr>
+            </a:pPr>
+            <a:r>
+              <a:t>  - Dial displays SVM probability confidence (0 - 100%) dynamically.</a:t>
+            </a:r>
+          </a:p>
+          <a:p>
+            <a:pPr>
+              <a:spcAft>
+                <a:spcPts val="800"/>
+              </a:spcAft>
+              <a:defRPr sz="1500">
+                <a:solidFill>
+                  <a:srgbClr val="1F2937"/>
+                </a:solidFill>
+                <a:latin typeface="Helvetica"/>
+              </a:defRPr>
+            </a:pPr>
+            <a:r>
+              <a:t>• Local Explainable AI (XAI):</a:t>
+            </a:r>
+          </a:p>
+          <a:p>
+            <a:pPr lvl="1">
+              <a:spcAft>
+                <a:spcPts val="400"/>
+              </a:spcAft>
+              <a:defRPr sz="1250" i="1">
+                <a:solidFill>
+                  <a:srgbClr val="1F2937"/>
+                </a:solidFill>
+                <a:latin typeface="Helvetica"/>
+              </a:defRPr>
+            </a:pPr>
+            <a:r>
+              <a:t>  - Extracts and displays model feature contribution vectors, illustrating which socioeconomic indicator drove the prediction.</a:t>
+            </a:r>
+          </a:p>
+        </p:txBody>
+      </p:sp>
+    </p:spTree>
+  </p:cSld>
+  <p:clrMapOvr>
+    <a:masterClrMapping/>
+  </p:clrMapOvr>
+</p:sld>
+</file>
+
+<file path=ppt/slides/slide12.xml><?xml version="1.0" encoding="utf-8"?>
+<p:sld xmlns:a="http://schemas.openxmlformats.org/drawingml/2006/main" xmlns:p="http://schemas.openxmlformats.org/presentationml/2006/main" xmlns:r="http://schemas.openxmlformats.org/officeDocument/2006/relationships">
+  <p:cSld>
+    <p:bg>
+      <p:bgPr>
+        <a:solidFill>
+          <a:srgbClr val="F3F4F6"/>
+        </a:solidFill>
+        <a:effectLst/>
+      </p:bgPr>
+    </p:bg>
+    <p:spTree>
+      <p:nvGrpSpPr>
+        <p:cNvPr id="1" name=""/>
+        <p:cNvGrpSpPr/>
+        <p:nvPr/>
+      </p:nvGrpSpPr>
+      <p:grpSpPr/>
+      <p:sp>
+        <p:nvSpPr>
+          <p:cNvPr id="2" name="TextBox 1"/>
+          <p:cNvSpPr txBox="1"/>
+          <p:nvPr/>
+        </p:nvSpPr>
+        <p:spPr>
+          <a:xfrm>
+            <a:off x="548640" y="365760"/>
+            <a:ext cx="11094415" cy="731520"/>
+          </a:xfrm>
+          <a:prstGeom prst="rect">
+            <a:avLst/>
+          </a:prstGeom>
+          <a:noFill/>
+        </p:spPr>
+        <p:txBody>
+          <a:bodyPr wrap="square" lIns="0" tIns="0" rIns="0" bIns="0">
+            <a:spAutoFit/>
+          </a:bodyPr>
+          <a:lstStyle/>
+          <a:p>
+            <a:pPr>
+              <a:defRPr b="1" sz="2800">
+                <a:solidFill>
+                  <a:srgbClr val="1E3A8A"/>
+                </a:solidFill>
+                <a:latin typeface="Helvetica"/>
+              </a:defRPr>
+            </a:pPr>
+            <a:r>
+              <a:t>Core Features: Policy Advisor &amp; Country Compare</a:t>
+            </a:r>
+          </a:p>
+        </p:txBody>
+      </p:sp>
+      <p:sp>
+        <p:nvSpPr>
+          <p:cNvPr id="3" name="Rectangle 2"/>
+          <p:cNvSpPr/>
+          <p:nvPr/>
+        </p:nvSpPr>
+        <p:spPr>
+          <a:xfrm>
+            <a:off x="548640" y="1143000"/>
+            <a:ext cx="11094415" cy="36576"/>
+          </a:xfrm>
+          <a:prstGeom prst="rect">
+            <a:avLst/>
+          </a:prstGeom>
+          <a:solidFill>
+            <a:srgbClr val="0F766E"/>
+          </a:solidFill>
+          <a:ln>
+            <a:solidFill>
+              <a:srgbClr val="0F766E"/>
+            </a:solidFill>
+          </a:ln>
+        </p:spPr>
+        <p:style>
+          <a:lnRef idx="1">
+            <a:schemeClr val="accent1"/>
+          </a:lnRef>
+          <a:fillRef idx="3">
+            <a:schemeClr val="accent1"/>
+          </a:fillRef>
+          <a:effectRef idx="2">
+            <a:schemeClr val="accent1"/>
+          </a:effectRef>
+          <a:fontRef idx="minor">
+            <a:schemeClr val="lt1"/>
+          </a:fontRef>
+        </p:style>
+        <p:txBody>
+          <a:bodyPr rtlCol="0" anchor="ctr"/>
+          <a:lstStyle/>
+          <a:p>
+            <a:pPr algn="ctr"/>
+          </a:p>
+        </p:txBody>
+      </p:sp>
+      <p:sp>
+        <p:nvSpPr>
+          <p:cNvPr id="4" name="TextBox 3"/>
+          <p:cNvSpPr txBox="1"/>
+          <p:nvPr/>
+        </p:nvSpPr>
+        <p:spPr>
+          <a:xfrm>
+            <a:off x="731520" y="1645920"/>
+            <a:ext cx="10728655" cy="4572000"/>
+          </a:xfrm>
+          <a:prstGeom prst="rect">
+            <a:avLst/>
+          </a:prstGeom>
+          <a:noFill/>
+        </p:spPr>
+        <p:txBody>
+          <a:bodyPr wrap="square" lIns="0" tIns="0" rIns="0" bIns="0">
+            <a:spAutoFit/>
+          </a:bodyPr>
+          <a:lstStyle/>
+          <a:p>
+            <a:pPr>
+              <a:spcAft>
+                <a:spcPts val="800"/>
+              </a:spcAft>
+              <a:defRPr sz="1500">
+                <a:solidFill>
+                  <a:srgbClr val="1F2937"/>
+                </a:solidFill>
+                <a:latin typeface="Helvetica"/>
+              </a:defRPr>
+            </a:pPr>
+            <a:r>
+              <a:t>• Intelligent Development Advisor Recommendations:</a:t>
+            </a:r>
+          </a:p>
+          <a:p>
+            <a:pPr lvl="1">
+              <a:spcAft>
+                <a:spcPts val="400"/>
+              </a:spcAft>
+              <a:defRPr sz="1250" i="1">
+                <a:solidFill>
+                  <a:srgbClr val="1F2937"/>
+                </a:solidFill>
+                <a:latin typeface="Helvetica"/>
+              </a:defRPr>
+            </a:pPr>
+            <a:r>
+              <a:t>  - Dynamic rules parser matches user indicators against global medians.</a:t>
+            </a:r>
+          </a:p>
+          <a:p>
+            <a:pPr lvl="1">
+              <a:spcAft>
+                <a:spcPts val="400"/>
+              </a:spcAft>
+              <a:defRPr sz="1250" i="1">
+                <a:solidFill>
+                  <a:srgbClr val="1F2937"/>
+                </a:solidFill>
+                <a:latin typeface="Helvetica"/>
+              </a:defRPr>
+            </a:pPr>
+            <a:r>
+              <a:t>  - Recommends actionable reforms (e.g., healthcare funding if Life Expectancy is below 72.0 years).</a:t>
+            </a:r>
+          </a:p>
+          <a:p>
+            <a:pPr>
+              <a:spcAft>
+                <a:spcPts val="800"/>
+              </a:spcAft>
+              <a:defRPr sz="1500">
+                <a:solidFill>
+                  <a:srgbClr val="1F2937"/>
+                </a:solidFill>
+                <a:latin typeface="Helvetica"/>
+              </a:defRPr>
+            </a:pPr>
+            <a:r>
+              <a:t>• Side-by-Side Country Comparison:</a:t>
+            </a:r>
+          </a:p>
+          <a:p>
+            <a:pPr lvl="1">
+              <a:spcAft>
+                <a:spcPts val="400"/>
+              </a:spcAft>
+              <a:defRPr sz="1250" i="1">
+                <a:solidFill>
+                  <a:srgbClr val="1F2937"/>
+                </a:solidFill>
+                <a:latin typeface="Helvetica"/>
+              </a:defRPr>
+            </a:pPr>
+            <a:r>
+              <a:t>  - Dropdown containing list of real-world countries.</a:t>
+            </a:r>
+          </a:p>
+          <a:p>
+            <a:pPr lvl="1">
+              <a:spcAft>
+                <a:spcPts val="400"/>
+              </a:spcAft>
+              <a:defRPr sz="1250" i="1">
+                <a:solidFill>
+                  <a:srgbClr val="1F2937"/>
+                </a:solidFill>
+                <a:latin typeface="Helvetica"/>
+              </a:defRPr>
+            </a:pPr>
+            <a:r>
+              <a:t>  - Select any nation to overlay your custom profile against their official UNDP benchmarks.</a:t>
+            </a:r>
+          </a:p>
+          <a:p>
+            <a:pPr>
+              <a:spcAft>
+                <a:spcPts val="800"/>
+              </a:spcAft>
+              <a:defRPr sz="1500">
+                <a:solidFill>
+                  <a:srgbClr val="1F2937"/>
+                </a:solidFill>
+                <a:latin typeface="Helvetica"/>
+              </a:defRPr>
+            </a:pPr>
+            <a:r>
+              <a:t>• Trend Analytics Dashboard:</a:t>
+            </a:r>
+          </a:p>
+          <a:p>
+            <a:pPr lvl="1">
+              <a:spcAft>
+                <a:spcPts val="400"/>
+              </a:spcAft>
+              <a:defRPr sz="1250" i="1">
+                <a:solidFill>
+                  <a:srgbClr val="1F2937"/>
+                </a:solidFill>
+                <a:latin typeface="Helvetica"/>
+              </a:defRPr>
+            </a:pPr>
+            <a:r>
+              <a:t>  - Displays aggregate graphs: prediction categories distribution, history logs trends over time.</a:t>
+            </a:r>
+          </a:p>
+          <a:p>
+            <a:pPr>
+              <a:spcAft>
+                <a:spcPts val="800"/>
+              </a:spcAft>
+              <a:defRPr sz="1500">
+                <a:solidFill>
+                  <a:srgbClr val="1F2937"/>
+                </a:solidFill>
+                <a:latin typeface="Helvetica"/>
+              </a:defRPr>
+            </a:pPr>
+            <a:r>
+              <a:t>• Sample Predictions Profile Templates:</a:t>
+            </a:r>
+          </a:p>
+          <a:p>
+            <a:pPr lvl="1">
+              <a:spcAft>
+                <a:spcPts val="400"/>
+              </a:spcAft>
+              <a:defRPr sz="1250" i="1">
+                <a:solidFill>
+                  <a:srgbClr val="1F2937"/>
+                </a:solidFill>
+                <a:latin typeface="Helvetica"/>
+              </a:defRPr>
+            </a:pPr>
+            <a:r>
+              <a:t>  - Preloads geographic profiles (Nordic region, Sub-Saharan Africa, East Asia) for quick simulator testing.</a:t>
+            </a:r>
+          </a:p>
+        </p:txBody>
+      </p:sp>
+    </p:spTree>
+  </p:cSld>
+  <p:clrMapOvr>
+    <a:masterClrMapping/>
+  </p:clrMapOvr>
+</p:sld>
+</file>
+
+<file path=ppt/slides/slide13.xml><?xml version="1.0" encoding="utf-8"?>
+<p:sld xmlns:a="http://schemas.openxmlformats.org/drawingml/2006/main" xmlns:p="http://schemas.openxmlformats.org/presentationml/2006/main" xmlns:r="http://schemas.openxmlformats.org/officeDocument/2006/relationships">
+  <p:cSld>
+    <p:bg>
+      <p:bgPr>
+        <a:solidFill>
+          <a:srgbClr val="F3F4F6"/>
+        </a:solidFill>
+        <a:effectLst/>
+      </p:bgPr>
+    </p:bg>
+    <p:spTree>
+      <p:nvGrpSpPr>
+        <p:cNvPr id="1" name=""/>
+        <p:cNvGrpSpPr/>
+        <p:nvPr/>
+      </p:nvGrpSpPr>
+      <p:grpSpPr/>
+      <p:sp>
+        <p:nvSpPr>
+          <p:cNvPr id="2" name="TextBox 1"/>
+          <p:cNvSpPr txBox="1"/>
+          <p:nvPr/>
+        </p:nvSpPr>
+        <p:spPr>
+          <a:xfrm>
+            <a:off x="548640" y="365760"/>
+            <a:ext cx="11094415" cy="731520"/>
+          </a:xfrm>
+          <a:prstGeom prst="rect">
+            <a:avLst/>
+          </a:prstGeom>
+          <a:noFill/>
+        </p:spPr>
+        <p:txBody>
+          <a:bodyPr wrap="square" lIns="0" tIns="0" rIns="0" bIns="0">
+            <a:spAutoFit/>
+          </a:bodyPr>
+          <a:lstStyle/>
+          <a:p>
+            <a:pPr>
+              <a:defRPr b="1" sz="2800">
+                <a:solidFill>
+                  <a:srgbClr val="1E3A8A"/>
+                </a:solidFill>
+                <a:latin typeface="Helvetica"/>
+              </a:defRPr>
+            </a:pPr>
+            <a:r>
+              <a:t>Core Features: Exports &amp; Style Themes</a:t>
+            </a:r>
+          </a:p>
+        </p:txBody>
+      </p:sp>
+      <p:sp>
+        <p:nvSpPr>
+          <p:cNvPr id="3" name="Rectangle 2"/>
+          <p:cNvSpPr/>
+          <p:nvPr/>
+        </p:nvSpPr>
+        <p:spPr>
+          <a:xfrm>
+            <a:off x="548640" y="1143000"/>
+            <a:ext cx="11094415" cy="36576"/>
+          </a:xfrm>
+          <a:prstGeom prst="rect">
+            <a:avLst/>
+          </a:prstGeom>
+          <a:solidFill>
+            <a:srgbClr val="0F766E"/>
+          </a:solidFill>
+          <a:ln>
+            <a:solidFill>
+              <a:srgbClr val="0F766E"/>
+            </a:solidFill>
+          </a:ln>
+        </p:spPr>
+        <p:style>
+          <a:lnRef idx="1">
+            <a:schemeClr val="accent1"/>
+          </a:lnRef>
+          <a:fillRef idx="3">
+            <a:schemeClr val="accent1"/>
+          </a:fillRef>
+          <a:effectRef idx="2">
+            <a:schemeClr val="accent1"/>
+          </a:effectRef>
+          <a:fontRef idx="minor">
+            <a:schemeClr val="lt1"/>
+          </a:fontRef>
+        </p:style>
+        <p:txBody>
+          <a:bodyPr rtlCol="0" anchor="ctr"/>
+          <a:lstStyle/>
+          <a:p>
+            <a:pPr algn="ctr"/>
+          </a:p>
+        </p:txBody>
+      </p:sp>
+      <p:sp>
+        <p:nvSpPr>
+          <p:cNvPr id="4" name="TextBox 3"/>
+          <p:cNvSpPr txBox="1"/>
+          <p:nvPr/>
+        </p:nvSpPr>
+        <p:spPr>
+          <a:xfrm>
+            <a:off x="731520" y="1645920"/>
+            <a:ext cx="10728655" cy="4572000"/>
+          </a:xfrm>
+          <a:prstGeom prst="rect">
+            <a:avLst/>
+          </a:prstGeom>
+          <a:noFill/>
+        </p:spPr>
+        <p:txBody>
+          <a:bodyPr wrap="square" lIns="0" tIns="0" rIns="0" bIns="0">
+            <a:spAutoFit/>
+          </a:bodyPr>
+          <a:lstStyle/>
+          <a:p>
+            <a:pPr>
+              <a:spcAft>
+                <a:spcPts val="800"/>
+              </a:spcAft>
+              <a:defRPr sz="1500">
+                <a:solidFill>
+                  <a:srgbClr val="1F2937"/>
+                </a:solidFill>
+                <a:latin typeface="Helvetica"/>
+              </a:defRPr>
+            </a:pPr>
+            <a:r>
+              <a:t>• Historical Simulation Log Database:</a:t>
+            </a:r>
+          </a:p>
+          <a:p>
+            <a:pPr lvl="1">
+              <a:spcAft>
+                <a:spcPts val="400"/>
+              </a:spcAft>
+              <a:defRPr sz="1250" i="1">
+                <a:solidFill>
+                  <a:srgbClr val="1F2937"/>
+                </a:solidFill>
+                <a:latin typeface="Helvetica"/>
+              </a:defRPr>
+            </a:pPr>
+            <a:r>
+              <a:t>  - Persistent SQLite table writes all simulator runs.</a:t>
+            </a:r>
+          </a:p>
+          <a:p>
+            <a:pPr lvl="1">
+              <a:spcAft>
+                <a:spcPts val="400"/>
+              </a:spcAft>
+              <a:defRPr sz="1250" i="1">
+                <a:solidFill>
+                  <a:srgbClr val="1F2937"/>
+                </a:solidFill>
+                <a:latin typeface="Helvetica"/>
+              </a:defRPr>
+            </a:pPr>
+            <a:r>
+              <a:t>  - Main interface lists recent runs, enabling easy review, search, or deletion.</a:t>
+            </a:r>
+          </a:p>
+          <a:p>
+            <a:pPr>
+              <a:spcAft>
+                <a:spcPts val="800"/>
+              </a:spcAft>
+              <a:defRPr sz="1500">
+                <a:solidFill>
+                  <a:srgbClr val="1F2937"/>
+                </a:solidFill>
+                <a:latin typeface="Helvetica"/>
+              </a:defRPr>
+            </a:pPr>
+            <a:r>
+              <a:t>• Dynamic ReportLab PDF Exports:</a:t>
+            </a:r>
+          </a:p>
+          <a:p>
+            <a:pPr lvl="1">
+              <a:spcAft>
+                <a:spcPts val="400"/>
+              </a:spcAft>
+              <a:defRPr sz="1250" i="1">
+                <a:solidFill>
+                  <a:srgbClr val="1F2937"/>
+                </a:solidFill>
+                <a:latin typeface="Helvetica"/>
+              </a:defRPr>
+            </a:pPr>
+            <a:r>
+              <a:t>  - Single-click PDF generator compiles structured reports on the server side.</a:t>
+            </a:r>
+          </a:p>
+          <a:p>
+            <a:pPr lvl="1">
+              <a:spcAft>
+                <a:spcPts val="400"/>
+              </a:spcAft>
+              <a:defRPr sz="1250" i="1">
+                <a:solidFill>
+                  <a:srgbClr val="1F2937"/>
+                </a:solidFill>
+                <a:latin typeface="Helvetica"/>
+              </a:defRPr>
+            </a:pPr>
+            <a:r>
+              <a:t>  - Includes indicators, prediction outcomes, confidence score, XAI weights, and policy advice.</a:t>
+            </a:r>
+          </a:p>
+          <a:p>
+            <a:pPr>
+              <a:spcAft>
+                <a:spcPts val="800"/>
+              </a:spcAft>
+              <a:defRPr sz="1500">
+                <a:solidFill>
+                  <a:srgbClr val="1F2937"/>
+                </a:solidFill>
+                <a:latin typeface="Helvetica"/>
+              </a:defRPr>
+            </a:pPr>
+            <a:r>
+              <a:t>• Local CSV Exporter:</a:t>
+            </a:r>
+          </a:p>
+          <a:p>
+            <a:pPr lvl="1">
+              <a:spcAft>
+                <a:spcPts val="400"/>
+              </a:spcAft>
+              <a:defRPr sz="1250" i="1">
+                <a:solidFill>
+                  <a:srgbClr val="1F2937"/>
+                </a:solidFill>
+                <a:latin typeface="Helvetica"/>
+              </a:defRPr>
+            </a:pPr>
+            <a:r>
+              <a:t>  - Allows exporting full historical simulation database tables to standard CSV format.</a:t>
+            </a:r>
+          </a:p>
+          <a:p>
+            <a:pPr>
+              <a:spcAft>
+                <a:spcPts val="800"/>
+              </a:spcAft>
+              <a:defRPr sz="1500">
+                <a:solidFill>
+                  <a:srgbClr val="1F2937"/>
+                </a:solidFill>
+                <a:latin typeface="Helvetica"/>
+              </a:defRPr>
+            </a:pPr>
+            <a:r>
+              <a:t>• Light &amp; Dark Theme Support:</a:t>
+            </a:r>
+          </a:p>
+          <a:p>
+            <a:pPr lvl="1">
+              <a:spcAft>
+                <a:spcPts val="400"/>
+              </a:spcAft>
+              <a:defRPr sz="1250" i="1">
+                <a:solidFill>
+                  <a:srgbClr val="1F2937"/>
+                </a:solidFill>
+                <a:latin typeface="Helvetica"/>
+              </a:defRPr>
+            </a:pPr>
+            <a:r>
+              <a:t>  - Seamless CSS variables implementation for modern night-time interface styling.</a:t>
+            </a:r>
+          </a:p>
+        </p:txBody>
+      </p:sp>
+    </p:spTree>
+  </p:cSld>
+  <p:clrMapOvr>
+    <a:masterClrMapping/>
+  </p:clrMapOvr>
+</p:sld>
+</file>
+
+<file path=ppt/slides/slide14.xml><?xml version="1.0" encoding="utf-8"?>
+<p:sld xmlns:a="http://schemas.openxmlformats.org/drawingml/2006/main" xmlns:p="http://schemas.openxmlformats.org/presentationml/2006/main" xmlns:r="http://schemas.openxmlformats.org/officeDocument/2006/relationships">
+  <p:cSld>
+    <p:bg>
+      <p:bgPr>
+        <a:solidFill>
+          <a:srgbClr val="F3F4F6"/>
+        </a:solidFill>
+        <a:effectLst/>
+      </p:bgPr>
+    </p:bg>
+    <p:spTree>
+      <p:nvGrpSpPr>
+        <p:cNvPr id="1" name=""/>
+        <p:cNvGrpSpPr/>
+        <p:nvPr/>
+      </p:nvGrpSpPr>
+      <p:grpSpPr/>
+      <p:sp>
+        <p:nvSpPr>
+          <p:cNvPr id="2" name="TextBox 1"/>
+          <p:cNvSpPr txBox="1"/>
+          <p:nvPr/>
+        </p:nvSpPr>
+        <p:spPr>
+          <a:xfrm>
+            <a:off x="548640" y="365760"/>
+            <a:ext cx="11094415" cy="731520"/>
+          </a:xfrm>
+          <a:prstGeom prst="rect">
+            <a:avLst/>
+          </a:prstGeom>
+          <a:noFill/>
+        </p:spPr>
+        <p:txBody>
+          <a:bodyPr wrap="square" lIns="0" tIns="0" rIns="0" bIns="0">
+            <a:spAutoFit/>
+          </a:bodyPr>
+          <a:lstStyle/>
+          <a:p>
+            <a:pPr>
+              <a:defRPr b="1" sz="2800">
+                <a:solidFill>
+                  <a:srgbClr val="1E3A8A"/>
+                </a:solidFill>
+                <a:latin typeface="Helvetica"/>
+              </a:defRPr>
+            </a:pPr>
+            <a:r>
+              <a:t>Interface Walkthrough &amp; Screenshots</a:t>
+            </a:r>
+          </a:p>
+        </p:txBody>
+      </p:sp>
+      <p:sp>
+        <p:nvSpPr>
+          <p:cNvPr id="3" name="Rectangle 2"/>
+          <p:cNvSpPr/>
+          <p:nvPr/>
+        </p:nvSpPr>
+        <p:spPr>
+          <a:xfrm>
+            <a:off x="548640" y="1143000"/>
+            <a:ext cx="11094415" cy="36576"/>
+          </a:xfrm>
+          <a:prstGeom prst="rect">
+            <a:avLst/>
+          </a:prstGeom>
+          <a:solidFill>
+            <a:srgbClr val="0F766E"/>
+          </a:solidFill>
+          <a:ln>
+            <a:solidFill>
+              <a:srgbClr val="0F766E"/>
+            </a:solidFill>
+          </a:ln>
+        </p:spPr>
+        <p:style>
+          <a:lnRef idx="1">
+            <a:schemeClr val="accent1"/>
+          </a:lnRef>
+          <a:fillRef idx="3">
+            <a:schemeClr val="accent1"/>
+          </a:fillRef>
+          <a:effectRef idx="2">
+            <a:schemeClr val="accent1"/>
+          </a:effectRef>
+          <a:fontRef idx="minor">
+            <a:schemeClr val="lt1"/>
+          </a:fontRef>
+        </p:style>
+        <p:txBody>
+          <a:bodyPr rtlCol="0" anchor="ctr"/>
+          <a:lstStyle/>
+          <a:p>
+            <a:pPr algn="ctr"/>
+          </a:p>
+        </p:txBody>
+      </p:sp>
+      <p:sp>
+        <p:nvSpPr>
+          <p:cNvPr id="4" name="TextBox 3"/>
+          <p:cNvSpPr txBox="1"/>
+          <p:nvPr/>
+        </p:nvSpPr>
+        <p:spPr>
+          <a:xfrm>
+            <a:off x="731520" y="1645920"/>
+            <a:ext cx="10728655" cy="4572000"/>
+          </a:xfrm>
+          <a:prstGeom prst="rect">
+            <a:avLst/>
+          </a:prstGeom>
+          <a:noFill/>
+        </p:spPr>
+        <p:txBody>
+          <a:bodyPr wrap="square" lIns="0" tIns="0" rIns="0" bIns="0">
+            <a:spAutoFit/>
+          </a:bodyPr>
+          <a:lstStyle/>
+          <a:p>
+            <a:pPr>
+              <a:spcAft>
+                <a:spcPts val="800"/>
+              </a:spcAft>
+              <a:defRPr sz="1500">
+                <a:solidFill>
+                  <a:srgbClr val="1F2937"/>
+                </a:solidFill>
+                <a:latin typeface="Helvetica"/>
+              </a:defRPr>
+            </a:pPr>
+            <a:r>
+              <a:t>• A full gallery of screenshots is saved in the /Screenshots directory of the workspace.</a:t>
+            </a:r>
+          </a:p>
+          <a:p>
+            <a:pPr>
+              <a:spcAft>
+                <a:spcPts val="800"/>
+              </a:spcAft>
+              <a:defRPr sz="1500">
+                <a:solidFill>
+                  <a:srgbClr val="1F2937"/>
+                </a:solidFill>
+                <a:latin typeface="Helvetica"/>
+              </a:defRPr>
+            </a:pPr>
+            <a:r>
+              <a:t>• Main Interface Areas:</a:t>
+            </a:r>
+          </a:p>
+          <a:p>
+            <a:pPr lvl="1">
+              <a:spcAft>
+                <a:spcPts val="400"/>
+              </a:spcAft>
+              <a:defRPr sz="1250" i="1">
+                <a:solidFill>
+                  <a:srgbClr val="1F2937"/>
+                </a:solidFill>
+                <a:latin typeface="Helvetica"/>
+              </a:defRPr>
+            </a:pPr>
+            <a:r>
+              <a:t>  - Home Dashboard View: Logs aggregate counts, recent runs list, and theme settings.</a:t>
+            </a:r>
+          </a:p>
+          <a:p>
+            <a:pPr lvl="1">
+              <a:spcAft>
+                <a:spcPts val="400"/>
+              </a:spcAft>
+              <a:defRPr sz="1250" i="1">
+                <a:solidFill>
+                  <a:srgbClr val="1F2937"/>
+                </a:solidFill>
+                <a:latin typeface="Helvetica"/>
+              </a:defRPr>
+            </a:pPr>
+            <a:r>
+              <a:t>  - Predict Simulator: Vertical/horizontal range sliders, Dial gauge, and XAI weights.</a:t>
+            </a:r>
+          </a:p>
+          <a:p>
+            <a:pPr lvl="1">
+              <a:spcAft>
+                <a:spcPts val="400"/>
+              </a:spcAft>
+              <a:defRPr sz="1250" i="1">
+                <a:solidFill>
+                  <a:srgbClr val="1F2937"/>
+                </a:solidFill>
+                <a:latin typeface="Helvetica"/>
+              </a:defRPr>
+            </a:pPr>
+            <a:r>
+              <a:t>  - Country Comparison: Selected benchmark overlays showing index indicator gaps.</a:t>
+            </a:r>
+          </a:p>
+          <a:p>
+            <a:pPr lvl="1">
+              <a:spcAft>
+                <a:spcPts val="400"/>
+              </a:spcAft>
+              <a:defRPr sz="1250" i="1">
+                <a:solidFill>
+                  <a:srgbClr val="1F2937"/>
+                </a:solidFill>
+                <a:latin typeface="Helvetica"/>
+              </a:defRPr>
+            </a:pPr>
+            <a:r>
+              <a:t>  - Model Performance: Displays comparative tables, latency scales, and confusion matrices.</a:t>
+            </a:r>
+          </a:p>
+          <a:p>
+            <a:pPr>
+              <a:spcAft>
+                <a:spcPts val="800"/>
+              </a:spcAft>
+              <a:defRPr sz="1500">
+                <a:solidFill>
+                  <a:srgbClr val="1F2937"/>
+                </a:solidFill>
+                <a:latin typeface="Helvetica"/>
+              </a:defRPr>
+            </a:pPr>
+            <a:r>
+              <a:t>• All screens support responsive styling layouts adapting to tablet, mobile, and desktop views.</a:t>
+            </a:r>
+          </a:p>
+          <a:p>
+            <a:pPr>
+              <a:spcAft>
+                <a:spcPts val="800"/>
+              </a:spcAft>
+              <a:defRPr sz="1500">
+                <a:solidFill>
+                  <a:srgbClr val="1F2937"/>
+                </a:solidFill>
+                <a:latin typeface="Helvetica"/>
+              </a:defRPr>
+            </a:pPr>
+            <a:r>
+              <a:t>• Dark Mode styling renders high-contrast teal indicators on charcoal backgrounds, ensuring visual comfort.</a:t>
+            </a:r>
+          </a:p>
+        </p:txBody>
+      </p:sp>
+    </p:spTree>
+  </p:cSld>
+  <p:clrMapOvr>
+    <a:masterClrMapping/>
+  </p:clrMapOvr>
+</p:sld>
+</file>
+
+<file path=ppt/slides/slide15.xml><?xml version="1.0" encoding="utf-8"?>
+<p:sld xmlns:a="http://schemas.openxmlformats.org/drawingml/2006/main" xmlns:p="http://schemas.openxmlformats.org/presentationml/2006/main" xmlns:r="http://schemas.openxmlformats.org/officeDocument/2006/relationships">
+  <p:cSld>
+    <p:bg>
+      <p:bgPr>
+        <a:solidFill>
+          <a:srgbClr val="F3F4F6"/>
+        </a:solidFill>
+        <a:effectLst/>
+      </p:bgPr>
+    </p:bg>
+    <p:spTree>
+      <p:nvGrpSpPr>
+        <p:cNvPr id="1" name=""/>
+        <p:cNvGrpSpPr/>
+        <p:nvPr/>
+      </p:nvGrpSpPr>
+      <p:grpSpPr/>
+      <p:sp>
+        <p:nvSpPr>
+          <p:cNvPr id="2" name="TextBox 1"/>
+          <p:cNvSpPr txBox="1"/>
+          <p:nvPr/>
+        </p:nvSpPr>
+        <p:spPr>
+          <a:xfrm>
+            <a:off x="548640" y="365760"/>
+            <a:ext cx="11094415" cy="731520"/>
+          </a:xfrm>
+          <a:prstGeom prst="rect">
+            <a:avLst/>
+          </a:prstGeom>
+          <a:noFill/>
+        </p:spPr>
+        <p:txBody>
+          <a:bodyPr wrap="square" lIns="0" tIns="0" rIns="0" bIns="0">
+            <a:spAutoFit/>
+          </a:bodyPr>
+          <a:lstStyle/>
+          <a:p>
+            <a:pPr>
+              <a:defRPr b="1" sz="2800">
+                <a:solidFill>
+                  <a:srgbClr val="1E3A8A"/>
+                </a:solidFill>
+                <a:latin typeface="Helvetica"/>
+              </a:defRPr>
+            </a:pPr>
+            <a:r>
+              <a:t>Quality Assurance &amp; Testing Framework</a:t>
+            </a:r>
+          </a:p>
+        </p:txBody>
+      </p:sp>
+      <p:sp>
+        <p:nvSpPr>
+          <p:cNvPr id="3" name="Rectangle 2"/>
+          <p:cNvSpPr/>
+          <p:nvPr/>
+        </p:nvSpPr>
+        <p:spPr>
+          <a:xfrm>
+            <a:off x="548640" y="1143000"/>
+            <a:ext cx="11094415" cy="36576"/>
+          </a:xfrm>
+          <a:prstGeom prst="rect">
+            <a:avLst/>
+          </a:prstGeom>
+          <a:solidFill>
+            <a:srgbClr val="0F766E"/>
+          </a:solidFill>
+          <a:ln>
+            <a:solidFill>
+              <a:srgbClr val="0F766E"/>
+            </a:solidFill>
+          </a:ln>
+        </p:spPr>
+        <p:style>
+          <a:lnRef idx="1">
+            <a:schemeClr val="accent1"/>
+          </a:lnRef>
+          <a:fillRef idx="3">
+            <a:schemeClr val="accent1"/>
+          </a:fillRef>
+          <a:effectRef idx="2">
+            <a:schemeClr val="accent1"/>
+          </a:effectRef>
+          <a:fontRef idx="minor">
+            <a:schemeClr val="lt1"/>
+          </a:fontRef>
+        </p:style>
+        <p:txBody>
+          <a:bodyPr rtlCol="0" anchor="ctr"/>
+          <a:lstStyle/>
+          <a:p>
+            <a:pPr algn="ctr"/>
+          </a:p>
+        </p:txBody>
+      </p:sp>
+      <p:graphicFrame>
+        <p:nvGraphicFramePr>
+          <p:cNvPr id="4" name="Table 3"/>
+          <p:cNvGraphicFramePr>
+            <a:graphicFrameLocks noGrp="1"/>
+          </p:cNvGraphicFramePr>
+          <p:nvPr/>
+        </p:nvGraphicFramePr>
+        <p:xfrm>
+          <a:off x="731520" y="1645920"/>
+          <a:ext cx="10728655" cy="3200400"/>
+        </p:xfrm>
+        <a:graphic>
+          <a:graphicData uri="http://schemas.openxmlformats.org/drawingml/2006/table">
+            <a:tbl>
+              <a:tblPr firstRow="1" bandRow="1">
+                <a:tableStyleId>{5C22544A-7EE6-4342-B048-85BDC9FD1C3A}</a:tableStyleId>
+              </a:tblPr>
+              <a:tblGrid>
+                <a:gridCol w="2682163"/>
+                <a:gridCol w="2682163"/>
+                <a:gridCol w="2682163"/>
+                <a:gridCol w="2682166"/>
+              </a:tblGrid>
+              <a:tr h="533400">
+                <a:tc>
+                  <a:txBody>
+                    <a:bodyPr/>
+                    <a:lstStyle/>
+                    <a:p>
+                      <a:pPr algn="l">
+                        <a:defRPr b="1" sz="1200">
+                          <a:solidFill>
+                            <a:srgbClr val="FFFFFF"/>
+                          </a:solidFill>
+                          <a:latin typeface="Helvetica"/>
+                        </a:defRPr>
+                      </a:pPr>
+                      <a:r>
+                        <a:t>ID</a:t>
+                      </a:r>
+                    </a:p>
+                  </a:txBody>
+                  <a:tcPr>
+                    <a:solidFill>
+                      <a:srgbClr val="1E3A8A"/>
+                    </a:solidFill>
+                  </a:tcPr>
+                </a:tc>
+                <a:tc>
+                  <a:txBody>
+                    <a:bodyPr/>
+                    <a:lstStyle/>
+                    <a:p>
+                      <a:pPr algn="l">
+                        <a:defRPr b="1" sz="1200">
+                          <a:solidFill>
+                            <a:srgbClr val="FFFFFF"/>
+                          </a:solidFill>
+                          <a:latin typeface="Helvetica"/>
+                        </a:defRPr>
+                      </a:pPr>
+                      <a:r>
+                        <a:t>Test Case Description</a:t>
+                      </a:r>
+                    </a:p>
+                  </a:txBody>
+                  <a:tcPr>
+                    <a:solidFill>
+                      <a:srgbClr val="1E3A8A"/>
+                    </a:solidFill>
+                  </a:tcPr>
+                </a:tc>
+                <a:tc>
+                  <a:txBody>
+                    <a:bodyPr/>
+                    <a:lstStyle/>
+                    <a:p>
+                      <a:pPr algn="l">
+                        <a:defRPr b="1" sz="1200">
+                          <a:solidFill>
+                            <a:srgbClr val="FFFFFF"/>
+                          </a:solidFill>
+                          <a:latin typeface="Helvetica"/>
+                        </a:defRPr>
+                      </a:pPr>
+                      <a:r>
+                        <a:t>Expected Behavior / Result</a:t>
+                      </a:r>
+                    </a:p>
+                  </a:txBody>
+                  <a:tcPr>
+                    <a:solidFill>
+                      <a:srgbClr val="1E3A8A"/>
+                    </a:solidFill>
+                  </a:tcPr>
+                </a:tc>
+                <a:tc>
+                  <a:txBody>
+                    <a:bodyPr/>
+                    <a:lstStyle/>
+                    <a:p>
+                      <a:pPr algn="l">
+                        <a:defRPr b="1" sz="1200">
+                          <a:solidFill>
+                            <a:srgbClr val="FFFFFF"/>
+                          </a:solidFill>
+                          <a:latin typeface="Helvetica"/>
+                        </a:defRPr>
+                      </a:pPr>
+                      <a:r>
+                        <a:t>Status</a:t>
+                      </a:r>
+                    </a:p>
+                  </a:txBody>
+                  <a:tcPr>
+                    <a:solidFill>
+                      <a:srgbClr val="1E3A8A"/>
+                    </a:solidFill>
+                  </a:tcPr>
+                </a:tc>
+              </a:tr>
+              <a:tr h="533400">
+                <a:tc>
+                  <a:txBody>
+                    <a:bodyPr/>
+                    <a:lstStyle/>
+                    <a:p>
+                      <a:pPr algn="l">
+                        <a:defRPr b="0" sz="1000">
+                          <a:solidFill>
+                            <a:srgbClr val="1F2937"/>
+                          </a:solidFill>
+                          <a:latin typeface="Helvetica"/>
+                        </a:defRPr>
+                      </a:pPr>
+                      <a:r>
+                        <a:t>TC-001</a:t>
+                      </a:r>
+                    </a:p>
+                  </a:txBody>
+                  <a:tcPr>
+                    <a:solidFill>
+                      <a:srgbClr val="FFFFFF"/>
+                    </a:solidFill>
+                  </a:tcPr>
+                </a:tc>
+                <a:tc>
+                  <a:txBody>
+                    <a:bodyPr/>
+                    <a:lstStyle/>
+                    <a:p>
+                      <a:pPr algn="l">
+                        <a:defRPr b="0" sz="1000">
+                          <a:solidFill>
+                            <a:srgbClr val="1F2937"/>
+                          </a:solidFill>
+                          <a:latin typeface="Helvetica"/>
+                        </a:defRPr>
+                      </a:pPr>
+                      <a:r>
+                        <a:t>Home rendering (GET /)</a:t>
+                      </a:r>
+                    </a:p>
+                  </a:txBody>
+                  <a:tcPr>
+                    <a:solidFill>
+                      <a:srgbClr val="FFFFFF"/>
+                    </a:solidFill>
+                  </a:tcPr>
+                </a:tc>
+                <a:tc>
+                  <a:txBody>
+                    <a:bodyPr/>
+                    <a:lstStyle/>
+                    <a:p>
+                      <a:pPr algn="l">
+                        <a:defRPr b="0" sz="1000">
+                          <a:solidFill>
+                            <a:srgbClr val="1F2937"/>
+                          </a:solidFill>
+                          <a:latin typeface="Helvetica"/>
+                        </a:defRPr>
+                      </a:pPr>
+                      <a:r>
+                        <a:t>HTTP 200, HTML page with layout form renders</a:t>
+                      </a:r>
+                    </a:p>
+                  </a:txBody>
+                  <a:tcPr>
+                    <a:solidFill>
+                      <a:srgbClr val="FFFFFF"/>
+                    </a:solidFill>
+                  </a:tcPr>
+                </a:tc>
+                <a:tc>
+                  <a:txBody>
+                    <a:bodyPr/>
+                    <a:lstStyle/>
+                    <a:p>
+                      <a:pPr algn="l">
+                        <a:defRPr b="1" sz="1000">
+                          <a:solidFill>
+                            <a:srgbClr val="0F766E"/>
+                          </a:solidFill>
+                          <a:latin typeface="Helvetica"/>
+                        </a:defRPr>
+                      </a:pPr>
+                      <a:r>
+                        <a:t>PASS</a:t>
+                      </a:r>
+                    </a:p>
+                  </a:txBody>
+                  <a:tcPr>
+                    <a:solidFill>
+                      <a:srgbClr val="FFFFFF"/>
+                    </a:solidFill>
+                  </a:tcPr>
+                </a:tc>
+              </a:tr>
+              <a:tr h="533400">
+                <a:tc>
+                  <a:txBody>
+                    <a:bodyPr/>
+                    <a:lstStyle/>
+                    <a:p>
+                      <a:pPr algn="l">
+                        <a:defRPr b="0" sz="1000">
+                          <a:solidFill>
+                            <a:srgbClr val="1F2937"/>
+                          </a:solidFill>
+                          <a:latin typeface="Helvetica"/>
+                        </a:defRPr>
+                      </a:pPr>
+                      <a:r>
+                        <a:t>TC-002</a:t>
+                      </a:r>
+                    </a:p>
+                  </a:txBody>
+                  <a:tcPr>
+                    <a:solidFill>
+                      <a:srgbClr val="F3F4F6"/>
+                    </a:solidFill>
+                  </a:tcPr>
+                </a:tc>
+                <a:tc>
+                  <a:txBody>
+                    <a:bodyPr/>
+                    <a:lstStyle/>
+                    <a:p>
+                      <a:pPr algn="l">
+                        <a:defRPr b="0" sz="1000">
+                          <a:solidFill>
+                            <a:srgbClr val="1F2937"/>
+                          </a:solidFill>
+                          <a:latin typeface="Helvetica"/>
+                        </a:defRPr>
+                      </a:pPr>
+                      <a:r>
+                        <a:t>Prediction success (POST /predict)</a:t>
+                      </a:r>
+                    </a:p>
+                  </a:txBody>
+                  <a:tcPr>
+                    <a:solidFill>
+                      <a:srgbClr val="F3F4F6"/>
+                    </a:solidFill>
+                  </a:tcPr>
+                </a:tc>
+                <a:tc>
+                  <a:txBody>
+                    <a:bodyPr/>
+                    <a:lstStyle/>
+                    <a:p>
+                      <a:pPr algn="l">
+                        <a:defRPr b="0" sz="1000">
+                          <a:solidFill>
+                            <a:srgbClr val="1F2937"/>
+                          </a:solidFill>
+                          <a:latin typeface="Helvetica"/>
+                        </a:defRPr>
+                      </a:pPr>
+                      <a:r>
+                        <a:t>HTTP 200, returns prediction and confidence variables</a:t>
+                      </a:r>
+                    </a:p>
+                  </a:txBody>
+                  <a:tcPr>
+                    <a:solidFill>
+                      <a:srgbClr val="F3F4F6"/>
+                    </a:solidFill>
+                  </a:tcPr>
+                </a:tc>
+                <a:tc>
+                  <a:txBody>
+                    <a:bodyPr/>
+                    <a:lstStyle/>
+                    <a:p>
+                      <a:pPr algn="l">
+                        <a:defRPr b="1" sz="1000">
+                          <a:solidFill>
+                            <a:srgbClr val="0F766E"/>
+                          </a:solidFill>
+                          <a:latin typeface="Helvetica"/>
+                        </a:defRPr>
+                      </a:pPr>
+                      <a:r>
+                        <a:t>PASS</a:t>
+                      </a:r>
+                    </a:p>
+                  </a:txBody>
+                  <a:tcPr>
+                    <a:solidFill>
+                      <a:srgbClr val="F3F4F6"/>
+                    </a:solidFill>
+                  </a:tcPr>
+                </a:tc>
+              </a:tr>
+              <a:tr h="533400">
+                <a:tc>
+                  <a:txBody>
+                    <a:bodyPr/>
+                    <a:lstStyle/>
+                    <a:p>
+                      <a:pPr algn="l">
+                        <a:defRPr b="0" sz="1000">
+                          <a:solidFill>
+                            <a:srgbClr val="1F2937"/>
+                          </a:solidFill>
+                          <a:latin typeface="Helvetica"/>
+                        </a:defRPr>
+                      </a:pPr>
+                      <a:r>
+                        <a:t>TC-003</a:t>
+                      </a:r>
+                    </a:p>
+                  </a:txBody>
+                  <a:tcPr>
+                    <a:solidFill>
+                      <a:srgbClr val="FFFFFF"/>
+                    </a:solidFill>
+                  </a:tcPr>
+                </a:tc>
+                <a:tc>
+                  <a:txBody>
+                    <a:bodyPr/>
+                    <a:lstStyle/>
+                    <a:p>
+                      <a:pPr algn="l">
+                        <a:defRPr b="0" sz="1000">
+                          <a:solidFill>
+                            <a:srgbClr val="1F2937"/>
+                          </a:solidFill>
+                          <a:latin typeface="Helvetica"/>
+                        </a:defRPr>
+                      </a:pPr>
+                      <a:r>
+                        <a:t>Validation limits Min (slider edge)</a:t>
+                      </a:r>
+                    </a:p>
+                  </a:txBody>
+                  <a:tcPr>
+                    <a:solidFill>
+                      <a:srgbClr val="FFFFFF"/>
+                    </a:solidFill>
+                  </a:tcPr>
+                </a:tc>
+                <a:tc>
+                  <a:txBody>
+                    <a:bodyPr/>
+                    <a:lstStyle/>
+                    <a:p>
+                      <a:pPr algn="l">
+                        <a:defRPr b="0" sz="1000">
+                          <a:solidFill>
+                            <a:srgbClr val="1F2937"/>
+                          </a:solidFill>
+                          <a:latin typeface="Helvetica"/>
+                        </a:defRPr>
+                      </a:pPr>
+                      <a:r>
+                        <a:t>Life: 20.0 (Min edge) results in class 'Low'</a:t>
+                      </a:r>
+                    </a:p>
+                  </a:txBody>
+                  <a:tcPr>
+                    <a:solidFill>
+                      <a:srgbClr val="FFFFFF"/>
+                    </a:solidFill>
+                  </a:tcPr>
+                </a:tc>
+                <a:tc>
+                  <a:txBody>
+                    <a:bodyPr/>
+                    <a:lstStyle/>
+                    <a:p>
+                      <a:pPr algn="l">
+                        <a:defRPr b="1" sz="1000">
+                          <a:solidFill>
+                            <a:srgbClr val="0F766E"/>
+                          </a:solidFill>
+                          <a:latin typeface="Helvetica"/>
+                        </a:defRPr>
+                      </a:pPr>
+                      <a:r>
+                        <a:t>PASS</a:t>
+                      </a:r>
+                    </a:p>
+                  </a:txBody>
+                  <a:tcPr>
+                    <a:solidFill>
+                      <a:srgbClr val="FFFFFF"/>
+                    </a:solidFill>
+                  </a:tcPr>
+                </a:tc>
+              </a:tr>
+              <a:tr h="533400">
+                <a:tc>
+                  <a:txBody>
+                    <a:bodyPr/>
+                    <a:lstStyle/>
+                    <a:p>
+                      <a:pPr algn="l">
+                        <a:defRPr b="0" sz="1000">
+                          <a:solidFill>
+                            <a:srgbClr val="1F2937"/>
+                          </a:solidFill>
+                          <a:latin typeface="Helvetica"/>
+                        </a:defRPr>
+                      </a:pPr>
+                      <a:r>
+                        <a:t>TC-004</a:t>
+                      </a:r>
+                    </a:p>
+                  </a:txBody>
+                  <a:tcPr>
+                    <a:solidFill>
+                      <a:srgbClr val="F3F4F6"/>
+                    </a:solidFill>
+                  </a:tcPr>
+                </a:tc>
+                <a:tc>
+                  <a:txBody>
+                    <a:bodyPr/>
+                    <a:lstStyle/>
+                    <a:p>
+                      <a:pPr algn="l">
+                        <a:defRPr b="0" sz="1000">
+                          <a:solidFill>
+                            <a:srgbClr val="1F2937"/>
+                          </a:solidFill>
+                          <a:latin typeface="Helvetica"/>
+                        </a:defRPr>
+                      </a:pPr>
+                      <a:r>
+                        <a:t>Validation limits Max (slider edge)</a:t>
+                      </a:r>
+                    </a:p>
+                  </a:txBody>
+                  <a:tcPr>
+                    <a:solidFill>
+                      <a:srgbClr val="F3F4F6"/>
+                    </a:solidFill>
+                  </a:tcPr>
+                </a:tc>
+                <a:tc>
+                  <a:txBody>
+                    <a:bodyPr/>
+                    <a:lstStyle/>
+                    <a:p>
+                      <a:pPr algn="l">
+                        <a:defRPr b="0" sz="1000">
+                          <a:solidFill>
+                            <a:srgbClr val="1F2937"/>
+                          </a:solidFill>
+                          <a:latin typeface="Helvetica"/>
+                        </a:defRPr>
+                      </a:pPr>
+                      <a:r>
+                        <a:t>Life: 100.0 (Max edge) results in class 'Very High'</a:t>
+                      </a:r>
+                    </a:p>
+                  </a:txBody>
+                  <a:tcPr>
+                    <a:solidFill>
+                      <a:srgbClr val="F3F4F6"/>
+                    </a:solidFill>
+                  </a:tcPr>
+                </a:tc>
+                <a:tc>
+                  <a:txBody>
+                    <a:bodyPr/>
+                    <a:lstStyle/>
+                    <a:p>
+                      <a:pPr algn="l">
+                        <a:defRPr b="1" sz="1000">
+                          <a:solidFill>
+                            <a:srgbClr val="0F766E"/>
+                          </a:solidFill>
+                          <a:latin typeface="Helvetica"/>
+                        </a:defRPr>
+                      </a:pPr>
+                      <a:r>
+                        <a:t>PASS</a:t>
+                      </a:r>
+                    </a:p>
+                  </a:txBody>
+                  <a:tcPr>
+                    <a:solidFill>
+                      <a:srgbClr val="F3F4F6"/>
+                    </a:solidFill>
+                  </a:tcPr>
+                </a:tc>
+              </a:tr>
+              <a:tr h="533400">
+                <a:tc>
+                  <a:txBody>
+                    <a:bodyPr/>
+                    <a:lstStyle/>
+                    <a:p>
+                      <a:pPr algn="l">
+                        <a:defRPr b="0" sz="1000">
+                          <a:solidFill>
+                            <a:srgbClr val="1F2937"/>
+                          </a:solidFill>
+                          <a:latin typeface="Helvetica"/>
+                        </a:defRPr>
+                      </a:pPr>
+                      <a:r>
+                        <a:t>TC-005</a:t>
+                      </a:r>
+                    </a:p>
+                  </a:txBody>
+                  <a:tcPr>
+                    <a:solidFill>
+                      <a:srgbClr val="FFFFFF"/>
+                    </a:solidFill>
+                  </a:tcPr>
+                </a:tc>
+                <a:tc>
+                  <a:txBody>
+                    <a:bodyPr/>
+                    <a:lstStyle/>
+                    <a:p>
+                      <a:pPr algn="l">
+                        <a:defRPr b="0" sz="1000">
+                          <a:solidFill>
+                            <a:srgbClr val="1F2937"/>
+                          </a:solidFill>
+                          <a:latin typeface="Helvetica"/>
+                        </a:defRPr>
+                      </a:pPr>
+                      <a:r>
+                        <a:t>Validation boundaries reject (out-of-bounds)</a:t>
+                      </a:r>
+                    </a:p>
+                  </a:txBody>
+                  <a:tcPr>
+                    <a:solidFill>
+                      <a:srgbClr val="FFFFFF"/>
+                    </a:solidFill>
+                  </a:tcPr>
+                </a:tc>
+                <a:tc>
+                  <a:txBody>
+                    <a:bodyPr/>
+                    <a:lstStyle/>
+                    <a:p>
+                      <a:pPr algn="l">
+                        <a:defRPr b="0" sz="1000">
+                          <a:solidFill>
+                            <a:srgbClr val="1F2937"/>
+                          </a:solidFill>
+                          <a:latin typeface="Helvetica"/>
+                        </a:defRPr>
+                      </a:pPr>
+                      <a:r>
+                        <a:t>Life: 15.0 (below Min limit) rejected with HTTP 400</a:t>
+                      </a:r>
+                    </a:p>
+                  </a:txBody>
+                  <a:tcPr>
+                    <a:solidFill>
+                      <a:srgbClr val="FFFFFF"/>
+                    </a:solidFill>
+                  </a:tcPr>
+                </a:tc>
+                <a:tc>
+                  <a:txBody>
+                    <a:bodyPr/>
+                    <a:lstStyle/>
+                    <a:p>
+                      <a:pPr algn="l">
+                        <a:defRPr b="1" sz="1000">
+                          <a:solidFill>
+                            <a:srgbClr val="0F766E"/>
+                          </a:solidFill>
+                          <a:latin typeface="Helvetica"/>
+                        </a:defRPr>
+                      </a:pPr>
+                      <a:r>
+                        <a:t>PASS</a:t>
+                      </a:r>
+                    </a:p>
+                  </a:txBody>
+                  <a:tcPr>
+                    <a:solidFill>
+                      <a:srgbClr val="FFFFFF"/>
+                    </a:solidFill>
+                  </a:tcPr>
+                </a:tc>
+              </a:tr>
+            </a:tbl>
+          </a:graphicData>
+        </a:graphic>
+      </p:graphicFrame>
+      <p:sp>
+        <p:nvSpPr>
+          <p:cNvPr id="5" name="TextBox 4"/>
+          <p:cNvSpPr txBox="1"/>
+          <p:nvPr/>
+        </p:nvSpPr>
+        <p:spPr>
+          <a:xfrm>
+            <a:off x="731520" y="5120640"/>
+            <a:ext cx="10728655" cy="1371600"/>
+          </a:xfrm>
+          <a:prstGeom prst="rect">
+            <a:avLst/>
+          </a:prstGeom>
+          <a:noFill/>
+        </p:spPr>
+        <p:txBody>
+          <a:bodyPr wrap="square" lIns="0" tIns="0" rIns="0" bIns="0">
+            <a:spAutoFit/>
+          </a:bodyPr>
+          <a:lstStyle/>
+          <a:p>
+            <a:pPr>
+              <a:spcAft>
+                <a:spcPts val="800"/>
+              </a:spcAft>
+              <a:defRPr sz="1300">
+                <a:solidFill>
+                  <a:srgbClr val="1F2937"/>
+                </a:solidFill>
+                <a:latin typeface="Helvetica"/>
+              </a:defRPr>
+            </a:pPr>
+            <a:r>
+              <a:t>• Testing Strategy: Implemented standard unit tests using Python's unittest module, verifying server route logic.</a:t>
+            </a:r>
+          </a:p>
+          <a:p>
+            <a:pPr>
+              <a:spcAft>
+                <a:spcPts val="800"/>
+              </a:spcAft>
+              <a:defRPr sz="1300">
+                <a:solidFill>
+                  <a:srgbClr val="1F2937"/>
+                </a:solidFill>
+                <a:latin typeface="Helvetica"/>
+              </a:defRPr>
+            </a:pPr>
+            <a:r>
+              <a:t>• Boundary Testing: Simulator checks extrema limits (Min &amp; Max slider boundaries) to ensure safe model inputs.</a:t>
+            </a:r>
+          </a:p>
+          <a:p>
+            <a:pPr>
+              <a:spcAft>
+                <a:spcPts val="800"/>
+              </a:spcAft>
+              <a:defRPr sz="1300">
+                <a:solidFill>
+                  <a:srgbClr val="1F2937"/>
+                </a:solidFill>
+                <a:latin typeface="Helvetica"/>
+              </a:defRPr>
+            </a:pPr>
+            <a:r>
+              <a:t>• Regression Testing: Automated assertions check JSON schemas of API outputs.</a:t>
+            </a:r>
+          </a:p>
+        </p:txBody>
+      </p:sp>
+    </p:spTree>
+  </p:cSld>
+  <p:clrMapOvr>
+    <a:masterClrMapping/>
+  </p:clrMapOvr>
+</p:sld>
+</file>
+
+<file path=ppt/slides/slide16.xml><?xml version="1.0" encoding="utf-8"?>
+<p:sld xmlns:a="http://schemas.openxmlformats.org/drawingml/2006/main" xmlns:p="http://schemas.openxmlformats.org/presentationml/2006/main" xmlns:r="http://schemas.openxmlformats.org/officeDocument/2006/relationships">
+  <p:cSld>
+    <p:bg>
+      <p:bgPr>
+        <a:solidFill>
+          <a:srgbClr val="F3F4F6"/>
+        </a:solidFill>
+        <a:effectLst/>
+      </p:bgPr>
+    </p:bg>
+    <p:spTree>
+      <p:nvGrpSpPr>
+        <p:cNvPr id="1" name=""/>
+        <p:cNvGrpSpPr/>
+        <p:nvPr/>
+      </p:nvGrpSpPr>
+      <p:grpSpPr/>
+      <p:sp>
+        <p:nvSpPr>
+          <p:cNvPr id="2" name="TextBox 1"/>
+          <p:cNvSpPr txBox="1"/>
+          <p:nvPr/>
+        </p:nvSpPr>
+        <p:spPr>
+          <a:xfrm>
+            <a:off x="548640" y="365760"/>
+            <a:ext cx="11094415" cy="731520"/>
+          </a:xfrm>
+          <a:prstGeom prst="rect">
+            <a:avLst/>
+          </a:prstGeom>
+          <a:noFill/>
+        </p:spPr>
+        <p:txBody>
+          <a:bodyPr wrap="square" lIns="0" tIns="0" rIns="0" bIns="0">
+            <a:spAutoFit/>
+          </a:bodyPr>
+          <a:lstStyle/>
+          <a:p>
+            <a:pPr>
+              <a:defRPr b="1" sz="2800">
+                <a:solidFill>
+                  <a:srgbClr val="1E3A8A"/>
+                </a:solidFill>
+                <a:latin typeface="Helvetica"/>
+              </a:defRPr>
+            </a:pPr>
+            <a:r>
+              <a:t>Future Enhancements Roadmap</a:t>
+            </a:r>
+          </a:p>
+        </p:txBody>
+      </p:sp>
+      <p:sp>
+        <p:nvSpPr>
+          <p:cNvPr id="3" name="Rectangle 2"/>
+          <p:cNvSpPr/>
+          <p:nvPr/>
+        </p:nvSpPr>
+        <p:spPr>
+          <a:xfrm>
+            <a:off x="548640" y="1143000"/>
+            <a:ext cx="11094415" cy="36576"/>
+          </a:xfrm>
+          <a:prstGeom prst="rect">
+            <a:avLst/>
+          </a:prstGeom>
+          <a:solidFill>
+            <a:srgbClr val="0F766E"/>
+          </a:solidFill>
+          <a:ln>
+            <a:solidFill>
+              <a:srgbClr val="0F766E"/>
+            </a:solidFill>
+          </a:ln>
+        </p:spPr>
+        <p:style>
+          <a:lnRef idx="1">
+            <a:schemeClr val="accent1"/>
+          </a:lnRef>
+          <a:fillRef idx="3">
+            <a:schemeClr val="accent1"/>
+          </a:fillRef>
+          <a:effectRef idx="2">
+            <a:schemeClr val="accent1"/>
+          </a:effectRef>
+          <a:fontRef idx="minor">
+            <a:schemeClr val="lt1"/>
+          </a:fontRef>
+        </p:style>
+        <p:txBody>
+          <a:bodyPr rtlCol="0" anchor="ctr"/>
+          <a:lstStyle/>
+          <a:p>
+            <a:pPr algn="ctr"/>
+          </a:p>
+        </p:txBody>
+      </p:sp>
+      <p:sp>
+        <p:nvSpPr>
+          <p:cNvPr id="4" name="TextBox 3"/>
+          <p:cNvSpPr txBox="1"/>
+          <p:nvPr/>
+        </p:nvSpPr>
+        <p:spPr>
+          <a:xfrm>
+            <a:off x="731520" y="1645920"/>
+            <a:ext cx="10728655" cy="4572000"/>
+          </a:xfrm>
+          <a:prstGeom prst="rect">
+            <a:avLst/>
+          </a:prstGeom>
+          <a:noFill/>
+        </p:spPr>
+        <p:txBody>
+          <a:bodyPr wrap="square" lIns="0" tIns="0" rIns="0" bIns="0">
+            <a:spAutoFit/>
+          </a:bodyPr>
+          <a:lstStyle/>
+          <a:p>
+            <a:pPr>
+              <a:spcAft>
+                <a:spcPts val="800"/>
+              </a:spcAft>
+              <a:defRPr sz="1500">
+                <a:solidFill>
+                  <a:srgbClr val="1F2937"/>
+                </a:solidFill>
+                <a:latin typeface="Helvetica"/>
+              </a:defRPr>
+            </a:pPr>
+            <a:r>
+              <a:t>• 1. Dynamic Geographic Mapping:</a:t>
+            </a:r>
+          </a:p>
+          <a:p>
+            <a:pPr lvl="1">
+              <a:spcAft>
+                <a:spcPts val="400"/>
+              </a:spcAft>
+              <a:defRPr sz="1250" i="1">
+                <a:solidFill>
+                  <a:srgbClr val="1F2937"/>
+                </a:solidFill>
+                <a:latin typeface="Helvetica"/>
+              </a:defRPr>
+            </a:pPr>
+            <a:r>
+              <a:t>  - Implement Leaflet.js or D3.js to render color-coded world maps dynamically mapping simulated indicators.</a:t>
+            </a:r>
+          </a:p>
+          <a:p>
+            <a:pPr>
+              <a:spcAft>
+                <a:spcPts val="800"/>
+              </a:spcAft>
+              <a:defRPr sz="1500">
+                <a:solidFill>
+                  <a:srgbClr val="1F2937"/>
+                </a:solidFill>
+                <a:latin typeface="Helvetica"/>
+              </a:defRPr>
+            </a:pPr>
+            <a:r>
+              <a:t>• 2. Time-Series Forecasting Modules:</a:t>
+            </a:r>
+          </a:p>
+          <a:p>
+            <a:pPr lvl="1">
+              <a:spcAft>
+                <a:spcPts val="400"/>
+              </a:spcAft>
+              <a:defRPr sz="1250" i="1">
+                <a:solidFill>
+                  <a:srgbClr val="1F2937"/>
+                </a:solidFill>
+                <a:latin typeface="Helvetica"/>
+              </a:defRPr>
+            </a:pPr>
+            <a:r>
+              <a:t>  - Add LSTM or ARIMA forecasting libraries to predict future HDI indicator paths over a 10-year period.</a:t>
+            </a:r>
+          </a:p>
+          <a:p>
+            <a:pPr>
+              <a:spcAft>
+                <a:spcPts val="800"/>
+              </a:spcAft>
+              <a:defRPr sz="1500">
+                <a:solidFill>
+                  <a:srgbClr val="1F2937"/>
+                </a:solidFill>
+                <a:latin typeface="Helvetica"/>
+              </a:defRPr>
+            </a:pPr>
+            <a:r>
+              <a:t>• 3. Advanced Explainable AI (XAI) integration:</a:t>
+            </a:r>
+          </a:p>
+          <a:p>
+            <a:pPr lvl="1">
+              <a:spcAft>
+                <a:spcPts val="400"/>
+              </a:spcAft>
+              <a:defRPr sz="1250" i="1">
+                <a:solidFill>
+                  <a:srgbClr val="1F2937"/>
+                </a:solidFill>
+                <a:latin typeface="Helvetica"/>
+              </a:defRPr>
+            </a:pPr>
+            <a:r>
+              <a:t>  - Incorporate SHAP and LIME library diagnostics to output fine-grained visual feature contribution plots.</a:t>
+            </a:r>
+          </a:p>
+          <a:p>
+            <a:pPr>
+              <a:spcAft>
+                <a:spcPts val="800"/>
+              </a:spcAft>
+              <a:defRPr sz="1500">
+                <a:solidFill>
+                  <a:srgbClr val="1F2937"/>
+                </a:solidFill>
+                <a:latin typeface="Helvetica"/>
+              </a:defRPr>
+            </a:pPr>
+            <a:r>
+              <a:t>• 4. User Security &amp; Dashboards:</a:t>
+            </a:r>
+          </a:p>
+          <a:p>
+            <a:pPr lvl="1">
+              <a:spcAft>
+                <a:spcPts val="400"/>
+              </a:spcAft>
+              <a:defRPr sz="1250" i="1">
+                <a:solidFill>
+                  <a:srgbClr val="1F2937"/>
+                </a:solidFill>
+                <a:latin typeface="Helvetica"/>
+              </a:defRPr>
+            </a:pPr>
+            <a:r>
+              <a:t>  - Implement user authentication, role-based access, and cloud database storage.</a:t>
+            </a:r>
+          </a:p>
+          <a:p>
+            <a:pPr>
+              <a:spcAft>
+                <a:spcPts val="800"/>
+              </a:spcAft>
+              <a:defRPr sz="1500">
+                <a:solidFill>
+                  <a:srgbClr val="1F2937"/>
+                </a:solidFill>
+                <a:latin typeface="Helvetica"/>
+              </a:defRPr>
+            </a:pPr>
+            <a:r>
+              <a:t>• 5. Policy Formulation AI Chatbot:</a:t>
+            </a:r>
+          </a:p>
+          <a:p>
+            <a:pPr lvl="1">
+              <a:spcAft>
+                <a:spcPts val="400"/>
+              </a:spcAft>
+              <a:defRPr sz="1250" i="1">
+                <a:solidFill>
+                  <a:srgbClr val="1F2937"/>
+                </a:solidFill>
+                <a:latin typeface="Helvetica"/>
+              </a:defRPr>
+            </a:pPr>
+            <a:r>
+              <a:t>  - Integrate a lightweight LLM chat bot to discuss custom country development plans dynamically.</a:t>
+            </a:r>
+          </a:p>
+        </p:txBody>
+      </p:sp>
+    </p:spTree>
+  </p:cSld>
+  <p:clrMapOvr>
+    <a:masterClrMapping/>
+  </p:clrMapOvr>
+</p:sld>
+</file>
+
+<file path=ppt/slides/slide17.xml><?xml version="1.0" encoding="utf-8"?>
+<p:sld xmlns:a="http://schemas.openxmlformats.org/drawingml/2006/main" xmlns:p="http://schemas.openxmlformats.org/presentationml/2006/main" xmlns:r="http://schemas.openxmlformats.org/officeDocument/2006/relationships">
+  <p:cSld>
+    <p:bg>
+      <p:bgPr>
+        <a:solidFill>
+          <a:srgbClr val="F3F4F6"/>
+        </a:solidFill>
+        <a:effectLst/>
+      </p:bgPr>
+    </p:bg>
+    <p:spTree>
+      <p:nvGrpSpPr>
+        <p:cNvPr id="1" name=""/>
+        <p:cNvGrpSpPr/>
+        <p:nvPr/>
+      </p:nvGrpSpPr>
+      <p:grpSpPr/>
+      <p:sp>
+        <p:nvSpPr>
+          <p:cNvPr id="2" name="TextBox 1"/>
+          <p:cNvSpPr txBox="1"/>
+          <p:nvPr/>
+        </p:nvSpPr>
+        <p:spPr>
+          <a:xfrm>
+            <a:off x="548640" y="365760"/>
+            <a:ext cx="11094415" cy="731520"/>
+          </a:xfrm>
+          <a:prstGeom prst="rect">
+            <a:avLst/>
+          </a:prstGeom>
+          <a:noFill/>
+        </p:spPr>
+        <p:txBody>
+          <a:bodyPr wrap="square" lIns="0" tIns="0" rIns="0" bIns="0">
+            <a:spAutoFit/>
+          </a:bodyPr>
+          <a:lstStyle/>
+          <a:p>
+            <a:pPr>
+              <a:defRPr b="1" sz="2800">
+                <a:solidFill>
+                  <a:srgbClr val="1E3A8A"/>
+                </a:solidFill>
+                <a:latin typeface="Helvetica"/>
+              </a:defRPr>
+            </a:pPr>
+            <a:r>
+              <a:t>Project Team Roles &amp; Contributions</a:t>
+            </a:r>
+          </a:p>
+        </p:txBody>
+      </p:sp>
+      <p:sp>
+        <p:nvSpPr>
+          <p:cNvPr id="3" name="Rectangle 2"/>
+          <p:cNvSpPr/>
+          <p:nvPr/>
+        </p:nvSpPr>
+        <p:spPr>
+          <a:xfrm>
+            <a:off x="548640" y="1143000"/>
+            <a:ext cx="11094415" cy="36576"/>
+          </a:xfrm>
+          <a:prstGeom prst="rect">
+            <a:avLst/>
+          </a:prstGeom>
+          <a:solidFill>
+            <a:srgbClr val="0F766E"/>
+          </a:solidFill>
+          <a:ln>
+            <a:solidFill>
+              <a:srgbClr val="0F766E"/>
+            </a:solidFill>
+          </a:ln>
+        </p:spPr>
+        <p:style>
+          <a:lnRef idx="1">
+            <a:schemeClr val="accent1"/>
+          </a:lnRef>
+          <a:fillRef idx="3">
+            <a:schemeClr val="accent1"/>
+          </a:fillRef>
+          <a:effectRef idx="2">
+            <a:schemeClr val="accent1"/>
+          </a:effectRef>
+          <a:fontRef idx="minor">
+            <a:schemeClr val="lt1"/>
+          </a:fontRef>
+        </p:style>
+        <p:txBody>
+          <a:bodyPr rtlCol="0" anchor="ctr"/>
+          <a:lstStyle/>
+          <a:p>
+            <a:pPr algn="ctr"/>
+          </a:p>
+        </p:txBody>
+      </p:sp>
+      <p:graphicFrame>
+        <p:nvGraphicFramePr>
+          <p:cNvPr id="4" name="Table 3"/>
+          <p:cNvGraphicFramePr>
+            <a:graphicFrameLocks noGrp="1"/>
+          </p:cNvGraphicFramePr>
+          <p:nvPr/>
+        </p:nvGraphicFramePr>
+        <p:xfrm>
+          <a:off x="731520" y="1645920"/>
+          <a:ext cx="10728655" cy="4114800"/>
+        </p:xfrm>
+        <a:graphic>
+          <a:graphicData uri="http://schemas.openxmlformats.org/drawingml/2006/table">
+            <a:tbl>
+              <a:tblPr firstRow="1" bandRow="1">
+                <a:tableStyleId>{5C22544A-7EE6-4342-B048-85BDC9FD1C3A}</a:tableStyleId>
+              </a:tblPr>
+              <a:tblGrid>
+                <a:gridCol w="3576218"/>
+                <a:gridCol w="3576218"/>
+                <a:gridCol w="3576219"/>
+              </a:tblGrid>
+              <a:tr h="685800">
+                <a:tc>
+                  <a:txBody>
+                    <a:bodyPr/>
+                    <a:lstStyle/>
+                    <a:p>
+                      <a:pPr algn="l">
+                        <a:defRPr b="1" sz="1200">
+                          <a:solidFill>
+                            <a:srgbClr val="FFFFFF"/>
+                          </a:solidFill>
+                          <a:latin typeface="Helvetica"/>
+                        </a:defRPr>
+                      </a:pPr>
+                      <a:r>
+                        <a:t>Member Name</a:t>
+                      </a:r>
+                    </a:p>
+                  </a:txBody>
+                  <a:tcPr>
+                    <a:solidFill>
+                      <a:srgbClr val="1E3A8A"/>
+                    </a:solidFill>
+                  </a:tcPr>
+                </a:tc>
+                <a:tc>
+                  <a:txBody>
+                    <a:bodyPr/>
+                    <a:lstStyle/>
+                    <a:p>
+                      <a:pPr algn="l">
+                        <a:defRPr b="1" sz="1200">
+                          <a:solidFill>
+                            <a:srgbClr val="FFFFFF"/>
+                          </a:solidFill>
+                          <a:latin typeface="Helvetica"/>
+                        </a:defRPr>
+                      </a:pPr>
+                      <a:r>
+                        <a:t>Project Role</a:t>
+                      </a:r>
+                    </a:p>
+                  </a:txBody>
+                  <a:tcPr>
+                    <a:solidFill>
+                      <a:srgbClr val="1E3A8A"/>
+                    </a:solidFill>
+                  </a:tcPr>
+                </a:tc>
+                <a:tc>
+                  <a:txBody>
+                    <a:bodyPr/>
+                    <a:lstStyle/>
+                    <a:p>
+                      <a:pPr algn="l">
+                        <a:defRPr b="1" sz="1200">
+                          <a:solidFill>
+                            <a:srgbClr val="FFFFFF"/>
+                          </a:solidFill>
+                          <a:latin typeface="Helvetica"/>
+                        </a:defRPr>
+                      </a:pPr>
+                      <a:r>
+                        <a:t>Core Responsibilities</a:t>
+                      </a:r>
+                    </a:p>
+                  </a:txBody>
+                  <a:tcPr>
+                    <a:solidFill>
+                      <a:srgbClr val="1E3A8A"/>
+                    </a:solidFill>
+                  </a:tcPr>
+                </a:tc>
+              </a:tr>
+              <a:tr h="685800">
+                <a:tc>
+                  <a:txBody>
+                    <a:bodyPr/>
+                    <a:lstStyle/>
+                    <a:p>
+                      <a:pPr algn="l">
+                        <a:defRPr b="1" sz="1000">
+                          <a:solidFill>
+                            <a:srgbClr val="1F2937"/>
+                          </a:solidFill>
+                          <a:latin typeface="Helvetica"/>
+                        </a:defRPr>
+                      </a:pPr>
+                      <a:r>
+                        <a:t>Varigeti Karthikeya</a:t>
+                      </a:r>
+                    </a:p>
+                  </a:txBody>
+                  <a:tcPr>
+                    <a:solidFill>
+                      <a:srgbClr val="FFFFFF"/>
+                    </a:solidFill>
+                  </a:tcPr>
+                </a:tc>
+                <a:tc>
+                  <a:txBody>
+                    <a:bodyPr/>
+                    <a:lstStyle/>
+                    <a:p>
+                      <a:pPr algn="l">
+                        <a:defRPr b="0" sz="1000">
+                          <a:solidFill>
+                            <a:srgbClr val="1F2937"/>
+                          </a:solidFill>
+                          <a:latin typeface="Helvetica"/>
+                        </a:defRPr>
+                      </a:pPr>
+                      <a:r>
+                        <a:t>Team Lead &amp; Backend Lead</a:t>
+                      </a:r>
+                    </a:p>
+                  </a:txBody>
+                  <a:tcPr>
+                    <a:solidFill>
+                      <a:srgbClr val="FFFFFF"/>
+                    </a:solidFill>
+                  </a:tcPr>
+                </a:tc>
+                <a:tc>
+                  <a:txBody>
+                    <a:bodyPr/>
+                    <a:lstStyle/>
+                    <a:p>
+                      <a:pPr algn="l">
+                        <a:defRPr b="0" sz="1000">
+                          <a:solidFill>
+                            <a:srgbClr val="1F2937"/>
+                          </a:solidFill>
+                          <a:latin typeface="Helvetica"/>
+                        </a:defRPr>
+                      </a:pPr>
+                      <a:r>
+                        <a:t>Project scheduling, Flask route handlers, database integration, API controller logic.</a:t>
+                      </a:r>
+                    </a:p>
+                  </a:txBody>
+                  <a:tcPr>
+                    <a:solidFill>
+                      <a:srgbClr val="FFFFFF"/>
+                    </a:solidFill>
+                  </a:tcPr>
+                </a:tc>
+              </a:tr>
+              <a:tr h="685800">
+                <a:tc>
+                  <a:txBody>
+                    <a:bodyPr/>
+                    <a:lstStyle/>
+                    <a:p>
+                      <a:pPr algn="l">
+                        <a:defRPr b="1" sz="1000">
+                          <a:solidFill>
+                            <a:srgbClr val="1F2937"/>
+                          </a:solidFill>
+                          <a:latin typeface="Helvetica"/>
+                        </a:defRPr>
+                      </a:pPr>
+                      <a:r>
+                        <a:t>Veera Ajay Kumar Adapa</a:t>
+                      </a:r>
+                    </a:p>
+                  </a:txBody>
+                  <a:tcPr>
+                    <a:solidFill>
+                      <a:srgbClr val="F3F4F6"/>
+                    </a:solidFill>
+                  </a:tcPr>
+                </a:tc>
+                <a:tc>
+                  <a:txBody>
+                    <a:bodyPr/>
+                    <a:lstStyle/>
+                    <a:p>
+                      <a:pPr algn="l">
+                        <a:defRPr b="0" sz="1000">
+                          <a:solidFill>
+                            <a:srgbClr val="1F2937"/>
+                          </a:solidFill>
+                          <a:latin typeface="Helvetica"/>
+                        </a:defRPr>
+                      </a:pPr>
+                      <a:r>
+                        <a:t>Machine Learning Engineer</a:t>
+                      </a:r>
+                    </a:p>
+                  </a:txBody>
+                  <a:tcPr>
+                    <a:solidFill>
+                      <a:srgbClr val="F3F4F6"/>
+                    </a:solidFill>
+                  </a:tcPr>
+                </a:tc>
+                <a:tc>
+                  <a:txBody>
+                    <a:bodyPr/>
+                    <a:lstStyle/>
+                    <a:p>
+                      <a:pPr algn="l">
+                        <a:defRPr b="0" sz="1000">
+                          <a:solidFill>
+                            <a:srgbClr val="1F2937"/>
+                          </a:solidFill>
+                          <a:latin typeface="Helvetica"/>
+                        </a:defRPr>
+                      </a:pPr>
+                      <a:r>
+                        <a:t>Preprocessing scripts, model benchmarking, tuning SVM &amp; companion RF, saving binaries.</a:t>
+                      </a:r>
+                    </a:p>
+                  </a:txBody>
+                  <a:tcPr>
+                    <a:solidFill>
+                      <a:srgbClr val="F3F4F6"/>
+                    </a:solidFill>
+                  </a:tcPr>
+                </a:tc>
+              </a:tr>
+              <a:tr h="685800">
+                <a:tc>
+                  <a:txBody>
+                    <a:bodyPr/>
+                    <a:lstStyle/>
+                    <a:p>
+                      <a:pPr algn="l">
+                        <a:defRPr b="1" sz="1000">
+                          <a:solidFill>
+                            <a:srgbClr val="1F2937"/>
+                          </a:solidFill>
+                          <a:latin typeface="Helvetica"/>
+                        </a:defRPr>
+                      </a:pPr>
+                      <a:r>
+                        <a:t>Gulla Chandana</a:t>
+                      </a:r>
+                    </a:p>
+                  </a:txBody>
+                  <a:tcPr>
+                    <a:solidFill>
+                      <a:srgbClr val="FFFFFF"/>
+                    </a:solidFill>
+                  </a:tcPr>
+                </a:tc>
+                <a:tc>
+                  <a:txBody>
+                    <a:bodyPr/>
+                    <a:lstStyle/>
+                    <a:p>
+                      <a:pPr algn="l">
+                        <a:defRPr b="0" sz="1000">
+                          <a:solidFill>
+                            <a:srgbClr val="1F2937"/>
+                          </a:solidFill>
+                          <a:latin typeface="Helvetica"/>
+                        </a:defRPr>
+                      </a:pPr>
+                      <a:r>
+                        <a:t>Frontend Designer</a:t>
+                      </a:r>
+                    </a:p>
+                  </a:txBody>
+                  <a:tcPr>
+                    <a:solidFill>
+                      <a:srgbClr val="FFFFFF"/>
+                    </a:solidFill>
+                  </a:tcPr>
+                </a:tc>
+                <a:tc>
+                  <a:txBody>
+                    <a:bodyPr/>
+                    <a:lstStyle/>
+                    <a:p>
+                      <a:pPr algn="l">
+                        <a:defRPr b="0" sz="1000">
+                          <a:solidFill>
+                            <a:srgbClr val="1F2937"/>
+                          </a:solidFill>
+                          <a:latin typeface="Helvetica"/>
+                        </a:defRPr>
+                      </a:pPr>
+                      <a:r>
+                        <a:t>Interactive UI layout, Light/Dark mode stylesheet variables, Chart.js implementation.</a:t>
+                      </a:r>
+                    </a:p>
+                  </a:txBody>
+                  <a:tcPr>
+                    <a:solidFill>
+                      <a:srgbClr val="FFFFFF"/>
+                    </a:solidFill>
+                  </a:tcPr>
+                </a:tc>
+              </a:tr>
+              <a:tr h="685800">
+                <a:tc>
+                  <a:txBody>
+                    <a:bodyPr/>
+                    <a:lstStyle/>
+                    <a:p>
+                      <a:pPr algn="l">
+                        <a:defRPr b="1" sz="1000">
+                          <a:solidFill>
+                            <a:srgbClr val="1F2937"/>
+                          </a:solidFill>
+                          <a:latin typeface="Helvetica"/>
+                        </a:defRPr>
+                      </a:pPr>
+                      <a:r>
+                        <a:t>Ambati Krupa Jesudas</a:t>
+                      </a:r>
+                    </a:p>
+                  </a:txBody>
+                  <a:tcPr>
+                    <a:solidFill>
+                      <a:srgbClr val="F3F4F6"/>
+                    </a:solidFill>
+                  </a:tcPr>
+                </a:tc>
+                <a:tc>
+                  <a:txBody>
+                    <a:bodyPr/>
+                    <a:lstStyle/>
+                    <a:p>
+                      <a:pPr algn="l">
+                        <a:defRPr b="0" sz="1000">
+                          <a:solidFill>
+                            <a:srgbClr val="1F2937"/>
+                          </a:solidFill>
+                          <a:latin typeface="Helvetica"/>
+                        </a:defRPr>
+                      </a:pPr>
+                      <a:r>
+                        <a:t>QA &amp; Test Engineer</a:t>
+                      </a:r>
+                    </a:p>
+                  </a:txBody>
+                  <a:tcPr>
+                    <a:solidFill>
+                      <a:srgbClr val="F3F4F6"/>
+                    </a:solidFill>
+                  </a:tcPr>
+                </a:tc>
+                <a:tc>
+                  <a:txBody>
+                    <a:bodyPr/>
+                    <a:lstStyle/>
+                    <a:p>
+                      <a:pPr algn="l">
+                        <a:defRPr b="0" sz="1000">
+                          <a:solidFill>
+                            <a:srgbClr val="1F2937"/>
+                          </a:solidFill>
+                          <a:latin typeface="Helvetica"/>
+                        </a:defRPr>
+                      </a:pPr>
+                      <a:r>
+                        <a:t>Unit tests creation, edge cases validation, UAT checklist design, test executions.</a:t>
+                      </a:r>
+                    </a:p>
+                  </a:txBody>
+                  <a:tcPr>
+                    <a:solidFill>
+                      <a:srgbClr val="F3F4F6"/>
+                    </a:solidFill>
+                  </a:tcPr>
+                </a:tc>
+              </a:tr>
+              <a:tr h="685800">
+                <a:tc>
+                  <a:txBody>
+                    <a:bodyPr/>
+                    <a:lstStyle/>
+                    <a:p>
+                      <a:pPr algn="l">
+                        <a:defRPr b="1" sz="1000">
+                          <a:solidFill>
+                            <a:srgbClr val="1F2937"/>
+                          </a:solidFill>
+                          <a:latin typeface="Helvetica"/>
+                        </a:defRPr>
+                      </a:pPr>
+                      <a:r>
+                        <a:t>Mohammad Tayyab</a:t>
+                      </a:r>
+                    </a:p>
+                  </a:txBody>
+                  <a:tcPr>
+                    <a:solidFill>
+                      <a:srgbClr val="FFFFFF"/>
+                    </a:solidFill>
+                  </a:tcPr>
+                </a:tc>
+                <a:tc>
+                  <a:txBody>
+                    <a:bodyPr/>
+                    <a:lstStyle/>
+                    <a:p>
+                      <a:pPr algn="l">
+                        <a:defRPr b="0" sz="1000">
+                          <a:solidFill>
+                            <a:srgbClr val="1F2937"/>
+                          </a:solidFill>
+                          <a:latin typeface="Helvetica"/>
+                        </a:defRPr>
+                      </a:pPr>
+                      <a:r>
+                        <a:t>Technical Writer &amp; DevOps</a:t>
+                      </a:r>
+                    </a:p>
+                  </a:txBody>
+                  <a:tcPr>
+                    <a:solidFill>
+                      <a:srgbClr val="FFFFFF"/>
+                    </a:solidFill>
+                  </a:tcPr>
+                </a:tc>
+                <a:tc>
+                  <a:txBody>
+                    <a:bodyPr/>
+                    <a:lstStyle/>
+                    <a:p>
+                      <a:pPr algn="l">
+                        <a:defRPr b="0" sz="1000">
+                          <a:solidFill>
+                            <a:srgbClr val="1F2937"/>
+                          </a:solidFill>
+                          <a:latin typeface="Helvetica"/>
+                        </a:defRPr>
+                      </a:pPr>
+                      <a:r>
+                        <a:t>Programmatic PDF reporting module, installation guides, user manuals, deployment.</a:t>
+                      </a:r>
+                    </a:p>
+                  </a:txBody>
+                  <a:tcPr>
+                    <a:solidFill>
+                      <a:srgbClr val="FFFFFF"/>
+                    </a:solidFill>
+                  </a:tcPr>
+                </a:tc>
+              </a:tr>
+            </a:tbl>
+          </a:graphicData>
+        </a:graphic>
+      </p:graphicFrame>
+    </p:spTree>
+  </p:cSld>
+  <p:clrMapOvr>
+    <a:masterClrMapping/>
+  </p:clrMapOvr>
+</p:sld>
+</file>
+
+<file path=ppt/slides/slide18.xml><?xml version="1.0" encoding="utf-8"?>
+<p:sld xmlns:a="http://schemas.openxmlformats.org/drawingml/2006/main" xmlns:p="http://schemas.openxmlformats.org/presentationml/2006/main" xmlns:r="http://schemas.openxmlformats.org/officeDocument/2006/relationships">
+  <p:cSld>
+    <p:bg>
+      <p:bgPr>
+        <a:solidFill>
+          <a:srgbClr val="1E3A8A"/>
+        </a:solidFill>
+        <a:effectLst/>
+      </p:bgPr>
+    </p:bg>
+    <p:spTree>
+      <p:nvGrpSpPr>
+        <p:cNvPr id="1" name=""/>
+        <p:cNvGrpSpPr/>
+        <p:nvPr/>
+      </p:nvGrpSpPr>
+      <p:grpSpPr/>
+      <p:sp>
+        <p:nvSpPr>
+          <p:cNvPr id="2" name="TextBox 1"/>
+          <p:cNvSpPr txBox="1"/>
+          <p:nvPr/>
+        </p:nvSpPr>
+        <p:spPr>
+          <a:xfrm>
+            <a:off x="548640" y="365760"/>
+            <a:ext cx="11094415" cy="731520"/>
+          </a:xfrm>
+          <a:prstGeom prst="rect">
+            <a:avLst/>
+          </a:prstGeom>
+          <a:noFill/>
+        </p:spPr>
+        <p:txBody>
+          <a:bodyPr wrap="square" lIns="0" tIns="0" rIns="0" bIns="0">
+            <a:spAutoFit/>
+          </a:bodyPr>
+          <a:lstStyle/>
+          <a:p>
+            <a:pPr>
+              <a:defRPr b="1" sz="2800">
+                <a:solidFill>
+                  <a:srgbClr val="FFFFFF"/>
+                </a:solidFill>
+                <a:latin typeface="Helvetica"/>
+              </a:defRPr>
+            </a:pPr>
+            <a:r>
+              <a:t>Summary &amp; Conclusion</a:t>
+            </a:r>
+          </a:p>
+        </p:txBody>
+      </p:sp>
+      <p:sp>
+        <p:nvSpPr>
+          <p:cNvPr id="3" name="TextBox 2"/>
+          <p:cNvSpPr txBox="1"/>
+          <p:nvPr/>
+        </p:nvSpPr>
+        <p:spPr>
+          <a:xfrm>
+            <a:off x="731520" y="1645920"/>
+            <a:ext cx="10728655" cy="4572000"/>
+          </a:xfrm>
+          <a:prstGeom prst="rect">
+            <a:avLst/>
+          </a:prstGeom>
+          <a:noFill/>
+        </p:spPr>
+        <p:txBody>
+          <a:bodyPr wrap="square" lIns="0" tIns="0" rIns="0" bIns="0">
+            <a:spAutoFit/>
+          </a:bodyPr>
+          <a:lstStyle/>
+          <a:p>
+            <a:pPr>
+              <a:spcAft>
+                <a:spcPts val="800"/>
+              </a:spcAft>
+              <a:defRPr sz="1500">
+                <a:solidFill>
+                  <a:srgbClr val="FFFFFF"/>
+                </a:solidFill>
+                <a:latin typeface="Helvetica"/>
+              </a:defRPr>
+            </a:pPr>
+            <a:r>
+              <a:t>• Successful Platform Integration:</a:t>
+            </a:r>
+          </a:p>
+          <a:p>
+            <a:pPr lvl="1">
+              <a:spcAft>
+                <a:spcPts val="400"/>
+              </a:spcAft>
+              <a:defRPr sz="1250" i="1">
+                <a:solidFill>
+                  <a:srgbClr val="FFFFFF"/>
+                </a:solidFill>
+                <a:latin typeface="Helvetica"/>
+              </a:defRPr>
+            </a:pPr>
+            <a:r>
+              <a:t>  - Deployed a portfolio-ready web analytics portal matching standard UN HDI dimensions.</a:t>
+            </a:r>
+          </a:p>
+          <a:p>
+            <a:pPr>
+              <a:spcAft>
+                <a:spcPts val="800"/>
+              </a:spcAft>
+              <a:defRPr sz="1500">
+                <a:solidFill>
+                  <a:srgbClr val="FFFFFF"/>
+                </a:solidFill>
+                <a:latin typeface="Helvetica"/>
+              </a:defRPr>
+            </a:pPr>
+            <a:r>
+              <a:t>• High Inference Accuracy:</a:t>
+            </a:r>
+          </a:p>
+          <a:p>
+            <a:pPr lvl="1">
+              <a:spcAft>
+                <a:spcPts val="400"/>
+              </a:spcAft>
+              <a:defRPr sz="1250" i="1">
+                <a:solidFill>
+                  <a:srgbClr val="FFFFFF"/>
+                </a:solidFill>
+                <a:latin typeface="Helvetica"/>
+              </a:defRPr>
+            </a:pPr>
+            <a:r>
+              <a:t>  - Deployed Support Vector Machine (SVM) achieving peak accuracy of 98.9% on test set.</a:t>
+            </a:r>
+          </a:p>
+          <a:p>
+            <a:pPr>
+              <a:spcAft>
+                <a:spcPts val="800"/>
+              </a:spcAft>
+              <a:defRPr sz="1500">
+                <a:solidFill>
+                  <a:srgbClr val="FFFFFF"/>
+                </a:solidFill>
+                <a:latin typeface="Helvetica"/>
+              </a:defRPr>
+            </a:pPr>
+            <a:r>
+              <a:t>• Dual Analytical Scope:</a:t>
+            </a:r>
+          </a:p>
+          <a:p>
+            <a:pPr lvl="1">
+              <a:spcAft>
+                <a:spcPts val="400"/>
+              </a:spcAft>
+              <a:defRPr sz="1250" i="1">
+                <a:solidFill>
+                  <a:srgbClr val="FFFFFF"/>
+                </a:solidFill>
+                <a:latin typeface="Helvetica"/>
+              </a:defRPr>
+            </a:pPr>
+            <a:r>
+              <a:t>  - Companion Random Forest Regressor provides continuous index scores complementing categories.</a:t>
+            </a:r>
+          </a:p>
+          <a:p>
+            <a:pPr>
+              <a:spcAft>
+                <a:spcPts val="800"/>
+              </a:spcAft>
+              <a:defRPr sz="1500">
+                <a:solidFill>
+                  <a:srgbClr val="FFFFFF"/>
+                </a:solidFill>
+                <a:latin typeface="Helvetica"/>
+              </a:defRPr>
+            </a:pPr>
+            <a:r>
+              <a:t>• User-Driven Value System:</a:t>
+            </a:r>
+          </a:p>
+          <a:p>
+            <a:pPr lvl="1">
+              <a:spcAft>
+                <a:spcPts val="400"/>
+              </a:spcAft>
+              <a:defRPr sz="1250" i="1">
+                <a:solidFill>
+                  <a:srgbClr val="FFFFFF"/>
+                </a:solidFill>
+                <a:latin typeface="Helvetica"/>
+              </a:defRPr>
+            </a:pPr>
+            <a:r>
+              <a:t>  - Explainable AI and dynamic policy advisor recommendations bridge the gap between ML outputs and user action.</a:t>
+            </a:r>
+          </a:p>
+          <a:p>
+            <a:pPr>
+              <a:spcAft>
+                <a:spcPts val="800"/>
+              </a:spcAft>
+              <a:defRPr sz="1500">
+                <a:solidFill>
+                  <a:srgbClr val="FFFFFF"/>
+                </a:solidFill>
+                <a:latin typeface="Helvetica"/>
+              </a:defRPr>
+            </a:pPr>
+            <a:r>
+              <a:t>• Technical Viability:</a:t>
+            </a:r>
+          </a:p>
+          <a:p>
+            <a:pPr lvl="1">
+              <a:spcAft>
+                <a:spcPts val="400"/>
+              </a:spcAft>
+              <a:defRPr sz="1250" i="1">
+                <a:solidFill>
+                  <a:srgbClr val="FFFFFF"/>
+                </a:solidFill>
+                <a:latin typeface="Helvetica"/>
+              </a:defRPr>
+            </a:pPr>
+            <a:r>
+              <a:t>  - System is lightweight, fully tested (100% pass rates), and scalable for future development roadmap.</a:t>
+            </a:r>
+          </a:p>
+        </p:txBody>
+      </p:sp>
+    </p:spTree>
+  </p:cSld>
+  <p:clrMapOvr>
+    <a:masterClrMapping/>
+  </p:clrMapOvr>
+</p:sld>
+</file>
+
+<file path=ppt/slides/slide19.xml><?xml version="1.0" encoding="utf-8"?>
+<p:sld xmlns:a="http://schemas.openxmlformats.org/drawingml/2006/main" xmlns:p="http://schemas.openxmlformats.org/presentationml/2006/main" xmlns:r="http://schemas.openxmlformats.org/officeDocument/2006/relationships">
+  <p:cSld>
+    <p:bg>
+      <p:bgPr>
+        <a:solidFill>
+          <a:srgbClr val="1E3A8A"/>
+        </a:solidFill>
+        <a:effectLst/>
+      </p:bgPr>
+    </p:bg>
+    <p:spTree>
+      <p:nvGrpSpPr>
+        <p:cNvPr id="1" name=""/>
+        <p:cNvGrpSpPr/>
+        <p:nvPr/>
+      </p:nvGrpSpPr>
+      <p:grpSpPr/>
+      <p:sp>
+        <p:nvSpPr>
+          <p:cNvPr id="2" name="TextBox 1"/>
+          <p:cNvSpPr txBox="1"/>
+          <p:nvPr/>
+        </p:nvSpPr>
+        <p:spPr>
+          <a:xfrm>
+            <a:off x="914400" y="2011680"/>
+            <a:ext cx="10362895" cy="2743200"/>
+          </a:xfrm>
+          <a:prstGeom prst="rect">
+            <a:avLst/>
+          </a:prstGeom>
+          <a:noFill/>
+        </p:spPr>
+        <p:txBody>
+          <a:bodyPr wrap="square">
+            <a:spAutoFit/>
+          </a:bodyPr>
+          <a:lstStyle/>
+          <a:p>
+            <a:pPr algn="ctr">
+              <a:defRPr b="1" sz="6400">
+                <a:solidFill>
+                  <a:srgbClr val="FFFFFF"/>
+                </a:solidFill>
+                <a:latin typeface="Helvetica"/>
+              </a:defRPr>
+            </a:pPr>
+            <a:r>
+              <a:t>THANK YOU!</a:t>
+            </a:r>
+          </a:p>
+          <a:p>
+            <a:pPr algn="ctr">
+              <a:spcBef>
+                <a:spcPts val="1200"/>
+              </a:spcBef>
+              <a:defRPr sz="2400">
+                <a:solidFill>
+                  <a:srgbClr val="0F766E"/>
+                </a:solidFill>
+                <a:latin typeface="Helvetica"/>
+              </a:defRPr>
+            </a:pPr>
+            <a:r>
+              <a:t>Questions &amp; Answers Session</a:t>
+            </a:r>
+          </a:p>
+          <a:p>
+            <a:pPr algn="ctr">
+              <a:spcBef>
+                <a:spcPts val="3600"/>
+              </a:spcBef>
+              <a:defRPr sz="1400">
+                <a:solidFill>
+                  <a:srgbClr val="FFFFFF"/>
+                </a:solidFill>
+                <a:latin typeface="Helvetica"/>
+              </a:defRPr>
+            </a:pPr>
+            <a:r>
+              <a:t>GitHub Repository: https://github.com/pandu0426/HDI-Insights</a:t>
             </a:r>
           </a:p>
         </p:txBody>
@@ -3179,7 +6670,7 @@
     <p:bg>
       <p:bgPr>
         <a:solidFill>
-          <a:srgbClr val="0F172A"/>
+          <a:srgbClr val="F3F4F6"/>
         </a:solidFill>
         <a:effectLst/>
       </p:bgPr>
@@ -3193,81 +6684,287 @@
       <p:grpSpPr/>
       <p:sp>
         <p:nvSpPr>
-          <p:cNvPr id="2" name="Title 1"/>
-          <p:cNvSpPr>
-            <a:spLocks noGrp="1"/>
-          </p:cNvSpPr>
-          <p:nvPr>
-            <p:ph type="title"/>
-          </p:nvPr>
-        </p:nvSpPr>
-        <p:spPr/>
-        <p:txBody>
-          <a:bodyPr/>
+          <p:cNvPr id="2" name="TextBox 1"/>
+          <p:cNvSpPr txBox="1"/>
+          <p:nvPr/>
+        </p:nvSpPr>
+        <p:spPr>
+          <a:xfrm>
+            <a:off x="548640" y="365760"/>
+            <a:ext cx="11094415" cy="731520"/>
+          </a:xfrm>
+          <a:prstGeom prst="rect">
+            <a:avLst/>
+          </a:prstGeom>
+          <a:noFill/>
+        </p:spPr>
+        <p:txBody>
+          <a:bodyPr wrap="square" lIns="0" tIns="0" rIns="0" bIns="0">
+            <a:spAutoFit/>
+          </a:bodyPr>
           <a:lstStyle/>
           <a:p>
             <a:pPr>
-              <a:defRPr b="1">
-                <a:solidFill>
-                  <a:srgbClr val="FFFFFF"/>
-                </a:solidFill>
-              </a:defRPr>
-            </a:pPr>
-            <a:r>
-              <a:t>The Problem</a:t>
-            </a:r>
-          </a:p>
-        </p:txBody>
-      </p:sp>
-      <p:sp>
-        <p:nvSpPr>
-          <p:cNvPr id="3" name="Content Placeholder 2"/>
-          <p:cNvSpPr>
-            <a:spLocks noGrp="1"/>
-          </p:cNvSpPr>
-          <p:nvPr>
-            <p:ph idx="1"/>
-          </p:nvPr>
-        </p:nvSpPr>
-        <p:spPr/>
-        <p:txBody>
-          <a:bodyPr/>
+              <a:defRPr b="1" sz="2800">
+                <a:solidFill>
+                  <a:srgbClr val="1E3A8A"/>
+                </a:solidFill>
+                <a:latin typeface="Helvetica"/>
+              </a:defRPr>
+            </a:pPr>
+            <a:r>
+              <a:t>Presentation Agenda</a:t>
+            </a:r>
+          </a:p>
+        </p:txBody>
+      </p:sp>
+      <p:sp>
+        <p:nvSpPr>
+          <p:cNvPr id="3" name="Rectangle 2"/>
+          <p:cNvSpPr/>
+          <p:nvPr/>
+        </p:nvSpPr>
+        <p:spPr>
+          <a:xfrm>
+            <a:off x="548640" y="1143000"/>
+            <a:ext cx="11094415" cy="36576"/>
+          </a:xfrm>
+          <a:prstGeom prst="rect">
+            <a:avLst/>
+          </a:prstGeom>
+          <a:solidFill>
+            <a:srgbClr val="0F766E"/>
+          </a:solidFill>
+          <a:ln>
+            <a:solidFill>
+              <a:srgbClr val="0F766E"/>
+            </a:solidFill>
+          </a:ln>
+        </p:spPr>
+        <p:style>
+          <a:lnRef idx="1">
+            <a:schemeClr val="accent1"/>
+          </a:lnRef>
+          <a:fillRef idx="3">
+            <a:schemeClr val="accent1"/>
+          </a:fillRef>
+          <a:effectRef idx="2">
+            <a:schemeClr val="accent1"/>
+          </a:effectRef>
+          <a:fontRef idx="minor">
+            <a:schemeClr val="lt1"/>
+          </a:fontRef>
+        </p:style>
+        <p:txBody>
+          <a:bodyPr rtlCol="0" anchor="ctr"/>
           <a:lstStyle/>
-          <a:p/>
+          <a:p>
+            <a:pPr algn="ctr"/>
+          </a:p>
+        </p:txBody>
+      </p:sp>
+      <p:sp>
+        <p:nvSpPr>
+          <p:cNvPr id="4" name="TextBox 3"/>
+          <p:cNvSpPr txBox="1"/>
+          <p:nvPr/>
+        </p:nvSpPr>
+        <p:spPr>
+          <a:xfrm>
+            <a:off x="731520" y="1828800"/>
+            <a:ext cx="5120640" cy="4114800"/>
+          </a:xfrm>
+          <a:prstGeom prst="rect">
+            <a:avLst/>
+          </a:prstGeom>
+          <a:noFill/>
+        </p:spPr>
+        <p:txBody>
+          <a:bodyPr wrap="square" lIns="0" tIns="0" rIns="0" bIns="0">
+            <a:spAutoFit/>
+          </a:bodyPr>
+          <a:lstStyle/>
           <a:p>
             <a:pPr>
-              <a:defRPr sz="1600">
-                <a:solidFill>
-                  <a:srgbClr val="FFFFFF"/>
-                </a:solidFill>
-              </a:defRPr>
-            </a:pPr>
-            <a:r>
-              <a:t>Traditional national reporting is slow, with a 1-2 year delay in statistics.</a:t>
+              <a:spcAft>
+                <a:spcPts val="800"/>
+              </a:spcAft>
+              <a:defRPr sz="1500">
+                <a:solidFill>
+                  <a:srgbClr val="1F2937"/>
+                </a:solidFill>
+                <a:latin typeface="Helvetica"/>
+              </a:defRPr>
+            </a:pPr>
+            <a:r>
+              <a:t>1. Context &amp; Concept: Human Development Index</a:t>
             </a:r>
           </a:p>
           <a:p>
             <a:pPr>
-              <a:defRPr sz="1600">
-                <a:solidFill>
-                  <a:srgbClr val="FFFFFF"/>
-                </a:solidFill>
-              </a:defRPr>
-            </a:pPr>
-            <a:r>
-              <a:t>Policymakers lack sandbox simulators to test proposed budget allocations.</a:t>
+              <a:spcAft>
+                <a:spcPts val="800"/>
+              </a:spcAft>
+              <a:defRPr sz="1500">
+                <a:solidFill>
+                  <a:srgbClr val="1F2937"/>
+                </a:solidFill>
+                <a:latin typeface="Helvetica"/>
+              </a:defRPr>
+            </a:pPr>
+            <a:r>
+              <a:t>2. Problem Statement: Current limitations in policy estimation</a:t>
             </a:r>
           </a:p>
           <a:p>
             <a:pPr>
-              <a:defRPr sz="1600">
-                <a:solidFill>
-                  <a:srgbClr val="FFFFFF"/>
-                </a:solidFill>
-              </a:defRPr>
-            </a:pPr>
-            <a:r>
-              <a:t>Categorizations are typically black-box predictions without explanations.</a:t>
+              <a:spcAft>
+                <a:spcPts val="800"/>
+              </a:spcAft>
+              <a:defRPr sz="1500">
+                <a:solidFill>
+                  <a:srgbClr val="1F2937"/>
+                </a:solidFill>
+                <a:latin typeface="Helvetica"/>
+              </a:defRPr>
+            </a:pPr>
+            <a:r>
+              <a:t>3. System Objectives: Project goals and capabilities</a:t>
+            </a:r>
+          </a:p>
+          <a:p>
+            <a:pPr>
+              <a:spcAft>
+                <a:spcPts val="800"/>
+              </a:spcAft>
+              <a:defRPr sz="1500">
+                <a:solidFill>
+                  <a:srgbClr val="1F2937"/>
+                </a:solidFill>
+                <a:latin typeface="Helvetica"/>
+              </a:defRPr>
+            </a:pPr>
+            <a:r>
+              <a:t>4. Technology Stack: Tools used for development</a:t>
+            </a:r>
+          </a:p>
+          <a:p>
+            <a:pPr>
+              <a:spcAft>
+                <a:spcPts val="800"/>
+              </a:spcAft>
+              <a:defRPr sz="1500">
+                <a:solidFill>
+                  <a:srgbClr val="1F2937"/>
+                </a:solidFill>
+                <a:latin typeface="Helvetica"/>
+              </a:defRPr>
+            </a:pPr>
+            <a:r>
+              <a:t>5. System Architecture: Components design &amp; database setup</a:t>
+            </a:r>
+          </a:p>
+        </p:txBody>
+      </p:sp>
+      <p:sp>
+        <p:nvSpPr>
+          <p:cNvPr id="5" name="TextBox 4"/>
+          <p:cNvSpPr txBox="1"/>
+          <p:nvPr/>
+        </p:nvSpPr>
+        <p:spPr>
+          <a:xfrm>
+            <a:off x="6217920" y="1828800"/>
+            <a:ext cx="5120640" cy="4114800"/>
+          </a:xfrm>
+          <a:prstGeom prst="rect">
+            <a:avLst/>
+          </a:prstGeom>
+          <a:noFill/>
+        </p:spPr>
+        <p:txBody>
+          <a:bodyPr wrap="square" lIns="0" tIns="0" rIns="0" bIns="0">
+            <a:spAutoFit/>
+          </a:bodyPr>
+          <a:lstStyle/>
+          <a:p>
+            <a:pPr>
+              <a:spcAft>
+                <a:spcPts val="800"/>
+              </a:spcAft>
+              <a:defRPr sz="1500">
+                <a:solidFill>
+                  <a:srgbClr val="1F2937"/>
+                </a:solidFill>
+                <a:latin typeface="Helvetica"/>
+              </a:defRPr>
+            </a:pPr>
+            <a:r>
+              <a:t>6. Machine Learning Workflow: Raw data to final inference</a:t>
+            </a:r>
+          </a:p>
+          <a:p>
+            <a:pPr>
+              <a:spcAft>
+                <a:spcPts val="800"/>
+              </a:spcAft>
+              <a:defRPr sz="1500">
+                <a:solidFill>
+                  <a:srgbClr val="1F2937"/>
+                </a:solidFill>
+                <a:latin typeface="Helvetica"/>
+              </a:defRPr>
+            </a:pPr>
+            <a:r>
+              <a:t>7. Model Performance: Benchmarking and final selection</a:t>
+            </a:r>
+          </a:p>
+          <a:p>
+            <a:pPr>
+              <a:spcAft>
+                <a:spcPts val="800"/>
+              </a:spcAft>
+              <a:defRPr sz="1500">
+                <a:solidFill>
+                  <a:srgbClr val="1F2937"/>
+                </a:solidFill>
+                <a:latin typeface="Helvetica"/>
+              </a:defRPr>
+            </a:pPr>
+            <a:r>
+              <a:t>8. Web Portal Implementation: Live features visual gallery</a:t>
+            </a:r>
+          </a:p>
+          <a:p>
+            <a:pPr>
+              <a:spcAft>
+                <a:spcPts val="800"/>
+              </a:spcAft>
+              <a:defRPr sz="1500">
+                <a:solidFill>
+                  <a:srgbClr val="1F2937"/>
+                </a:solidFill>
+                <a:latin typeface="Helvetica"/>
+              </a:defRPr>
+            </a:pPr>
+            <a:r>
+              <a:t>9. Quality Assurance &amp; System Verification</a:t>
+            </a:r>
+          </a:p>
+          <a:p>
+            <a:pPr>
+              <a:spcAft>
+                <a:spcPts val="800"/>
+              </a:spcAft>
+              <a:defRPr sz="1500">
+                <a:solidFill>
+                  <a:srgbClr val="1F2937"/>
+                </a:solidFill>
+                <a:latin typeface="Helvetica"/>
+              </a:defRPr>
+            </a:pPr>
+            <a:r>
+              <a:t>10. Project Summary, Future Scope &amp; Team details</a:t>
             </a:r>
           </a:p>
         </p:txBody>
@@ -3286,7 +6983,7 @@
     <p:bg>
       <p:bgPr>
         <a:solidFill>
-          <a:srgbClr val="0F172A"/>
+          <a:srgbClr val="F3F4F6"/>
         </a:solidFill>
         <a:effectLst/>
       </p:bgPr>
@@ -3300,81 +6997,248 @@
       <p:grpSpPr/>
       <p:sp>
         <p:nvSpPr>
-          <p:cNvPr id="2" name="Title 1"/>
-          <p:cNvSpPr>
-            <a:spLocks noGrp="1"/>
-          </p:cNvSpPr>
-          <p:nvPr>
-            <p:ph type="title"/>
-          </p:nvPr>
-        </p:nvSpPr>
-        <p:spPr/>
-        <p:txBody>
-          <a:bodyPr/>
+          <p:cNvPr id="2" name="TextBox 1"/>
+          <p:cNvSpPr txBox="1"/>
+          <p:nvPr/>
+        </p:nvSpPr>
+        <p:spPr>
+          <a:xfrm>
+            <a:off x="548640" y="365760"/>
+            <a:ext cx="11094415" cy="731520"/>
+          </a:xfrm>
+          <a:prstGeom prst="rect">
+            <a:avLst/>
+          </a:prstGeom>
+          <a:noFill/>
+        </p:spPr>
+        <p:txBody>
+          <a:bodyPr wrap="square" lIns="0" tIns="0" rIns="0" bIns="0">
+            <a:spAutoFit/>
+          </a:bodyPr>
           <a:lstStyle/>
           <a:p>
             <a:pPr>
-              <a:defRPr b="1">
-                <a:solidFill>
-                  <a:srgbClr val="FFFFFF"/>
-                </a:solidFill>
-              </a:defRPr>
-            </a:pPr>
-            <a:r>
-              <a:t>The Solution: HDI Insight AI</a:t>
-            </a:r>
-          </a:p>
-        </p:txBody>
-      </p:sp>
-      <p:sp>
-        <p:nvSpPr>
-          <p:cNvPr id="3" name="Content Placeholder 2"/>
-          <p:cNvSpPr>
-            <a:spLocks noGrp="1"/>
-          </p:cNvSpPr>
-          <p:nvPr>
-            <p:ph idx="1"/>
-          </p:nvPr>
-        </p:nvSpPr>
-        <p:spPr/>
-        <p:txBody>
-          <a:bodyPr/>
+              <a:defRPr b="1" sz="2800">
+                <a:solidFill>
+                  <a:srgbClr val="1E3A8A"/>
+                </a:solidFill>
+                <a:latin typeface="Helvetica"/>
+              </a:defRPr>
+            </a:pPr>
+            <a:r>
+              <a:t>Socioeconomic Context: What is HDI?</a:t>
+            </a:r>
+          </a:p>
+        </p:txBody>
+      </p:sp>
+      <p:sp>
+        <p:nvSpPr>
+          <p:cNvPr id="3" name="Rectangle 2"/>
+          <p:cNvSpPr/>
+          <p:nvPr/>
+        </p:nvSpPr>
+        <p:spPr>
+          <a:xfrm>
+            <a:off x="548640" y="1143000"/>
+            <a:ext cx="11094415" cy="36576"/>
+          </a:xfrm>
+          <a:prstGeom prst="rect">
+            <a:avLst/>
+          </a:prstGeom>
+          <a:solidFill>
+            <a:srgbClr val="0F766E"/>
+          </a:solidFill>
+          <a:ln>
+            <a:solidFill>
+              <a:srgbClr val="0F766E"/>
+            </a:solidFill>
+          </a:ln>
+        </p:spPr>
+        <p:style>
+          <a:lnRef idx="1">
+            <a:schemeClr val="accent1"/>
+          </a:lnRef>
+          <a:fillRef idx="3">
+            <a:schemeClr val="accent1"/>
+          </a:fillRef>
+          <a:effectRef idx="2">
+            <a:schemeClr val="accent1"/>
+          </a:effectRef>
+          <a:fontRef idx="minor">
+            <a:schemeClr val="lt1"/>
+          </a:fontRef>
+        </p:style>
+        <p:txBody>
+          <a:bodyPr rtlCol="0" anchor="ctr"/>
           <a:lstStyle/>
-          <a:p/>
+          <a:p>
+            <a:pPr algn="ctr"/>
+          </a:p>
+        </p:txBody>
+      </p:sp>
+      <p:sp>
+        <p:nvSpPr>
+          <p:cNvPr id="4" name="TextBox 3"/>
+          <p:cNvSpPr txBox="1"/>
+          <p:nvPr/>
+        </p:nvSpPr>
+        <p:spPr>
+          <a:xfrm>
+            <a:off x="731520" y="1645920"/>
+            <a:ext cx="10728655" cy="4572000"/>
+          </a:xfrm>
+          <a:prstGeom prst="rect">
+            <a:avLst/>
+          </a:prstGeom>
+          <a:noFill/>
+        </p:spPr>
+        <p:txBody>
+          <a:bodyPr wrap="square" lIns="0" tIns="0" rIns="0" bIns="0">
+            <a:spAutoFit/>
+          </a:bodyPr>
+          <a:lstStyle/>
           <a:p>
             <a:pPr>
-              <a:defRPr sz="1600">
-                <a:solidFill>
-                  <a:srgbClr val="FFFFFF"/>
-                </a:solidFill>
-              </a:defRPr>
-            </a:pPr>
-            <a:r>
-              <a:t>A hybrid ML pipeline: SVM Classifier (98.9% accuracy) and Random Forest Regressor.</a:t>
+              <a:spcAft>
+                <a:spcPts val="800"/>
+              </a:spcAft>
+              <a:defRPr sz="1500">
+                <a:solidFill>
+                  <a:srgbClr val="1F2937"/>
+                </a:solidFill>
+                <a:latin typeface="Helvetica"/>
+              </a:defRPr>
+            </a:pPr>
+            <a:r>
+              <a:t>• Human Development Index (HDI) is a UN standard formulation for evaluating progress.</a:t>
             </a:r>
           </a:p>
           <a:p>
             <a:pPr>
-              <a:defRPr sz="1600">
-                <a:solidFill>
-                  <a:srgbClr val="FFFFFF"/>
-                </a:solidFill>
-              </a:defRPr>
-            </a:pPr>
-            <a:r>
-              <a:t>Features: Scenario Simulator, Explanations, Advisor Recommendations.</a:t>
+              <a:spcAft>
+                <a:spcPts val="800"/>
+              </a:spcAft>
+              <a:defRPr sz="1500">
+                <a:solidFill>
+                  <a:srgbClr val="1F2937"/>
+                </a:solidFill>
+                <a:latin typeface="Helvetica"/>
+              </a:defRPr>
+            </a:pPr>
+            <a:r>
+              <a:t>• Dimensions measured by HDI:</a:t>
+            </a:r>
+          </a:p>
+          <a:p>
+            <a:pPr lvl="1">
+              <a:spcAft>
+                <a:spcPts val="400"/>
+              </a:spcAft>
+              <a:defRPr sz="1250" i="1">
+                <a:solidFill>
+                  <a:srgbClr val="1F2937"/>
+                </a:solidFill>
+                <a:latin typeface="Helvetica"/>
+              </a:defRPr>
+            </a:pPr>
+            <a:r>
+              <a:t>  - Healthy Life: Life expectancy at birth (target bounds: 20 to 100 years).</a:t>
+            </a:r>
+          </a:p>
+          <a:p>
+            <a:pPr lvl="1">
+              <a:spcAft>
+                <a:spcPts val="400"/>
+              </a:spcAft>
+              <a:defRPr sz="1250" i="1">
+                <a:solidFill>
+                  <a:srgbClr val="1F2937"/>
+                </a:solidFill>
+                <a:latin typeface="Helvetica"/>
+              </a:defRPr>
+            </a:pPr>
+            <a:r>
+              <a:t>  - Education: Expected years of schooling &amp; Mean years of schooling.</a:t>
+            </a:r>
+          </a:p>
+          <a:p>
+            <a:pPr lvl="1">
+              <a:spcAft>
+                <a:spcPts val="400"/>
+              </a:spcAft>
+              <a:defRPr sz="1250" i="1">
+                <a:solidFill>
+                  <a:srgbClr val="1F2937"/>
+                </a:solidFill>
+                <a:latin typeface="Helvetica"/>
+              </a:defRPr>
+            </a:pPr>
+            <a:r>
+              <a:t>  - Standard of Living: Gross National Income (GNI) per Capita (PPP $).</a:t>
             </a:r>
           </a:p>
           <a:p>
             <a:pPr>
-              <a:defRPr sz="1600">
-                <a:solidFill>
-                  <a:srgbClr val="FFFFFF"/>
-                </a:solidFill>
-              </a:defRPr>
-            </a:pPr>
-            <a:r>
-              <a:t>Integrated Tools: PDF reports, CSV exports, dynamic Chart.js dashboards.</a:t>
+              <a:spcAft>
+                <a:spcPts val="800"/>
+              </a:spcAft>
+              <a:defRPr sz="1500">
+                <a:solidFill>
+                  <a:srgbClr val="1F2937"/>
+                </a:solidFill>
+                <a:latin typeface="Helvetica"/>
+              </a:defRPr>
+            </a:pPr>
+            <a:r>
+              <a:t>• HDI is a geometric mean of these normalized dimension indices.</a:t>
+            </a:r>
+          </a:p>
+          <a:p>
+            <a:pPr>
+              <a:spcAft>
+                <a:spcPts val="800"/>
+              </a:spcAft>
+              <a:defRPr sz="1500">
+                <a:solidFill>
+                  <a:srgbClr val="1F2937"/>
+                </a:solidFill>
+                <a:latin typeface="Helvetica"/>
+              </a:defRPr>
+            </a:pPr>
+            <a:r>
+              <a:t>• Importance of predicting HDI:</a:t>
+            </a:r>
+          </a:p>
+          <a:p>
+            <a:pPr lvl="1">
+              <a:spcAft>
+                <a:spcPts val="400"/>
+              </a:spcAft>
+              <a:defRPr sz="1250" i="1">
+                <a:solidFill>
+                  <a:srgbClr val="1F2937"/>
+                </a:solidFill>
+                <a:latin typeface="Helvetica"/>
+              </a:defRPr>
+            </a:pPr>
+            <a:r>
+              <a:t>  - Policy Tuning: Allows simulating socioeconomic impact before funding programs.</a:t>
+            </a:r>
+          </a:p>
+          <a:p>
+            <a:pPr lvl="1">
+              <a:spcAft>
+                <a:spcPts val="400"/>
+              </a:spcAft>
+              <a:defRPr sz="1250" i="1">
+                <a:solidFill>
+                  <a:srgbClr val="1F2937"/>
+                </a:solidFill>
+                <a:latin typeface="Helvetica"/>
+              </a:defRPr>
+            </a:pPr>
+            <a:r>
+              <a:t>  - Resource Allocation: Guides healthcare budgets, school expansions, and job initiatives.</a:t>
             </a:r>
           </a:p>
         </p:txBody>
@@ -3393,7 +7257,7 @@
     <p:bg>
       <p:bgPr>
         <a:solidFill>
-          <a:srgbClr val="0F172A"/>
+          <a:srgbClr val="F3F4F6"/>
         </a:solidFill>
         <a:effectLst/>
       </p:bgPr>
@@ -3407,93 +7271,264 @@
       <p:grpSpPr/>
       <p:sp>
         <p:nvSpPr>
-          <p:cNvPr id="2" name="Title 1"/>
-          <p:cNvSpPr>
-            <a:spLocks noGrp="1"/>
-          </p:cNvSpPr>
-          <p:nvPr>
-            <p:ph type="title"/>
-          </p:nvPr>
-        </p:nvSpPr>
-        <p:spPr/>
-        <p:txBody>
-          <a:bodyPr/>
+          <p:cNvPr id="2" name="TextBox 1"/>
+          <p:cNvSpPr txBox="1"/>
+          <p:nvPr/>
+        </p:nvSpPr>
+        <p:spPr>
+          <a:xfrm>
+            <a:off x="548640" y="365760"/>
+            <a:ext cx="11094415" cy="731520"/>
+          </a:xfrm>
+          <a:prstGeom prst="rect">
+            <a:avLst/>
+          </a:prstGeom>
+          <a:noFill/>
+        </p:spPr>
+        <p:txBody>
+          <a:bodyPr wrap="square" lIns="0" tIns="0" rIns="0" bIns="0">
+            <a:spAutoFit/>
+          </a:bodyPr>
           <a:lstStyle/>
           <a:p>
             <a:pPr>
-              <a:defRPr b="1">
-                <a:solidFill>
-                  <a:srgbClr val="FFFFFF"/>
-                </a:solidFill>
-              </a:defRPr>
-            </a:pPr>
-            <a:r>
-              <a:t>System Architecture</a:t>
-            </a:r>
-          </a:p>
-        </p:txBody>
-      </p:sp>
-      <p:sp>
-        <p:nvSpPr>
-          <p:cNvPr id="3" name="Content Placeholder 2"/>
-          <p:cNvSpPr>
-            <a:spLocks noGrp="1"/>
-          </p:cNvSpPr>
-          <p:nvPr>
-            <p:ph idx="1"/>
-          </p:nvPr>
-        </p:nvSpPr>
-        <p:spPr/>
-        <p:txBody>
-          <a:bodyPr/>
+              <a:defRPr b="1" sz="2800">
+                <a:solidFill>
+                  <a:srgbClr val="1E3A8A"/>
+                </a:solidFill>
+                <a:latin typeface="Helvetica"/>
+              </a:defRPr>
+            </a:pPr>
+            <a:r>
+              <a:t>Problem Statement: Policy Simulation Limitations</a:t>
+            </a:r>
+          </a:p>
+        </p:txBody>
+      </p:sp>
+      <p:sp>
+        <p:nvSpPr>
+          <p:cNvPr id="3" name="Rectangle 2"/>
+          <p:cNvSpPr/>
+          <p:nvPr/>
+        </p:nvSpPr>
+        <p:spPr>
+          <a:xfrm>
+            <a:off x="548640" y="1143000"/>
+            <a:ext cx="11094415" cy="36576"/>
+          </a:xfrm>
+          <a:prstGeom prst="rect">
+            <a:avLst/>
+          </a:prstGeom>
+          <a:solidFill>
+            <a:srgbClr val="0F766E"/>
+          </a:solidFill>
+          <a:ln>
+            <a:solidFill>
+              <a:srgbClr val="0F766E"/>
+            </a:solidFill>
+          </a:ln>
+        </p:spPr>
+        <p:style>
+          <a:lnRef idx="1">
+            <a:schemeClr val="accent1"/>
+          </a:lnRef>
+          <a:fillRef idx="3">
+            <a:schemeClr val="accent1"/>
+          </a:fillRef>
+          <a:effectRef idx="2">
+            <a:schemeClr val="accent1"/>
+          </a:effectRef>
+          <a:fontRef idx="minor">
+            <a:schemeClr val="lt1"/>
+          </a:fontRef>
+        </p:style>
+        <p:txBody>
+          <a:bodyPr rtlCol="0" anchor="ctr"/>
           <a:lstStyle/>
-          <a:p/>
+          <a:p>
+            <a:pPr algn="ctr"/>
+          </a:p>
+        </p:txBody>
+      </p:sp>
+      <p:sp>
+        <p:nvSpPr>
+          <p:cNvPr id="4" name="TextBox 3"/>
+          <p:cNvSpPr txBox="1"/>
+          <p:nvPr/>
+        </p:nvSpPr>
+        <p:spPr>
+          <a:xfrm>
+            <a:off x="731520" y="1645920"/>
+            <a:ext cx="10728655" cy="4572000"/>
+          </a:xfrm>
+          <a:prstGeom prst="rect">
+            <a:avLst/>
+          </a:prstGeom>
+          <a:noFill/>
+        </p:spPr>
+        <p:txBody>
+          <a:bodyPr wrap="square" lIns="0" tIns="0" rIns="0" bIns="0">
+            <a:spAutoFit/>
+          </a:bodyPr>
+          <a:lstStyle/>
           <a:p>
             <a:pPr>
-              <a:defRPr sz="1600">
-                <a:solidFill>
-                  <a:srgbClr val="FFFFFF"/>
-                </a:solidFill>
-              </a:defRPr>
-            </a:pPr>
-            <a:r>
-              <a:t>Web Frontend: HTML, CSS, JavaScript (Vanilla Single Page Application)</a:t>
+              <a:spcAft>
+                <a:spcPts val="800"/>
+              </a:spcAft>
+              <a:defRPr sz="1500">
+                <a:solidFill>
+                  <a:srgbClr val="1F2937"/>
+                </a:solidFill>
+                <a:latin typeface="Helvetica"/>
+              </a:defRPr>
+            </a:pPr>
+            <a:r>
+              <a:t>• Difficulty in analyzing development indicators manually:</a:t>
+            </a:r>
+          </a:p>
+          <a:p>
+            <a:pPr lvl="1">
+              <a:spcAft>
+                <a:spcPts val="400"/>
+              </a:spcAft>
+              <a:defRPr sz="1250" i="1">
+                <a:solidFill>
+                  <a:srgbClr val="1F2937"/>
+                </a:solidFill>
+                <a:latin typeface="Helvetica"/>
+              </a:defRPr>
+            </a:pPr>
+            <a:r>
+              <a:t>  - Complex calculations involve non-linear log transformations and geometric scales.</a:t>
             </a:r>
           </a:p>
           <a:p>
             <a:pPr>
-              <a:defRPr sz="1600">
-                <a:solidFill>
-                  <a:srgbClr val="FFFFFF"/>
-                </a:solidFill>
-              </a:defRPr>
-            </a:pPr>
-            <a:r>
-              <a:t>Backend Web API: Flask Server (Lightweight Python WSGI)</a:t>
+              <a:spcAft>
+                <a:spcPts val="800"/>
+              </a:spcAft>
+              <a:defRPr sz="1500">
+                <a:solidFill>
+                  <a:srgbClr val="1F2937"/>
+                </a:solidFill>
+                <a:latin typeface="Helvetica"/>
+              </a:defRPr>
+            </a:pPr>
+            <a:r>
+              <a:t>• Retrospective Limitations of Existing Databases:</a:t>
+            </a:r>
+          </a:p>
+          <a:p>
+            <a:pPr lvl="1">
+              <a:spcAft>
+                <a:spcPts val="400"/>
+              </a:spcAft>
+              <a:defRPr sz="1250" i="1">
+                <a:solidFill>
+                  <a:srgbClr val="1F2937"/>
+                </a:solidFill>
+                <a:latin typeface="Helvetica"/>
+              </a:defRPr>
+            </a:pPr>
+            <a:r>
+              <a:t>  - Standard dashboards (UNDP databases) serve historical indicators but lack future simulations.</a:t>
             </a:r>
           </a:p>
           <a:p>
             <a:pPr>
-              <a:defRPr sz="1600">
-                <a:solidFill>
-                  <a:srgbClr val="FFFFFF"/>
-                </a:solidFill>
-              </a:defRPr>
-            </a:pPr>
-            <a:r>
-              <a:t>Database Engine: SQLite3 (Serverless prediction logs)</a:t>
+              <a:spcAft>
+                <a:spcPts val="800"/>
+              </a:spcAft>
+              <a:defRPr sz="1500">
+                <a:solidFill>
+                  <a:srgbClr val="1F2937"/>
+                </a:solidFill>
+                <a:latin typeface="Helvetica"/>
+              </a:defRPr>
+            </a:pPr>
+            <a:r>
+              <a:t>• No local Explainable AI (XAI) mapping:</a:t>
+            </a:r>
+          </a:p>
+          <a:p>
+            <a:pPr lvl="1">
+              <a:spcAft>
+                <a:spcPts val="400"/>
+              </a:spcAft>
+              <a:defRPr sz="1250" i="1">
+                <a:solidFill>
+                  <a:srgbClr val="1F2937"/>
+                </a:solidFill>
+                <a:latin typeface="Helvetica"/>
+              </a:defRPr>
+            </a:pPr>
+            <a:r>
+              <a:t>  - Users see scores but cannot inspect which indicator has the largest impact on outcomes.</a:t>
             </a:r>
           </a:p>
           <a:p>
             <a:pPr>
-              <a:defRPr sz="1600">
-                <a:solidFill>
-                  <a:srgbClr val="FFFFFF"/>
-                </a:solidFill>
-              </a:defRPr>
-            </a:pPr>
-            <a:r>
-              <a:t>Reporting Engine: ReportLab document builder</a:t>
+              <a:spcAft>
+                <a:spcPts val="800"/>
+              </a:spcAft>
+              <a:defRPr sz="1500">
+                <a:solidFill>
+                  <a:srgbClr val="1F2937"/>
+                </a:solidFill>
+                <a:latin typeface="Helvetica"/>
+              </a:defRPr>
+            </a:pPr>
+            <a:r>
+              <a:t>• Decision Obstacles in Public Policy:</a:t>
+            </a:r>
+          </a:p>
+          <a:p>
+            <a:pPr lvl="1">
+              <a:spcAft>
+                <a:spcPts val="400"/>
+              </a:spcAft>
+              <a:defRPr sz="1250" i="1">
+                <a:solidFill>
+                  <a:srgbClr val="1F2937"/>
+                </a:solidFill>
+                <a:latin typeface="Helvetica"/>
+              </a:defRPr>
+            </a:pPr>
+            <a:r>
+              <a:t>  - Governments need objective, data-driven validation to allocate development funds.</a:t>
+            </a:r>
+          </a:p>
+          <a:p>
+            <a:pPr>
+              <a:spcAft>
+                <a:spcPts val="800"/>
+              </a:spcAft>
+              <a:defRPr sz="1500">
+                <a:solidFill>
+                  <a:srgbClr val="1F2937"/>
+                </a:solidFill>
+                <a:latin typeface="Helvetica"/>
+              </a:defRPr>
+            </a:pPr>
+            <a:r>
+              <a:t>• Proposed AI Platform Solution:</a:t>
+            </a:r>
+          </a:p>
+          <a:p>
+            <a:pPr lvl="1">
+              <a:spcAft>
+                <a:spcPts val="400"/>
+              </a:spcAft>
+              <a:defRPr sz="1250" i="1">
+                <a:solidFill>
+                  <a:srgbClr val="1F2937"/>
+                </a:solidFill>
+                <a:latin typeface="Helvetica"/>
+              </a:defRPr>
+            </a:pPr>
+            <a:r>
+              <a:t>  - A portal where sliders simulate parameters, yielding predictions, explainable weights, and policy advice instantly.</a:t>
             </a:r>
           </a:p>
         </p:txBody>
@@ -3512,7 +7547,7 @@
     <p:bg>
       <p:bgPr>
         <a:solidFill>
-          <a:srgbClr val="0F172A"/>
+          <a:srgbClr val="F3F4F6"/>
         </a:solidFill>
         <a:effectLst/>
       </p:bgPr>
@@ -3526,81 +7561,2426 @@
       <p:grpSpPr/>
       <p:sp>
         <p:nvSpPr>
-          <p:cNvPr id="2" name="Title 1"/>
-          <p:cNvSpPr>
-            <a:spLocks noGrp="1"/>
-          </p:cNvSpPr>
-          <p:nvPr>
-            <p:ph type="title"/>
-          </p:nvPr>
-        </p:nvSpPr>
-        <p:spPr/>
-        <p:txBody>
-          <a:bodyPr/>
+          <p:cNvPr id="2" name="TextBox 1"/>
+          <p:cNvSpPr txBox="1"/>
+          <p:nvPr/>
+        </p:nvSpPr>
+        <p:spPr>
+          <a:xfrm>
+            <a:off x="548640" y="365760"/>
+            <a:ext cx="11094415" cy="731520"/>
+          </a:xfrm>
+          <a:prstGeom prst="rect">
+            <a:avLst/>
+          </a:prstGeom>
+          <a:noFill/>
+        </p:spPr>
+        <p:txBody>
+          <a:bodyPr wrap="square" lIns="0" tIns="0" rIns="0" bIns="0">
+            <a:spAutoFit/>
+          </a:bodyPr>
           <a:lstStyle/>
           <a:p>
             <a:pPr>
-              <a:defRPr b="1">
-                <a:solidFill>
-                  <a:srgbClr val="FFFFFF"/>
-                </a:solidFill>
-              </a:defRPr>
-            </a:pPr>
-            <a:r>
-              <a:t>Future Scope &amp; Roadmap</a:t>
-            </a:r>
-          </a:p>
-        </p:txBody>
-      </p:sp>
-      <p:sp>
-        <p:nvSpPr>
-          <p:cNvPr id="3" name="Content Placeholder 2"/>
-          <p:cNvSpPr>
-            <a:spLocks noGrp="1"/>
-          </p:cNvSpPr>
-          <p:nvPr>
-            <p:ph idx="1"/>
-          </p:nvPr>
-        </p:nvSpPr>
-        <p:spPr/>
-        <p:txBody>
-          <a:bodyPr/>
+              <a:defRPr b="1" sz="2800">
+                <a:solidFill>
+                  <a:srgbClr val="1E3A8A"/>
+                </a:solidFill>
+                <a:latin typeface="Helvetica"/>
+              </a:defRPr>
+            </a:pPr>
+            <a:r>
+              <a:t>Project Objectives</a:t>
+            </a:r>
+          </a:p>
+        </p:txBody>
+      </p:sp>
+      <p:sp>
+        <p:nvSpPr>
+          <p:cNvPr id="3" name="Rectangle 2"/>
+          <p:cNvSpPr/>
+          <p:nvPr/>
+        </p:nvSpPr>
+        <p:spPr>
+          <a:xfrm>
+            <a:off x="548640" y="1143000"/>
+            <a:ext cx="11094415" cy="36576"/>
+          </a:xfrm>
+          <a:prstGeom prst="rect">
+            <a:avLst/>
+          </a:prstGeom>
+          <a:solidFill>
+            <a:srgbClr val="0F766E"/>
+          </a:solidFill>
+          <a:ln>
+            <a:solidFill>
+              <a:srgbClr val="0F766E"/>
+            </a:solidFill>
+          </a:ln>
+        </p:spPr>
+        <p:style>
+          <a:lnRef idx="1">
+            <a:schemeClr val="accent1"/>
+          </a:lnRef>
+          <a:fillRef idx="3">
+            <a:schemeClr val="accent1"/>
+          </a:fillRef>
+          <a:effectRef idx="2">
+            <a:schemeClr val="accent1"/>
+          </a:effectRef>
+          <a:fontRef idx="minor">
+            <a:schemeClr val="lt1"/>
+          </a:fontRef>
+        </p:style>
+        <p:txBody>
+          <a:bodyPr rtlCol="0" anchor="ctr"/>
           <a:lstStyle/>
-          <a:p/>
+          <a:p>
+            <a:pPr algn="ctr"/>
+          </a:p>
+        </p:txBody>
+      </p:sp>
+      <p:sp>
+        <p:nvSpPr>
+          <p:cNvPr id="4" name="TextBox 3"/>
+          <p:cNvSpPr txBox="1"/>
+          <p:nvPr/>
+        </p:nvSpPr>
+        <p:spPr>
+          <a:xfrm>
+            <a:off x="731520" y="1645920"/>
+            <a:ext cx="10728655" cy="4572000"/>
+          </a:xfrm>
+          <a:prstGeom prst="rect">
+            <a:avLst/>
+          </a:prstGeom>
+          <a:noFill/>
+        </p:spPr>
+        <p:txBody>
+          <a:bodyPr wrap="square" lIns="0" tIns="0" rIns="0" bIns="0">
+            <a:spAutoFit/>
+          </a:bodyPr>
+          <a:lstStyle/>
           <a:p>
             <a:pPr>
-              <a:defRPr sz="1600">
-                <a:solidFill>
-                  <a:srgbClr val="FFFFFF"/>
-                </a:solidFill>
-              </a:defRPr>
-            </a:pPr>
-            <a:r>
-              <a:t>Integrate dynamic policy recommendation engines.</a:t>
+              <a:spcAft>
+                <a:spcPts val="800"/>
+              </a:spcAft>
+              <a:defRPr sz="1500">
+                <a:solidFill>
+                  <a:srgbClr val="1F2937"/>
+                </a:solidFill>
+                <a:latin typeface="Helvetica"/>
+              </a:defRPr>
+            </a:pPr>
+            <a:r>
+              <a:t>• High Inference Accuracy: Target &gt;95% accuracy in classifying HDI category.</a:t>
             </a:r>
           </a:p>
           <a:p>
             <a:pPr>
-              <a:defRPr sz="1600">
-                <a:solidFill>
-                  <a:srgbClr val="FFFFFF"/>
-                </a:solidFill>
-              </a:defRPr>
-            </a:pPr>
-            <a:r>
-              <a:t>Establish global APIs to automatically fetch data from the World Bank.</a:t>
+              <a:spcAft>
+                <a:spcPts val="800"/>
+              </a:spcAft>
+              <a:defRPr sz="1500">
+                <a:solidFill>
+                  <a:srgbClr val="1F2937"/>
+                </a:solidFill>
+                <a:latin typeface="Helvetica"/>
+              </a:defRPr>
+            </a:pPr>
+            <a:r>
+              <a:t>• Companion Regression Model: Incorporate continuous scoring to estimate index value (0.000 to 1.000).</a:t>
             </a:r>
           </a:p>
           <a:p>
             <a:pPr>
-              <a:defRPr sz="1600">
-                <a:solidFill>
-                  <a:srgbClr val="FFFFFF"/>
-                </a:solidFill>
-              </a:defRPr>
-            </a:pPr>
-            <a:r>
-              <a:t>Incorporate deep learning Multi-Layer Perceptrons.</a:t>
+              <a:spcAft>
+                <a:spcPts val="800"/>
+              </a:spcAft>
+              <a:defRPr sz="1500">
+                <a:solidFill>
+                  <a:srgbClr val="1F2937"/>
+                </a:solidFill>
+                <a:latin typeface="Helvetica"/>
+              </a:defRPr>
+            </a:pPr>
+            <a:r>
+              <a:t>• Expose Explainable AI: Formulate and plot local parameter contributions for trust and safety.</a:t>
+            </a:r>
+          </a:p>
+          <a:p>
+            <a:pPr>
+              <a:spcAft>
+                <a:spcPts val="800"/>
+              </a:spcAft>
+              <a:defRPr sz="1500">
+                <a:solidFill>
+                  <a:srgbClr val="1F2937"/>
+                </a:solidFill>
+                <a:latin typeface="Helvetica"/>
+              </a:defRPr>
+            </a:pPr>
+            <a:r>
+              <a:t>• Policy Advice Generator: Program an advisor that compares inputs with world medians, highlighting focus investments.</a:t>
+            </a:r>
+          </a:p>
+          <a:p>
+            <a:pPr>
+              <a:spcAft>
+                <a:spcPts val="800"/>
+              </a:spcAft>
+              <a:defRPr sz="1500">
+                <a:solidFill>
+                  <a:srgbClr val="1F2937"/>
+                </a:solidFill>
+                <a:latin typeface="Helvetica"/>
+              </a:defRPr>
+            </a:pPr>
+            <a:r>
+              <a:t>• Data Persistence Logging: Map SQLite schemas to save prediction histories securely.</a:t>
+            </a:r>
+          </a:p>
+          <a:p>
+            <a:pPr>
+              <a:spcAft>
+                <a:spcPts val="800"/>
+              </a:spcAft>
+              <a:defRPr sz="1500">
+                <a:solidFill>
+                  <a:srgbClr val="1F2937"/>
+                </a:solidFill>
+                <a:latin typeface="Helvetica"/>
+              </a:defRPr>
+            </a:pPr>
+            <a:r>
+              <a:t>• Client-Ready Reporting: Render downloadable PDF summary reports on-the-fly.</a:t>
+            </a:r>
+          </a:p>
+        </p:txBody>
+      </p:sp>
+    </p:spTree>
+  </p:cSld>
+  <p:clrMapOvr>
+    <a:masterClrMapping/>
+  </p:clrMapOvr>
+</p:sld>
+</file>
+
+<file path=ppt/slides/slide6.xml><?xml version="1.0" encoding="utf-8"?>
+<p:sld xmlns:a="http://schemas.openxmlformats.org/drawingml/2006/main" xmlns:p="http://schemas.openxmlformats.org/presentationml/2006/main" xmlns:r="http://schemas.openxmlformats.org/officeDocument/2006/relationships">
+  <p:cSld>
+    <p:bg>
+      <p:bgPr>
+        <a:solidFill>
+          <a:srgbClr val="F3F4F6"/>
+        </a:solidFill>
+        <a:effectLst/>
+      </p:bgPr>
+    </p:bg>
+    <p:spTree>
+      <p:nvGrpSpPr>
+        <p:cNvPr id="1" name=""/>
+        <p:cNvGrpSpPr/>
+        <p:nvPr/>
+      </p:nvGrpSpPr>
+      <p:grpSpPr/>
+      <p:sp>
+        <p:nvSpPr>
+          <p:cNvPr id="2" name="TextBox 1"/>
+          <p:cNvSpPr txBox="1"/>
+          <p:nvPr/>
+        </p:nvSpPr>
+        <p:spPr>
+          <a:xfrm>
+            <a:off x="548640" y="365760"/>
+            <a:ext cx="11094415" cy="731520"/>
+          </a:xfrm>
+          <a:prstGeom prst="rect">
+            <a:avLst/>
+          </a:prstGeom>
+          <a:noFill/>
+        </p:spPr>
+        <p:txBody>
+          <a:bodyPr wrap="square" lIns="0" tIns="0" rIns="0" bIns="0">
+            <a:spAutoFit/>
+          </a:bodyPr>
+          <a:lstStyle/>
+          <a:p>
+            <a:pPr>
+              <a:defRPr b="1" sz="2800">
+                <a:solidFill>
+                  <a:srgbClr val="1E3A8A"/>
+                </a:solidFill>
+                <a:latin typeface="Helvetica"/>
+              </a:defRPr>
+            </a:pPr>
+            <a:r>
+              <a:t>System Technology Stack</a:t>
+            </a:r>
+          </a:p>
+        </p:txBody>
+      </p:sp>
+      <p:sp>
+        <p:nvSpPr>
+          <p:cNvPr id="3" name="Rectangle 2"/>
+          <p:cNvSpPr/>
+          <p:nvPr/>
+        </p:nvSpPr>
+        <p:spPr>
+          <a:xfrm>
+            <a:off x="548640" y="1143000"/>
+            <a:ext cx="11094415" cy="36576"/>
+          </a:xfrm>
+          <a:prstGeom prst="rect">
+            <a:avLst/>
+          </a:prstGeom>
+          <a:solidFill>
+            <a:srgbClr val="0F766E"/>
+          </a:solidFill>
+          <a:ln>
+            <a:solidFill>
+              <a:srgbClr val="0F766E"/>
+            </a:solidFill>
+          </a:ln>
+        </p:spPr>
+        <p:style>
+          <a:lnRef idx="1">
+            <a:schemeClr val="accent1"/>
+          </a:lnRef>
+          <a:fillRef idx="3">
+            <a:schemeClr val="accent1"/>
+          </a:fillRef>
+          <a:effectRef idx="2">
+            <a:schemeClr val="accent1"/>
+          </a:effectRef>
+          <a:fontRef idx="minor">
+            <a:schemeClr val="lt1"/>
+          </a:fontRef>
+        </p:style>
+        <p:txBody>
+          <a:bodyPr rtlCol="0" anchor="ctr"/>
+          <a:lstStyle/>
+          <a:p>
+            <a:pPr algn="ctr"/>
+          </a:p>
+        </p:txBody>
+      </p:sp>
+      <p:graphicFrame>
+        <p:nvGraphicFramePr>
+          <p:cNvPr id="4" name="Table 3"/>
+          <p:cNvGraphicFramePr>
+            <a:graphicFrameLocks noGrp="1"/>
+          </p:cNvGraphicFramePr>
+          <p:nvPr/>
+        </p:nvGraphicFramePr>
+        <p:xfrm>
+          <a:off x="731520" y="1645920"/>
+          <a:ext cx="10728655" cy="4114800"/>
+        </p:xfrm>
+        <a:graphic>
+          <a:graphicData uri="http://schemas.openxmlformats.org/drawingml/2006/table">
+            <a:tbl>
+              <a:tblPr firstRow="1" bandRow="1">
+                <a:tableStyleId>{5C22544A-7EE6-4342-B048-85BDC9FD1C3A}</a:tableStyleId>
+              </a:tblPr>
+              <a:tblGrid>
+                <a:gridCol w="3576218"/>
+                <a:gridCol w="3576218"/>
+                <a:gridCol w="3576219"/>
+              </a:tblGrid>
+              <a:tr h="685800">
+                <a:tc>
+                  <a:txBody>
+                    <a:bodyPr/>
+                    <a:lstStyle/>
+                    <a:p>
+                      <a:pPr algn="l">
+                        <a:defRPr b="1" sz="1300">
+                          <a:solidFill>
+                            <a:srgbClr val="FFFFFF"/>
+                          </a:solidFill>
+                          <a:latin typeface="Helvetica"/>
+                        </a:defRPr>
+                      </a:pPr>
+                      <a:r>
+                        <a:t>Layer</a:t>
+                      </a:r>
+                    </a:p>
+                  </a:txBody>
+                  <a:tcPr>
+                    <a:solidFill>
+                      <a:srgbClr val="1E3A8A"/>
+                    </a:solidFill>
+                  </a:tcPr>
+                </a:tc>
+                <a:tc>
+                  <a:txBody>
+                    <a:bodyPr/>
+                    <a:lstStyle/>
+                    <a:p>
+                      <a:pPr algn="l">
+                        <a:defRPr b="1" sz="1300">
+                          <a:solidFill>
+                            <a:srgbClr val="FFFFFF"/>
+                          </a:solidFill>
+                          <a:latin typeface="Helvetica"/>
+                        </a:defRPr>
+                      </a:pPr>
+                      <a:r>
+                        <a:t>Technology</a:t>
+                      </a:r>
+                    </a:p>
+                  </a:txBody>
+                  <a:tcPr>
+                    <a:solidFill>
+                      <a:srgbClr val="1E3A8A"/>
+                    </a:solidFill>
+                  </a:tcPr>
+                </a:tc>
+                <a:tc>
+                  <a:txBody>
+                    <a:bodyPr/>
+                    <a:lstStyle/>
+                    <a:p>
+                      <a:pPr algn="l">
+                        <a:defRPr b="1" sz="1300">
+                          <a:solidFill>
+                            <a:srgbClr val="FFFFFF"/>
+                          </a:solidFill>
+                          <a:latin typeface="Helvetica"/>
+                        </a:defRPr>
+                      </a:pPr>
+                      <a:r>
+                        <a:t>Primary Role &amp; Application</a:t>
+                      </a:r>
+                    </a:p>
+                  </a:txBody>
+                  <a:tcPr>
+                    <a:solidFill>
+                      <a:srgbClr val="1E3A8A"/>
+                    </a:solidFill>
+                  </a:tcPr>
+                </a:tc>
+              </a:tr>
+              <a:tr h="685800">
+                <a:tc>
+                  <a:txBody>
+                    <a:bodyPr/>
+                    <a:lstStyle/>
+                    <a:p>
+                      <a:pPr algn="l">
+                        <a:defRPr b="1" sz="1100">
+                          <a:solidFill>
+                            <a:srgbClr val="1F2937"/>
+                          </a:solidFill>
+                          <a:latin typeface="Helvetica"/>
+                        </a:defRPr>
+                      </a:pPr>
+                      <a:r>
+                        <a:t>Programming Language</a:t>
+                      </a:r>
+                    </a:p>
+                  </a:txBody>
+                  <a:tcPr>
+                    <a:solidFill>
+                      <a:srgbClr val="FFFFFF"/>
+                    </a:solidFill>
+                  </a:tcPr>
+                </a:tc>
+                <a:tc>
+                  <a:txBody>
+                    <a:bodyPr/>
+                    <a:lstStyle/>
+                    <a:p>
+                      <a:pPr algn="l">
+                        <a:defRPr b="0" sz="1100">
+                          <a:solidFill>
+                            <a:srgbClr val="1F2937"/>
+                          </a:solidFill>
+                          <a:latin typeface="Helvetica"/>
+                        </a:defRPr>
+                      </a:pPr>
+                      <a:r>
+                        <a:t>Python 3.11</a:t>
+                      </a:r>
+                    </a:p>
+                  </a:txBody>
+                  <a:tcPr>
+                    <a:solidFill>
+                      <a:srgbClr val="FFFFFF"/>
+                    </a:solidFill>
+                  </a:tcPr>
+                </a:tc>
+                <a:tc>
+                  <a:txBody>
+                    <a:bodyPr/>
+                    <a:lstStyle/>
+                    <a:p>
+                      <a:pPr algn="l">
+                        <a:defRPr b="0" sz="1100">
+                          <a:solidFill>
+                            <a:srgbClr val="1F2937"/>
+                          </a:solidFill>
+                          <a:latin typeface="Helvetica"/>
+                        </a:defRPr>
+                      </a:pPr>
+                      <a:r>
+                        <a:t>Back-end scripts, model processing, database logic, PDF compiler</a:t>
+                      </a:r>
+                    </a:p>
+                  </a:txBody>
+                  <a:tcPr>
+                    <a:solidFill>
+                      <a:srgbClr val="FFFFFF"/>
+                    </a:solidFill>
+                  </a:tcPr>
+                </a:tc>
+              </a:tr>
+              <a:tr h="685800">
+                <a:tc>
+                  <a:txBody>
+                    <a:bodyPr/>
+                    <a:lstStyle/>
+                    <a:p>
+                      <a:pPr algn="l">
+                        <a:defRPr b="1" sz="1100">
+                          <a:solidFill>
+                            <a:srgbClr val="1F2937"/>
+                          </a:solidFill>
+                          <a:latin typeface="Helvetica"/>
+                        </a:defRPr>
+                      </a:pPr>
+                      <a:r>
+                        <a:t>Backend Web</a:t>
+                      </a:r>
+                    </a:p>
+                  </a:txBody>
+                  <a:tcPr>
+                    <a:solidFill>
+                      <a:srgbClr val="F3F4F6"/>
+                    </a:solidFill>
+                  </a:tcPr>
+                </a:tc>
+                <a:tc>
+                  <a:txBody>
+                    <a:bodyPr/>
+                    <a:lstStyle/>
+                    <a:p>
+                      <a:pPr algn="l">
+                        <a:defRPr b="0" sz="1100">
+                          <a:solidFill>
+                            <a:srgbClr val="1F2937"/>
+                          </a:solidFill>
+                          <a:latin typeface="Helvetica"/>
+                        </a:defRPr>
+                      </a:pPr>
+                      <a:r>
+                        <a:t>Flask Framework</a:t>
+                      </a:r>
+                    </a:p>
+                  </a:txBody>
+                  <a:tcPr>
+                    <a:solidFill>
+                      <a:srgbClr val="F3F4F6"/>
+                    </a:solidFill>
+                  </a:tcPr>
+                </a:tc>
+                <a:tc>
+                  <a:txBody>
+                    <a:bodyPr/>
+                    <a:lstStyle/>
+                    <a:p>
+                      <a:pPr algn="l">
+                        <a:defRPr b="0" sz="1100">
+                          <a:solidFill>
+                            <a:srgbClr val="1F2937"/>
+                          </a:solidFill>
+                          <a:latin typeface="Helvetica"/>
+                        </a:defRPr>
+                      </a:pPr>
+                      <a:r>
+                        <a:t>HTTP routing, input validation filters, REST APIs, JSON outputs</a:t>
+                      </a:r>
+                    </a:p>
+                  </a:txBody>
+                  <a:tcPr>
+                    <a:solidFill>
+                      <a:srgbClr val="F3F4F6"/>
+                    </a:solidFill>
+                  </a:tcPr>
+                </a:tc>
+              </a:tr>
+              <a:tr h="685800">
+                <a:tc>
+                  <a:txBody>
+                    <a:bodyPr/>
+                    <a:lstStyle/>
+                    <a:p>
+                      <a:pPr algn="l">
+                        <a:defRPr b="1" sz="1100">
+                          <a:solidFill>
+                            <a:srgbClr val="1F2937"/>
+                          </a:solidFill>
+                          <a:latin typeface="Helvetica"/>
+                        </a:defRPr>
+                      </a:pPr>
+                      <a:r>
+                        <a:t>Machine Learning</a:t>
+                      </a:r>
+                    </a:p>
+                  </a:txBody>
+                  <a:tcPr>
+                    <a:solidFill>
+                      <a:srgbClr val="FFFFFF"/>
+                    </a:solidFill>
+                  </a:tcPr>
+                </a:tc>
+                <a:tc>
+                  <a:txBody>
+                    <a:bodyPr/>
+                    <a:lstStyle/>
+                    <a:p>
+                      <a:pPr algn="l">
+                        <a:defRPr b="0" sz="1100">
+                          <a:solidFill>
+                            <a:srgbClr val="1F2937"/>
+                          </a:solidFill>
+                          <a:latin typeface="Helvetica"/>
+                        </a:defRPr>
+                      </a:pPr>
+                      <a:r>
+                        <a:t>Scikit-Learn (SVM / Random Forest)</a:t>
+                      </a:r>
+                    </a:p>
+                  </a:txBody>
+                  <a:tcPr>
+                    <a:solidFill>
+                      <a:srgbClr val="FFFFFF"/>
+                    </a:solidFill>
+                  </a:tcPr>
+                </a:tc>
+                <a:tc>
+                  <a:txBody>
+                    <a:bodyPr/>
+                    <a:lstStyle/>
+                    <a:p>
+                      <a:pPr algn="l">
+                        <a:defRPr b="0" sz="1100">
+                          <a:solidFill>
+                            <a:srgbClr val="1F2937"/>
+                          </a:solidFill>
+                          <a:latin typeface="Helvetica"/>
+                        </a:defRPr>
+                      </a:pPr>
+                      <a:r>
+                        <a:t>Model training, pipeline benchmarks, model loading (.joblib)</a:t>
+                      </a:r>
+                    </a:p>
+                  </a:txBody>
+                  <a:tcPr>
+                    <a:solidFill>
+                      <a:srgbClr val="FFFFFF"/>
+                    </a:solidFill>
+                  </a:tcPr>
+                </a:tc>
+              </a:tr>
+              <a:tr h="685800">
+                <a:tc>
+                  <a:txBody>
+                    <a:bodyPr/>
+                    <a:lstStyle/>
+                    <a:p>
+                      <a:pPr algn="l">
+                        <a:defRPr b="1" sz="1100">
+                          <a:solidFill>
+                            <a:srgbClr val="1F2937"/>
+                          </a:solidFill>
+                          <a:latin typeface="Helvetica"/>
+                        </a:defRPr>
+                      </a:pPr>
+                      <a:r>
+                        <a:t>Database Layer</a:t>
+                      </a:r>
+                    </a:p>
+                  </a:txBody>
+                  <a:tcPr>
+                    <a:solidFill>
+                      <a:srgbClr val="F3F4F6"/>
+                    </a:solidFill>
+                  </a:tcPr>
+                </a:tc>
+                <a:tc>
+                  <a:txBody>
+                    <a:bodyPr/>
+                    <a:lstStyle/>
+                    <a:p>
+                      <a:pPr algn="l">
+                        <a:defRPr b="0" sz="1100">
+                          <a:solidFill>
+                            <a:srgbClr val="1F2937"/>
+                          </a:solidFill>
+                          <a:latin typeface="Helvetica"/>
+                        </a:defRPr>
+                      </a:pPr>
+                      <a:r>
+                        <a:t>SQLite3 Engine</a:t>
+                      </a:r>
+                    </a:p>
+                  </a:txBody>
+                  <a:tcPr>
+                    <a:solidFill>
+                      <a:srgbClr val="F3F4F6"/>
+                    </a:solidFill>
+                  </a:tcPr>
+                </a:tc>
+                <a:tc>
+                  <a:txBody>
+                    <a:bodyPr/>
+                    <a:lstStyle/>
+                    <a:p>
+                      <a:pPr algn="l">
+                        <a:defRPr b="0" sz="1100">
+                          <a:solidFill>
+                            <a:srgbClr val="1F2937"/>
+                          </a:solidFill>
+                          <a:latin typeface="Helvetica"/>
+                        </a:defRPr>
+                      </a:pPr>
+                      <a:r>
+                        <a:t>Persistent database tables logging prediction logs</a:t>
+                      </a:r>
+                    </a:p>
+                  </a:txBody>
+                  <a:tcPr>
+                    <a:solidFill>
+                      <a:srgbClr val="F3F4F6"/>
+                    </a:solidFill>
+                  </a:tcPr>
+                </a:tc>
+              </a:tr>
+              <a:tr h="685800">
+                <a:tc>
+                  <a:txBody>
+                    <a:bodyPr/>
+                    <a:lstStyle/>
+                    <a:p>
+                      <a:pPr algn="l">
+                        <a:defRPr b="1" sz="1100">
+                          <a:solidFill>
+                            <a:srgbClr val="1F2937"/>
+                          </a:solidFill>
+                          <a:latin typeface="Helvetica"/>
+                        </a:defRPr>
+                      </a:pPr>
+                      <a:r>
+                        <a:t>Frontend UI Portal</a:t>
+                      </a:r>
+                    </a:p>
+                  </a:txBody>
+                  <a:tcPr>
+                    <a:solidFill>
+                      <a:srgbClr val="FFFFFF"/>
+                    </a:solidFill>
+                  </a:tcPr>
+                </a:tc>
+                <a:tc>
+                  <a:txBody>
+                    <a:bodyPr/>
+                    <a:lstStyle/>
+                    <a:p>
+                      <a:pPr algn="l">
+                        <a:defRPr b="0" sz="1100">
+                          <a:solidFill>
+                            <a:srgbClr val="1F2937"/>
+                          </a:solidFill>
+                          <a:latin typeface="Helvetica"/>
+                        </a:defRPr>
+                      </a:pPr>
+                      <a:r>
+                        <a:t>HTML5, CSS3, ES6 Javascript, Chart.js</a:t>
+                      </a:r>
+                    </a:p>
+                  </a:txBody>
+                  <a:tcPr>
+                    <a:solidFill>
+                      <a:srgbClr val="FFFFFF"/>
+                    </a:solidFill>
+                  </a:tcPr>
+                </a:tc>
+                <a:tc>
+                  <a:txBody>
+                    <a:bodyPr/>
+                    <a:lstStyle/>
+                    <a:p>
+                      <a:pPr algn="l">
+                        <a:defRPr b="0" sz="1100">
+                          <a:solidFill>
+                            <a:srgbClr val="1F2937"/>
+                          </a:solidFill>
+                          <a:latin typeface="Helvetica"/>
+                        </a:defRPr>
+                      </a:pPr>
+                      <a:r>
+                        <a:t>Responsive layout grids, light/dark mode variables, dynamic log charts</a:t>
+                      </a:r>
+                    </a:p>
+                  </a:txBody>
+                  <a:tcPr>
+                    <a:solidFill>
+                      <a:srgbClr val="FFFFFF"/>
+                    </a:solidFill>
+                  </a:tcPr>
+                </a:tc>
+              </a:tr>
+            </a:tbl>
+          </a:graphicData>
+        </a:graphic>
+      </p:graphicFrame>
+    </p:spTree>
+  </p:cSld>
+  <p:clrMapOvr>
+    <a:masterClrMapping/>
+  </p:clrMapOvr>
+</p:sld>
+</file>
+
+<file path=ppt/slides/slide7.xml><?xml version="1.0" encoding="utf-8"?>
+<p:sld xmlns:a="http://schemas.openxmlformats.org/drawingml/2006/main" xmlns:p="http://schemas.openxmlformats.org/presentationml/2006/main" xmlns:r="http://schemas.openxmlformats.org/officeDocument/2006/relationships">
+  <p:cSld>
+    <p:bg>
+      <p:bgPr>
+        <a:solidFill>
+          <a:srgbClr val="F3F4F6"/>
+        </a:solidFill>
+        <a:effectLst/>
+      </p:bgPr>
+    </p:bg>
+    <p:spTree>
+      <p:nvGrpSpPr>
+        <p:cNvPr id="1" name=""/>
+        <p:cNvGrpSpPr/>
+        <p:nvPr/>
+      </p:nvGrpSpPr>
+      <p:grpSpPr/>
+      <p:sp>
+        <p:nvSpPr>
+          <p:cNvPr id="2" name="TextBox 1"/>
+          <p:cNvSpPr txBox="1"/>
+          <p:nvPr/>
+        </p:nvSpPr>
+        <p:spPr>
+          <a:xfrm>
+            <a:off x="548640" y="365760"/>
+            <a:ext cx="11094415" cy="731520"/>
+          </a:xfrm>
+          <a:prstGeom prst="rect">
+            <a:avLst/>
+          </a:prstGeom>
+          <a:noFill/>
+        </p:spPr>
+        <p:txBody>
+          <a:bodyPr wrap="square" lIns="0" tIns="0" rIns="0" bIns="0">
+            <a:spAutoFit/>
+          </a:bodyPr>
+          <a:lstStyle/>
+          <a:p>
+            <a:pPr>
+              <a:defRPr b="1" sz="2800">
+                <a:solidFill>
+                  <a:srgbClr val="1E3A8A"/>
+                </a:solidFill>
+                <a:latin typeface="Helvetica"/>
+              </a:defRPr>
+            </a:pPr>
+            <a:r>
+              <a:t>System Architecture Mapping</a:t>
+            </a:r>
+          </a:p>
+        </p:txBody>
+      </p:sp>
+      <p:sp>
+        <p:nvSpPr>
+          <p:cNvPr id="3" name="Rectangle 2"/>
+          <p:cNvSpPr/>
+          <p:nvPr/>
+        </p:nvSpPr>
+        <p:spPr>
+          <a:xfrm>
+            <a:off x="548640" y="1143000"/>
+            <a:ext cx="11094415" cy="36576"/>
+          </a:xfrm>
+          <a:prstGeom prst="rect">
+            <a:avLst/>
+          </a:prstGeom>
+          <a:solidFill>
+            <a:srgbClr val="0F766E"/>
+          </a:solidFill>
+          <a:ln>
+            <a:solidFill>
+              <a:srgbClr val="0F766E"/>
+            </a:solidFill>
+          </a:ln>
+        </p:spPr>
+        <p:style>
+          <a:lnRef idx="1">
+            <a:schemeClr val="accent1"/>
+          </a:lnRef>
+          <a:fillRef idx="3">
+            <a:schemeClr val="accent1"/>
+          </a:fillRef>
+          <a:effectRef idx="2">
+            <a:schemeClr val="accent1"/>
+          </a:effectRef>
+          <a:fontRef idx="minor">
+            <a:schemeClr val="lt1"/>
+          </a:fontRef>
+        </p:style>
+        <p:txBody>
+          <a:bodyPr rtlCol="0" anchor="ctr"/>
+          <a:lstStyle/>
+          <a:p>
+            <a:pPr algn="ctr"/>
+          </a:p>
+        </p:txBody>
+      </p:sp>
+      <p:sp>
+        <p:nvSpPr>
+          <p:cNvPr id="4" name="TextBox 3"/>
+          <p:cNvSpPr txBox="1"/>
+          <p:nvPr/>
+        </p:nvSpPr>
+        <p:spPr>
+          <a:xfrm>
+            <a:off x="731520" y="1645920"/>
+            <a:ext cx="10728655" cy="4572000"/>
+          </a:xfrm>
+          <a:prstGeom prst="rect">
+            <a:avLst/>
+          </a:prstGeom>
+          <a:noFill/>
+        </p:spPr>
+        <p:txBody>
+          <a:bodyPr wrap="square" lIns="0" tIns="0" rIns="0" bIns="0">
+            <a:spAutoFit/>
+          </a:bodyPr>
+          <a:lstStyle/>
+          <a:p>
+            <a:pPr>
+              <a:spcAft>
+                <a:spcPts val="800"/>
+              </a:spcAft>
+              <a:defRPr sz="1500">
+                <a:solidFill>
+                  <a:srgbClr val="1F2937"/>
+                </a:solidFill>
+                <a:latin typeface="Helvetica"/>
+              </a:defRPr>
+            </a:pPr>
+            <a:r>
+              <a:t>• Architectural Paradigm: Model-View-Controller (MVC) data separation.</a:t>
+            </a:r>
+          </a:p>
+          <a:p>
+            <a:pPr>
+              <a:spcAft>
+                <a:spcPts val="800"/>
+              </a:spcAft>
+              <a:defRPr sz="1500">
+                <a:solidFill>
+                  <a:srgbClr val="1F2937"/>
+                </a:solidFill>
+                <a:latin typeface="Helvetica"/>
+              </a:defRPr>
+            </a:pPr>
+            <a:r>
+              <a:t>• Request Flow Path:</a:t>
+            </a:r>
+          </a:p>
+          <a:p>
+            <a:pPr lvl="1">
+              <a:spcAft>
+                <a:spcPts val="400"/>
+              </a:spcAft>
+              <a:defRPr sz="1250" i="1">
+                <a:solidFill>
+                  <a:srgbClr val="1F2937"/>
+                </a:solidFill>
+                <a:latin typeface="Helvetica"/>
+              </a:defRPr>
+            </a:pPr>
+            <a:r>
+              <a:t>  - 1. User Interface (Client): Sliders record socioeconomic parameters.</a:t>
+            </a:r>
+          </a:p>
+          <a:p>
+            <a:pPr lvl="1">
+              <a:spcAft>
+                <a:spcPts val="400"/>
+              </a:spcAft>
+              <a:defRPr sz="1250" i="1">
+                <a:solidFill>
+                  <a:srgbClr val="1F2937"/>
+                </a:solidFill>
+                <a:latin typeface="Helvetica"/>
+              </a:defRPr>
+            </a:pPr>
+            <a:r>
+              <a:t>  - 2. Flask Router (Backend API): Receives variables, runs input boundaries checks.</a:t>
+            </a:r>
+          </a:p>
+          <a:p>
+            <a:pPr lvl="1">
+              <a:spcAft>
+                <a:spcPts val="400"/>
+              </a:spcAft>
+              <a:defRPr sz="1250" i="1">
+                <a:solidFill>
+                  <a:srgbClr val="1F2937"/>
+                </a:solidFill>
+                <a:latin typeface="Helvetica"/>
+              </a:defRPr>
+            </a:pPr>
+            <a:r>
+              <a:t>  - 3. Machine Learning (Inference): Scaler transforms inputs; SVM Classifies class; RF Regresses continuous score.</a:t>
+            </a:r>
+          </a:p>
+          <a:p>
+            <a:pPr lvl="1">
+              <a:spcAft>
+                <a:spcPts val="400"/>
+              </a:spcAft>
+              <a:defRPr sz="1250" i="1">
+                <a:solidFill>
+                  <a:srgbClr val="1F2937"/>
+                </a:solidFill>
+                <a:latin typeface="Helvetica"/>
+              </a:defRPr>
+            </a:pPr>
+            <a:r>
+              <a:t>  - 4. Explainable AI &amp; Advisor: Local weight logs mapped; Policy rules evaluated against world medians.</a:t>
+            </a:r>
+          </a:p>
+          <a:p>
+            <a:pPr lvl="1">
+              <a:spcAft>
+                <a:spcPts val="400"/>
+              </a:spcAft>
+              <a:defRPr sz="1250" i="1">
+                <a:solidFill>
+                  <a:srgbClr val="1F2937"/>
+                </a:solidFill>
+                <a:latin typeface="Helvetica"/>
+              </a:defRPr>
+            </a:pPr>
+            <a:r>
+              <a:t>  - 5. Database Logging: SQLite logs the run parameters dynamically.</a:t>
+            </a:r>
+          </a:p>
+          <a:p>
+            <a:pPr lvl="1">
+              <a:spcAft>
+                <a:spcPts val="400"/>
+              </a:spcAft>
+              <a:defRPr sz="1250" i="1">
+                <a:solidFill>
+                  <a:srgbClr val="1F2937"/>
+                </a:solidFill>
+                <a:latin typeface="Helvetica"/>
+              </a:defRPr>
+            </a:pPr>
+            <a:r>
+              <a:t>  - 6. View Render: JSON returned to update frontend gauges, charts, and recommendations.</a:t>
+            </a:r>
+          </a:p>
+          <a:p>
+            <a:pPr>
+              <a:spcAft>
+                <a:spcPts val="800"/>
+              </a:spcAft>
+              <a:defRPr sz="1500">
+                <a:solidFill>
+                  <a:srgbClr val="1F2937"/>
+                </a:solidFill>
+                <a:latin typeface="Helvetica"/>
+              </a:defRPr>
+            </a:pPr>
+            <a:r>
+              <a:t>• Report Generation Engine: Backend reportlab module compiles the summary PDF on-the-fly.</a:t>
+            </a:r>
+          </a:p>
+        </p:txBody>
+      </p:sp>
+    </p:spTree>
+  </p:cSld>
+  <p:clrMapOvr>
+    <a:masterClrMapping/>
+  </p:clrMapOvr>
+</p:sld>
+</file>
+
+<file path=ppt/slides/slide8.xml><?xml version="1.0" encoding="utf-8"?>
+<p:sld xmlns:a="http://schemas.openxmlformats.org/drawingml/2006/main" xmlns:p="http://schemas.openxmlformats.org/presentationml/2006/main" xmlns:r="http://schemas.openxmlformats.org/officeDocument/2006/relationships">
+  <p:cSld>
+    <p:bg>
+      <p:bgPr>
+        <a:solidFill>
+          <a:srgbClr val="F3F4F6"/>
+        </a:solidFill>
+        <a:effectLst/>
+      </p:bgPr>
+    </p:bg>
+    <p:spTree>
+      <p:nvGrpSpPr>
+        <p:cNvPr id="1" name=""/>
+        <p:cNvGrpSpPr/>
+        <p:nvPr/>
+      </p:nvGrpSpPr>
+      <p:grpSpPr/>
+      <p:sp>
+        <p:nvSpPr>
+          <p:cNvPr id="2" name="TextBox 1"/>
+          <p:cNvSpPr txBox="1"/>
+          <p:nvPr/>
+        </p:nvSpPr>
+        <p:spPr>
+          <a:xfrm>
+            <a:off x="548640" y="365760"/>
+            <a:ext cx="11094415" cy="731520"/>
+          </a:xfrm>
+          <a:prstGeom prst="rect">
+            <a:avLst/>
+          </a:prstGeom>
+          <a:noFill/>
+        </p:spPr>
+        <p:txBody>
+          <a:bodyPr wrap="square" lIns="0" tIns="0" rIns="0" bIns="0">
+            <a:spAutoFit/>
+          </a:bodyPr>
+          <a:lstStyle/>
+          <a:p>
+            <a:pPr>
+              <a:defRPr b="1" sz="2800">
+                <a:solidFill>
+                  <a:srgbClr val="1E3A8A"/>
+                </a:solidFill>
+                <a:latin typeface="Helvetica"/>
+              </a:defRPr>
+            </a:pPr>
+            <a:r>
+              <a:t>Machine Learning Workflow Pipeline</a:t>
+            </a:r>
+          </a:p>
+        </p:txBody>
+      </p:sp>
+      <p:sp>
+        <p:nvSpPr>
+          <p:cNvPr id="3" name="Rectangle 2"/>
+          <p:cNvSpPr/>
+          <p:nvPr/>
+        </p:nvSpPr>
+        <p:spPr>
+          <a:xfrm>
+            <a:off x="548640" y="1143000"/>
+            <a:ext cx="11094415" cy="36576"/>
+          </a:xfrm>
+          <a:prstGeom prst="rect">
+            <a:avLst/>
+          </a:prstGeom>
+          <a:solidFill>
+            <a:srgbClr val="0F766E"/>
+          </a:solidFill>
+          <a:ln>
+            <a:solidFill>
+              <a:srgbClr val="0F766E"/>
+            </a:solidFill>
+          </a:ln>
+        </p:spPr>
+        <p:style>
+          <a:lnRef idx="1">
+            <a:schemeClr val="accent1"/>
+          </a:lnRef>
+          <a:fillRef idx="3">
+            <a:schemeClr val="accent1"/>
+          </a:fillRef>
+          <a:effectRef idx="2">
+            <a:schemeClr val="accent1"/>
+          </a:effectRef>
+          <a:fontRef idx="minor">
+            <a:schemeClr val="lt1"/>
+          </a:fontRef>
+        </p:style>
+        <p:txBody>
+          <a:bodyPr rtlCol="0" anchor="ctr"/>
+          <a:lstStyle/>
+          <a:p>
+            <a:pPr algn="ctr"/>
+          </a:p>
+        </p:txBody>
+      </p:sp>
+      <p:sp>
+        <p:nvSpPr>
+          <p:cNvPr id="4" name="TextBox 3"/>
+          <p:cNvSpPr txBox="1"/>
+          <p:nvPr/>
+        </p:nvSpPr>
+        <p:spPr>
+          <a:xfrm>
+            <a:off x="731520" y="1645920"/>
+            <a:ext cx="10728655" cy="4572000"/>
+          </a:xfrm>
+          <a:prstGeom prst="rect">
+            <a:avLst/>
+          </a:prstGeom>
+          <a:noFill/>
+        </p:spPr>
+        <p:txBody>
+          <a:bodyPr wrap="square" lIns="0" tIns="0" rIns="0" bIns="0">
+            <a:spAutoFit/>
+          </a:bodyPr>
+          <a:lstStyle/>
+          <a:p>
+            <a:pPr>
+              <a:spcAft>
+                <a:spcPts val="800"/>
+              </a:spcAft>
+              <a:defRPr sz="1500">
+                <a:solidFill>
+                  <a:srgbClr val="1F2937"/>
+                </a:solidFill>
+                <a:latin typeface="Helvetica"/>
+              </a:defRPr>
+            </a:pPr>
+            <a:r>
+              <a:t>• 1. Dataset Collection: Global UNDP human development indicators dataset.</a:t>
+            </a:r>
+          </a:p>
+          <a:p>
+            <a:pPr>
+              <a:spcAft>
+                <a:spcPts val="800"/>
+              </a:spcAft>
+              <a:defRPr sz="1500">
+                <a:solidFill>
+                  <a:srgbClr val="1F2937"/>
+                </a:solidFill>
+                <a:latin typeface="Helvetica"/>
+              </a:defRPr>
+            </a:pPr>
+            <a:r>
+              <a:t>• 2. Preprocessing &amp; Cleaning:</a:t>
+            </a:r>
+          </a:p>
+          <a:p>
+            <a:pPr lvl="1">
+              <a:spcAft>
+                <a:spcPts val="400"/>
+              </a:spcAft>
+              <a:defRPr sz="1250" i="1">
+                <a:solidFill>
+                  <a:srgbClr val="1F2937"/>
+                </a:solidFill>
+                <a:latin typeface="Helvetica"/>
+              </a:defRPr>
+            </a:pPr>
+            <a:r>
+              <a:t>  - Remove duplicate rows.</a:t>
+            </a:r>
+          </a:p>
+          <a:p>
+            <a:pPr lvl="1">
+              <a:spcAft>
+                <a:spcPts val="400"/>
+              </a:spcAft>
+              <a:defRPr sz="1250" i="1">
+                <a:solidFill>
+                  <a:srgbClr val="1F2937"/>
+                </a:solidFill>
+                <a:latin typeface="Helvetica"/>
+              </a:defRPr>
+            </a:pPr>
+            <a:r>
+              <a:t>  - Missing value imputation: Fill missing variables using country medians first, then global medians.</a:t>
+            </a:r>
+          </a:p>
+          <a:p>
+            <a:pPr lvl="1">
+              <a:spcAft>
+                <a:spcPts val="400"/>
+              </a:spcAft>
+              <a:defRPr sz="1250" i="1">
+                <a:solidFill>
+                  <a:srgbClr val="1F2937"/>
+                </a:solidFill>
+                <a:latin typeface="Helvetica"/>
+              </a:defRPr>
+            </a:pPr>
+            <a:r>
+              <a:t>  - Outlier detection: Evaluated using Interquartile Range (IQR) methods.</a:t>
+            </a:r>
+          </a:p>
+          <a:p>
+            <a:pPr>
+              <a:spcAft>
+                <a:spcPts val="800"/>
+              </a:spcAft>
+              <a:defRPr sz="1500">
+                <a:solidFill>
+                  <a:srgbClr val="1F2937"/>
+                </a:solidFill>
+                <a:latin typeface="Helvetica"/>
+              </a:defRPr>
+            </a:pPr>
+            <a:r>
+              <a:t>• 3. Feature Engineering:</a:t>
+            </a:r>
+          </a:p>
+          <a:p>
+            <a:pPr lvl="1">
+              <a:spcAft>
+                <a:spcPts val="400"/>
+              </a:spcAft>
+              <a:defRPr sz="1250" i="1">
+                <a:solidFill>
+                  <a:srgbClr val="1F2937"/>
+                </a:solidFill>
+                <a:latin typeface="Helvetica"/>
+              </a:defRPr>
+            </a:pPr>
+            <a:r>
+              <a:t>  - Log transform applied to Gross National Income (GNI) per capita (PPP $) to align scales.</a:t>
+            </a:r>
+          </a:p>
+          <a:p>
+            <a:pPr lvl="1">
+              <a:spcAft>
+                <a:spcPts val="400"/>
+              </a:spcAft>
+              <a:defRPr sz="1250" i="1">
+                <a:solidFill>
+                  <a:srgbClr val="1F2937"/>
+                </a:solidFill>
+                <a:latin typeface="Helvetica"/>
+              </a:defRPr>
+            </a:pPr>
+            <a:r>
+              <a:t>  - Feature centering &amp; scaling using StandardScaler.</a:t>
+            </a:r>
+          </a:p>
+          <a:p>
+            <a:pPr>
+              <a:spcAft>
+                <a:spcPts val="800"/>
+              </a:spcAft>
+              <a:defRPr sz="1500">
+                <a:solidFill>
+                  <a:srgbClr val="1F2937"/>
+                </a:solidFill>
+                <a:latin typeface="Helvetica"/>
+              </a:defRPr>
+            </a:pPr>
+            <a:r>
+              <a:t>• 4. Benchmarking Model Suite: Split 75% train, 25% test; evaluated 5 classifiers.</a:t>
+            </a:r>
+          </a:p>
+          <a:p>
+            <a:pPr>
+              <a:spcAft>
+                <a:spcPts val="800"/>
+              </a:spcAft>
+              <a:defRPr sz="1500">
+                <a:solidFill>
+                  <a:srgbClr val="1F2937"/>
+                </a:solidFill>
+                <a:latin typeface="Helvetica"/>
+              </a:defRPr>
+            </a:pPr>
+            <a:r>
+              <a:t>• 5. Model Deployment: Best classifier (SVM) and companion RF Regressor compiled as joblib binaries.</a:t>
+            </a:r>
+          </a:p>
+        </p:txBody>
+      </p:sp>
+    </p:spTree>
+  </p:cSld>
+  <p:clrMapOvr>
+    <a:masterClrMapping/>
+  </p:clrMapOvr>
+</p:sld>
+</file>
+
+<file path=ppt/slides/slide9.xml><?xml version="1.0" encoding="utf-8"?>
+<p:sld xmlns:a="http://schemas.openxmlformats.org/drawingml/2006/main" xmlns:p="http://schemas.openxmlformats.org/presentationml/2006/main" xmlns:r="http://schemas.openxmlformats.org/officeDocument/2006/relationships">
+  <p:cSld>
+    <p:bg>
+      <p:bgPr>
+        <a:solidFill>
+          <a:srgbClr val="F3F4F6"/>
+        </a:solidFill>
+        <a:effectLst/>
+      </p:bgPr>
+    </p:bg>
+    <p:spTree>
+      <p:nvGrpSpPr>
+        <p:cNvPr id="1" name=""/>
+        <p:cNvGrpSpPr/>
+        <p:nvPr/>
+      </p:nvGrpSpPr>
+      <p:grpSpPr/>
+      <p:sp>
+        <p:nvSpPr>
+          <p:cNvPr id="2" name="TextBox 1"/>
+          <p:cNvSpPr txBox="1"/>
+          <p:nvPr/>
+        </p:nvSpPr>
+        <p:spPr>
+          <a:xfrm>
+            <a:off x="548640" y="365760"/>
+            <a:ext cx="11094415" cy="731520"/>
+          </a:xfrm>
+          <a:prstGeom prst="rect">
+            <a:avLst/>
+          </a:prstGeom>
+          <a:noFill/>
+        </p:spPr>
+        <p:txBody>
+          <a:bodyPr wrap="square" lIns="0" tIns="0" rIns="0" bIns="0">
+            <a:spAutoFit/>
+          </a:bodyPr>
+          <a:lstStyle/>
+          <a:p>
+            <a:pPr>
+              <a:defRPr b="1" sz="2800">
+                <a:solidFill>
+                  <a:srgbClr val="1E3A8A"/>
+                </a:solidFill>
+                <a:latin typeface="Helvetica"/>
+              </a:defRPr>
+            </a:pPr>
+            <a:r>
+              <a:t>Model Benchmarking Results</a:t>
+            </a:r>
+          </a:p>
+        </p:txBody>
+      </p:sp>
+      <p:sp>
+        <p:nvSpPr>
+          <p:cNvPr id="3" name="Rectangle 2"/>
+          <p:cNvSpPr/>
+          <p:nvPr/>
+        </p:nvSpPr>
+        <p:spPr>
+          <a:xfrm>
+            <a:off x="548640" y="1143000"/>
+            <a:ext cx="11094415" cy="36576"/>
+          </a:xfrm>
+          <a:prstGeom prst="rect">
+            <a:avLst/>
+          </a:prstGeom>
+          <a:solidFill>
+            <a:srgbClr val="0F766E"/>
+          </a:solidFill>
+          <a:ln>
+            <a:solidFill>
+              <a:srgbClr val="0F766E"/>
+            </a:solidFill>
+          </a:ln>
+        </p:spPr>
+        <p:style>
+          <a:lnRef idx="1">
+            <a:schemeClr val="accent1"/>
+          </a:lnRef>
+          <a:fillRef idx="3">
+            <a:schemeClr val="accent1"/>
+          </a:fillRef>
+          <a:effectRef idx="2">
+            <a:schemeClr val="accent1"/>
+          </a:effectRef>
+          <a:fontRef idx="minor">
+            <a:schemeClr val="lt1"/>
+          </a:fontRef>
+        </p:style>
+        <p:txBody>
+          <a:bodyPr rtlCol="0" anchor="ctr"/>
+          <a:lstStyle/>
+          <a:p>
+            <a:pPr algn="ctr"/>
+          </a:p>
+        </p:txBody>
+      </p:sp>
+      <p:graphicFrame>
+        <p:nvGraphicFramePr>
+          <p:cNvPr id="4" name="Table 3"/>
+          <p:cNvGraphicFramePr>
+            <a:graphicFrameLocks noGrp="1"/>
+          </p:cNvGraphicFramePr>
+          <p:nvPr/>
+        </p:nvGraphicFramePr>
+        <p:xfrm>
+          <a:off x="731520" y="1645920"/>
+          <a:ext cx="10728655" cy="3474720"/>
+        </p:xfrm>
+        <a:graphic>
+          <a:graphicData uri="http://schemas.openxmlformats.org/drawingml/2006/table">
+            <a:tbl>
+              <a:tblPr firstRow="1" bandRow="1">
+                <a:tableStyleId>{5C22544A-7EE6-4342-B048-85BDC9FD1C3A}</a:tableStyleId>
+              </a:tblPr>
+              <a:tblGrid>
+                <a:gridCol w="1788109"/>
+                <a:gridCol w="1788109"/>
+                <a:gridCol w="1788109"/>
+                <a:gridCol w="1788109"/>
+                <a:gridCol w="1788109"/>
+                <a:gridCol w="1788110"/>
+              </a:tblGrid>
+              <a:tr h="579120">
+                <a:tc>
+                  <a:txBody>
+                    <a:bodyPr/>
+                    <a:lstStyle/>
+                    <a:p>
+                      <a:pPr algn="l">
+                        <a:defRPr b="1" sz="1100">
+                          <a:solidFill>
+                            <a:srgbClr val="FFFFFF"/>
+                          </a:solidFill>
+                          <a:latin typeface="Helvetica"/>
+                        </a:defRPr>
+                      </a:pPr>
+                      <a:r>
+                        <a:t>Algorithm</a:t>
+                      </a:r>
+                    </a:p>
+                  </a:txBody>
+                  <a:tcPr>
+                    <a:solidFill>
+                      <a:srgbClr val="1E3A8A"/>
+                    </a:solidFill>
+                  </a:tcPr>
+                </a:tc>
+                <a:tc>
+                  <a:txBody>
+                    <a:bodyPr/>
+                    <a:lstStyle/>
+                    <a:p>
+                      <a:pPr algn="l">
+                        <a:defRPr b="1" sz="1100">
+                          <a:solidFill>
+                            <a:srgbClr val="FFFFFF"/>
+                          </a:solidFill>
+                          <a:latin typeface="Helvetica"/>
+                        </a:defRPr>
+                      </a:pPr>
+                      <a:r>
+                        <a:t>Test Accuracy</a:t>
+                      </a:r>
+                    </a:p>
+                  </a:txBody>
+                  <a:tcPr>
+                    <a:solidFill>
+                      <a:srgbClr val="1E3A8A"/>
+                    </a:solidFill>
+                  </a:tcPr>
+                </a:tc>
+                <a:tc>
+                  <a:txBody>
+                    <a:bodyPr/>
+                    <a:lstStyle/>
+                    <a:p>
+                      <a:pPr algn="l">
+                        <a:defRPr b="1" sz="1100">
+                          <a:solidFill>
+                            <a:srgbClr val="FFFFFF"/>
+                          </a:solidFill>
+                          <a:latin typeface="Helvetica"/>
+                        </a:defRPr>
+                      </a:pPr>
+                      <a:r>
+                        <a:t>Weighted Precision</a:t>
+                      </a:r>
+                    </a:p>
+                  </a:txBody>
+                  <a:tcPr>
+                    <a:solidFill>
+                      <a:srgbClr val="1E3A8A"/>
+                    </a:solidFill>
+                  </a:tcPr>
+                </a:tc>
+                <a:tc>
+                  <a:txBody>
+                    <a:bodyPr/>
+                    <a:lstStyle/>
+                    <a:p>
+                      <a:pPr algn="l">
+                        <a:defRPr b="1" sz="1100">
+                          <a:solidFill>
+                            <a:srgbClr val="FFFFFF"/>
+                          </a:solidFill>
+                          <a:latin typeface="Helvetica"/>
+                        </a:defRPr>
+                      </a:pPr>
+                      <a:r>
+                        <a:t>Weighted Recall</a:t>
+                      </a:r>
+                    </a:p>
+                  </a:txBody>
+                  <a:tcPr>
+                    <a:solidFill>
+                      <a:srgbClr val="1E3A8A"/>
+                    </a:solidFill>
+                  </a:tcPr>
+                </a:tc>
+                <a:tc>
+                  <a:txBody>
+                    <a:bodyPr/>
+                    <a:lstStyle/>
+                    <a:p>
+                      <a:pPr algn="l">
+                        <a:defRPr b="1" sz="1100">
+                          <a:solidFill>
+                            <a:srgbClr val="FFFFFF"/>
+                          </a:solidFill>
+                          <a:latin typeface="Helvetica"/>
+                        </a:defRPr>
+                      </a:pPr>
+                      <a:r>
+                        <a:t>Weighted F1</a:t>
+                      </a:r>
+                    </a:p>
+                  </a:txBody>
+                  <a:tcPr>
+                    <a:solidFill>
+                      <a:srgbClr val="1E3A8A"/>
+                    </a:solidFill>
+                  </a:tcPr>
+                </a:tc>
+                <a:tc>
+                  <a:txBody>
+                    <a:bodyPr/>
+                    <a:lstStyle/>
+                    <a:p>
+                      <a:pPr algn="l">
+                        <a:defRPr b="1" sz="1100">
+                          <a:solidFill>
+                            <a:srgbClr val="FFFFFF"/>
+                          </a:solidFill>
+                          <a:latin typeface="Helvetica"/>
+                        </a:defRPr>
+                      </a:pPr>
+                      <a:r>
+                        <a:t>Train Time (s)</a:t>
+                      </a:r>
+                    </a:p>
+                  </a:txBody>
+                  <a:tcPr>
+                    <a:solidFill>
+                      <a:srgbClr val="1E3A8A"/>
+                    </a:solidFill>
+                  </a:tcPr>
+                </a:tc>
+              </a:tr>
+              <a:tr h="579120">
+                <a:tc>
+                  <a:txBody>
+                    <a:bodyPr/>
+                    <a:lstStyle/>
+                    <a:p>
+                      <a:pPr algn="l">
+                        <a:defRPr b="1" sz="1000">
+                          <a:solidFill>
+                            <a:srgbClr val="1E3A8A"/>
+                          </a:solidFill>
+                          <a:latin typeface="Helvetica"/>
+                        </a:defRPr>
+                      </a:pPr>
+                      <a:r>
+                        <a:t>Support Vector Machine</a:t>
+                      </a:r>
+                    </a:p>
+                  </a:txBody>
+                  <a:tcPr>
+                    <a:solidFill>
+                      <a:srgbClr val="FFFFFF"/>
+                    </a:solidFill>
+                  </a:tcPr>
+                </a:tc>
+                <a:tc>
+                  <a:txBody>
+                    <a:bodyPr/>
+                    <a:lstStyle/>
+                    <a:p>
+                      <a:pPr algn="l">
+                        <a:defRPr b="1" sz="1000">
+                          <a:solidFill>
+                            <a:srgbClr val="1E3A8A"/>
+                          </a:solidFill>
+                          <a:latin typeface="Helvetica"/>
+                        </a:defRPr>
+                      </a:pPr>
+                      <a:r>
+                        <a:t>98.9%</a:t>
+                      </a:r>
+                    </a:p>
+                  </a:txBody>
+                  <a:tcPr>
+                    <a:solidFill>
+                      <a:srgbClr val="FFFFFF"/>
+                    </a:solidFill>
+                  </a:tcPr>
+                </a:tc>
+                <a:tc>
+                  <a:txBody>
+                    <a:bodyPr/>
+                    <a:lstStyle/>
+                    <a:p>
+                      <a:pPr algn="l">
+                        <a:defRPr b="1" sz="1000">
+                          <a:solidFill>
+                            <a:srgbClr val="1E3A8A"/>
+                          </a:solidFill>
+                          <a:latin typeface="Helvetica"/>
+                        </a:defRPr>
+                      </a:pPr>
+                      <a:r>
+                        <a:t>99.0%</a:t>
+                      </a:r>
+                    </a:p>
+                  </a:txBody>
+                  <a:tcPr>
+                    <a:solidFill>
+                      <a:srgbClr val="FFFFFF"/>
+                    </a:solidFill>
+                  </a:tcPr>
+                </a:tc>
+                <a:tc>
+                  <a:txBody>
+                    <a:bodyPr/>
+                    <a:lstStyle/>
+                    <a:p>
+                      <a:pPr algn="l">
+                        <a:defRPr b="1" sz="1000">
+                          <a:solidFill>
+                            <a:srgbClr val="1E3A8A"/>
+                          </a:solidFill>
+                          <a:latin typeface="Helvetica"/>
+                        </a:defRPr>
+                      </a:pPr>
+                      <a:r>
+                        <a:t>98.9%</a:t>
+                      </a:r>
+                    </a:p>
+                  </a:txBody>
+                  <a:tcPr>
+                    <a:solidFill>
+                      <a:srgbClr val="FFFFFF"/>
+                    </a:solidFill>
+                  </a:tcPr>
+                </a:tc>
+                <a:tc>
+                  <a:txBody>
+                    <a:bodyPr/>
+                    <a:lstStyle/>
+                    <a:p>
+                      <a:pPr algn="l">
+                        <a:defRPr b="1" sz="1000">
+                          <a:solidFill>
+                            <a:srgbClr val="1E3A8A"/>
+                          </a:solidFill>
+                          <a:latin typeface="Helvetica"/>
+                        </a:defRPr>
+                      </a:pPr>
+                      <a:r>
+                        <a:t>98.9%</a:t>
+                      </a:r>
+                    </a:p>
+                  </a:txBody>
+                  <a:tcPr>
+                    <a:solidFill>
+                      <a:srgbClr val="FFFFFF"/>
+                    </a:solidFill>
+                  </a:tcPr>
+                </a:tc>
+                <a:tc>
+                  <a:txBody>
+                    <a:bodyPr/>
+                    <a:lstStyle/>
+                    <a:p>
+                      <a:pPr algn="l">
+                        <a:defRPr b="1" sz="1000">
+                          <a:solidFill>
+                            <a:srgbClr val="1E3A8A"/>
+                          </a:solidFill>
+                          <a:latin typeface="Helvetica"/>
+                        </a:defRPr>
+                      </a:pPr>
+                      <a:r>
+                        <a:t>0.050s</a:t>
+                      </a:r>
+                    </a:p>
+                  </a:txBody>
+                  <a:tcPr>
+                    <a:solidFill>
+                      <a:srgbClr val="FFFFFF"/>
+                    </a:solidFill>
+                  </a:tcPr>
+                </a:tc>
+              </a:tr>
+              <a:tr h="579120">
+                <a:tc>
+                  <a:txBody>
+                    <a:bodyPr/>
+                    <a:lstStyle/>
+                    <a:p>
+                      <a:pPr algn="l">
+                        <a:defRPr b="0" sz="1000">
+                          <a:solidFill>
+                            <a:srgbClr val="1F2937"/>
+                          </a:solidFill>
+                          <a:latin typeface="Helvetica"/>
+                        </a:defRPr>
+                      </a:pPr>
+                      <a:r>
+                        <a:t>Logistic Regression</a:t>
+                      </a:r>
+                    </a:p>
+                  </a:txBody>
+                  <a:tcPr>
+                    <a:solidFill>
+                      <a:srgbClr val="F3F4F6"/>
+                    </a:solidFill>
+                  </a:tcPr>
+                </a:tc>
+                <a:tc>
+                  <a:txBody>
+                    <a:bodyPr/>
+                    <a:lstStyle/>
+                    <a:p>
+                      <a:pPr algn="l">
+                        <a:defRPr b="0" sz="1000">
+                          <a:solidFill>
+                            <a:srgbClr val="1F2937"/>
+                          </a:solidFill>
+                          <a:latin typeface="Helvetica"/>
+                        </a:defRPr>
+                      </a:pPr>
+                      <a:r>
+                        <a:t>98.1%</a:t>
+                      </a:r>
+                    </a:p>
+                  </a:txBody>
+                  <a:tcPr>
+                    <a:solidFill>
+                      <a:srgbClr val="F3F4F6"/>
+                    </a:solidFill>
+                  </a:tcPr>
+                </a:tc>
+                <a:tc>
+                  <a:txBody>
+                    <a:bodyPr/>
+                    <a:lstStyle/>
+                    <a:p>
+                      <a:pPr algn="l">
+                        <a:defRPr b="0" sz="1000">
+                          <a:solidFill>
+                            <a:srgbClr val="1F2937"/>
+                          </a:solidFill>
+                          <a:latin typeface="Helvetica"/>
+                        </a:defRPr>
+                      </a:pPr>
+                      <a:r>
+                        <a:t>98.1%</a:t>
+                      </a:r>
+                    </a:p>
+                  </a:txBody>
+                  <a:tcPr>
+                    <a:solidFill>
+                      <a:srgbClr val="F3F4F6"/>
+                    </a:solidFill>
+                  </a:tcPr>
+                </a:tc>
+                <a:tc>
+                  <a:txBody>
+                    <a:bodyPr/>
+                    <a:lstStyle/>
+                    <a:p>
+                      <a:pPr algn="l">
+                        <a:defRPr b="0" sz="1000">
+                          <a:solidFill>
+                            <a:srgbClr val="1F2937"/>
+                          </a:solidFill>
+                          <a:latin typeface="Helvetica"/>
+                        </a:defRPr>
+                      </a:pPr>
+                      <a:r>
+                        <a:t>98.1%</a:t>
+                      </a:r>
+                    </a:p>
+                  </a:txBody>
+                  <a:tcPr>
+                    <a:solidFill>
+                      <a:srgbClr val="F3F4F6"/>
+                    </a:solidFill>
+                  </a:tcPr>
+                </a:tc>
+                <a:tc>
+                  <a:txBody>
+                    <a:bodyPr/>
+                    <a:lstStyle/>
+                    <a:p>
+                      <a:pPr algn="l">
+                        <a:defRPr b="0" sz="1000">
+                          <a:solidFill>
+                            <a:srgbClr val="1F2937"/>
+                          </a:solidFill>
+                          <a:latin typeface="Helvetica"/>
+                        </a:defRPr>
+                      </a:pPr>
+                      <a:r>
+                        <a:t>98.1%</a:t>
+                      </a:r>
+                    </a:p>
+                  </a:txBody>
+                  <a:tcPr>
+                    <a:solidFill>
+                      <a:srgbClr val="F3F4F6"/>
+                    </a:solidFill>
+                  </a:tcPr>
+                </a:tc>
+                <a:tc>
+                  <a:txBody>
+                    <a:bodyPr/>
+                    <a:lstStyle/>
+                    <a:p>
+                      <a:pPr algn="l">
+                        <a:defRPr b="0" sz="1000">
+                          <a:solidFill>
+                            <a:srgbClr val="1F2937"/>
+                          </a:solidFill>
+                          <a:latin typeface="Helvetica"/>
+                        </a:defRPr>
+                      </a:pPr>
+                      <a:r>
+                        <a:t>0.014s</a:t>
+                      </a:r>
+                    </a:p>
+                  </a:txBody>
+                  <a:tcPr>
+                    <a:solidFill>
+                      <a:srgbClr val="F3F4F6"/>
+                    </a:solidFill>
+                  </a:tcPr>
+                </a:tc>
+              </a:tr>
+              <a:tr h="579120">
+                <a:tc>
+                  <a:txBody>
+                    <a:bodyPr/>
+                    <a:lstStyle/>
+                    <a:p>
+                      <a:pPr algn="l">
+                        <a:defRPr b="0" sz="1000">
+                          <a:solidFill>
+                            <a:srgbClr val="1F2937"/>
+                          </a:solidFill>
+                          <a:latin typeface="Helvetica"/>
+                        </a:defRPr>
+                      </a:pPr>
+                      <a:r>
+                        <a:t>Random Forest</a:t>
+                      </a:r>
+                    </a:p>
+                  </a:txBody>
+                  <a:tcPr>
+                    <a:solidFill>
+                      <a:srgbClr val="FFFFFF"/>
+                    </a:solidFill>
+                  </a:tcPr>
+                </a:tc>
+                <a:tc>
+                  <a:txBody>
+                    <a:bodyPr/>
+                    <a:lstStyle/>
+                    <a:p>
+                      <a:pPr algn="l">
+                        <a:defRPr b="0" sz="1000">
+                          <a:solidFill>
+                            <a:srgbClr val="1F2937"/>
+                          </a:solidFill>
+                          <a:latin typeface="Helvetica"/>
+                        </a:defRPr>
+                      </a:pPr>
+                      <a:r>
+                        <a:t>97.5%</a:t>
+                      </a:r>
+                    </a:p>
+                  </a:txBody>
+                  <a:tcPr>
+                    <a:solidFill>
+                      <a:srgbClr val="FFFFFF"/>
+                    </a:solidFill>
+                  </a:tcPr>
+                </a:tc>
+                <a:tc>
+                  <a:txBody>
+                    <a:bodyPr/>
+                    <a:lstStyle/>
+                    <a:p>
+                      <a:pPr algn="l">
+                        <a:defRPr b="0" sz="1000">
+                          <a:solidFill>
+                            <a:srgbClr val="1F2937"/>
+                          </a:solidFill>
+                          <a:latin typeface="Helvetica"/>
+                        </a:defRPr>
+                      </a:pPr>
+                      <a:r>
+                        <a:t>97.5%</a:t>
+                      </a:r>
+                    </a:p>
+                  </a:txBody>
+                  <a:tcPr>
+                    <a:solidFill>
+                      <a:srgbClr val="FFFFFF"/>
+                    </a:solidFill>
+                  </a:tcPr>
+                </a:tc>
+                <a:tc>
+                  <a:txBody>
+                    <a:bodyPr/>
+                    <a:lstStyle/>
+                    <a:p>
+                      <a:pPr algn="l">
+                        <a:defRPr b="0" sz="1000">
+                          <a:solidFill>
+                            <a:srgbClr val="1F2937"/>
+                          </a:solidFill>
+                          <a:latin typeface="Helvetica"/>
+                        </a:defRPr>
+                      </a:pPr>
+                      <a:r>
+                        <a:t>97.5%</a:t>
+                      </a:r>
+                    </a:p>
+                  </a:txBody>
+                  <a:tcPr>
+                    <a:solidFill>
+                      <a:srgbClr val="FFFFFF"/>
+                    </a:solidFill>
+                  </a:tcPr>
+                </a:tc>
+                <a:tc>
+                  <a:txBody>
+                    <a:bodyPr/>
+                    <a:lstStyle/>
+                    <a:p>
+                      <a:pPr algn="l">
+                        <a:defRPr b="0" sz="1000">
+                          <a:solidFill>
+                            <a:srgbClr val="1F2937"/>
+                          </a:solidFill>
+                          <a:latin typeface="Helvetica"/>
+                        </a:defRPr>
+                      </a:pPr>
+                      <a:r>
+                        <a:t>97.5%</a:t>
+                      </a:r>
+                    </a:p>
+                  </a:txBody>
+                  <a:tcPr>
+                    <a:solidFill>
+                      <a:srgbClr val="FFFFFF"/>
+                    </a:solidFill>
+                  </a:tcPr>
+                </a:tc>
+                <a:tc>
+                  <a:txBody>
+                    <a:bodyPr/>
+                    <a:lstStyle/>
+                    <a:p>
+                      <a:pPr algn="l">
+                        <a:defRPr b="0" sz="1000">
+                          <a:solidFill>
+                            <a:srgbClr val="1F2937"/>
+                          </a:solidFill>
+                          <a:latin typeface="Helvetica"/>
+                        </a:defRPr>
+                      </a:pPr>
+                      <a:r>
+                        <a:t>0.144s</a:t>
+                      </a:r>
+                    </a:p>
+                  </a:txBody>
+                  <a:tcPr>
+                    <a:solidFill>
+                      <a:srgbClr val="FFFFFF"/>
+                    </a:solidFill>
+                  </a:tcPr>
+                </a:tc>
+              </a:tr>
+              <a:tr h="579120">
+                <a:tc>
+                  <a:txBody>
+                    <a:bodyPr/>
+                    <a:lstStyle/>
+                    <a:p>
+                      <a:pPr algn="l">
+                        <a:defRPr b="0" sz="1000">
+                          <a:solidFill>
+                            <a:srgbClr val="1F2937"/>
+                          </a:solidFill>
+                          <a:latin typeface="Helvetica"/>
+                        </a:defRPr>
+                      </a:pPr>
+                      <a:r>
+                        <a:t>K-Nearest Neighbors</a:t>
+                      </a:r>
+                    </a:p>
+                  </a:txBody>
+                  <a:tcPr>
+                    <a:solidFill>
+                      <a:srgbClr val="F3F4F6"/>
+                    </a:solidFill>
+                  </a:tcPr>
+                </a:tc>
+                <a:tc>
+                  <a:txBody>
+                    <a:bodyPr/>
+                    <a:lstStyle/>
+                    <a:p>
+                      <a:pPr algn="l">
+                        <a:defRPr b="0" sz="1000">
+                          <a:solidFill>
+                            <a:srgbClr val="1F2937"/>
+                          </a:solidFill>
+                          <a:latin typeface="Helvetica"/>
+                        </a:defRPr>
+                      </a:pPr>
+                      <a:r>
+                        <a:t>96.2%</a:t>
+                      </a:r>
+                    </a:p>
+                  </a:txBody>
+                  <a:tcPr>
+                    <a:solidFill>
+                      <a:srgbClr val="F3F4F6"/>
+                    </a:solidFill>
+                  </a:tcPr>
+                </a:tc>
+                <a:tc>
+                  <a:txBody>
+                    <a:bodyPr/>
+                    <a:lstStyle/>
+                    <a:p>
+                      <a:pPr algn="l">
+                        <a:defRPr b="0" sz="1000">
+                          <a:solidFill>
+                            <a:srgbClr val="1F2937"/>
+                          </a:solidFill>
+                          <a:latin typeface="Helvetica"/>
+                        </a:defRPr>
+                      </a:pPr>
+                      <a:r>
+                        <a:t>96.2%</a:t>
+                      </a:r>
+                    </a:p>
+                  </a:txBody>
+                  <a:tcPr>
+                    <a:solidFill>
+                      <a:srgbClr val="F3F4F6"/>
+                    </a:solidFill>
+                  </a:tcPr>
+                </a:tc>
+                <a:tc>
+                  <a:txBody>
+                    <a:bodyPr/>
+                    <a:lstStyle/>
+                    <a:p>
+                      <a:pPr algn="l">
+                        <a:defRPr b="0" sz="1000">
+                          <a:solidFill>
+                            <a:srgbClr val="1F2937"/>
+                          </a:solidFill>
+                          <a:latin typeface="Helvetica"/>
+                        </a:defRPr>
+                      </a:pPr>
+                      <a:r>
+                        <a:t>96.2%</a:t>
+                      </a:r>
+                    </a:p>
+                  </a:txBody>
+                  <a:tcPr>
+                    <a:solidFill>
+                      <a:srgbClr val="F3F4F6"/>
+                    </a:solidFill>
+                  </a:tcPr>
+                </a:tc>
+                <a:tc>
+                  <a:txBody>
+                    <a:bodyPr/>
+                    <a:lstStyle/>
+                    <a:p>
+                      <a:pPr algn="l">
+                        <a:defRPr b="0" sz="1000">
+                          <a:solidFill>
+                            <a:srgbClr val="1F2937"/>
+                          </a:solidFill>
+                          <a:latin typeface="Helvetica"/>
+                        </a:defRPr>
+                      </a:pPr>
+                      <a:r>
+                        <a:t>96.2%</a:t>
+                      </a:r>
+                    </a:p>
+                  </a:txBody>
+                  <a:tcPr>
+                    <a:solidFill>
+                      <a:srgbClr val="F3F4F6"/>
+                    </a:solidFill>
+                  </a:tcPr>
+                </a:tc>
+                <a:tc>
+                  <a:txBody>
+                    <a:bodyPr/>
+                    <a:lstStyle/>
+                    <a:p>
+                      <a:pPr algn="l">
+                        <a:defRPr b="0" sz="1000">
+                          <a:solidFill>
+                            <a:srgbClr val="1F2937"/>
+                          </a:solidFill>
+                          <a:latin typeface="Helvetica"/>
+                        </a:defRPr>
+                      </a:pPr>
+                      <a:r>
+                        <a:t>0.002s</a:t>
+                      </a:r>
+                    </a:p>
+                  </a:txBody>
+                  <a:tcPr>
+                    <a:solidFill>
+                      <a:srgbClr val="F3F4F6"/>
+                    </a:solidFill>
+                  </a:tcPr>
+                </a:tc>
+              </a:tr>
+              <a:tr h="579120">
+                <a:tc>
+                  <a:txBody>
+                    <a:bodyPr/>
+                    <a:lstStyle/>
+                    <a:p>
+                      <a:pPr algn="l">
+                        <a:defRPr b="0" sz="1000">
+                          <a:solidFill>
+                            <a:srgbClr val="1F2937"/>
+                          </a:solidFill>
+                          <a:latin typeface="Helvetica"/>
+                        </a:defRPr>
+                      </a:pPr>
+                      <a:r>
+                        <a:t>Decision Tree</a:t>
+                      </a:r>
+                    </a:p>
+                  </a:txBody>
+                  <a:tcPr>
+                    <a:solidFill>
+                      <a:srgbClr val="FFFFFF"/>
+                    </a:solidFill>
+                  </a:tcPr>
+                </a:tc>
+                <a:tc>
+                  <a:txBody>
+                    <a:bodyPr/>
+                    <a:lstStyle/>
+                    <a:p>
+                      <a:pPr algn="l">
+                        <a:defRPr b="0" sz="1000">
+                          <a:solidFill>
+                            <a:srgbClr val="1F2937"/>
+                          </a:solidFill>
+                          <a:latin typeface="Helvetica"/>
+                        </a:defRPr>
+                      </a:pPr>
+                      <a:r>
+                        <a:t>95.6%</a:t>
+                      </a:r>
+                    </a:p>
+                  </a:txBody>
+                  <a:tcPr>
+                    <a:solidFill>
+                      <a:srgbClr val="FFFFFF"/>
+                    </a:solidFill>
+                  </a:tcPr>
+                </a:tc>
+                <a:tc>
+                  <a:txBody>
+                    <a:bodyPr/>
+                    <a:lstStyle/>
+                    <a:p>
+                      <a:pPr algn="l">
+                        <a:defRPr b="0" sz="1000">
+                          <a:solidFill>
+                            <a:srgbClr val="1F2937"/>
+                          </a:solidFill>
+                          <a:latin typeface="Helvetica"/>
+                        </a:defRPr>
+                      </a:pPr>
+                      <a:r>
+                        <a:t>95.7%</a:t>
+                      </a:r>
+                    </a:p>
+                  </a:txBody>
+                  <a:tcPr>
+                    <a:solidFill>
+                      <a:srgbClr val="FFFFFF"/>
+                    </a:solidFill>
+                  </a:tcPr>
+                </a:tc>
+                <a:tc>
+                  <a:txBody>
+                    <a:bodyPr/>
+                    <a:lstStyle/>
+                    <a:p>
+                      <a:pPr algn="l">
+                        <a:defRPr b="0" sz="1000">
+                          <a:solidFill>
+                            <a:srgbClr val="1F2937"/>
+                          </a:solidFill>
+                          <a:latin typeface="Helvetica"/>
+                        </a:defRPr>
+                      </a:pPr>
+                      <a:r>
+                        <a:t>95.6%</a:t>
+                      </a:r>
+                    </a:p>
+                  </a:txBody>
+                  <a:tcPr>
+                    <a:solidFill>
+                      <a:srgbClr val="FFFFFF"/>
+                    </a:solidFill>
+                  </a:tcPr>
+                </a:tc>
+                <a:tc>
+                  <a:txBody>
+                    <a:bodyPr/>
+                    <a:lstStyle/>
+                    <a:p>
+                      <a:pPr algn="l">
+                        <a:defRPr b="0" sz="1000">
+                          <a:solidFill>
+                            <a:srgbClr val="1F2937"/>
+                          </a:solidFill>
+                          <a:latin typeface="Helvetica"/>
+                        </a:defRPr>
+                      </a:pPr>
+                      <a:r>
+                        <a:t>95.6%</a:t>
+                      </a:r>
+                    </a:p>
+                  </a:txBody>
+                  <a:tcPr>
+                    <a:solidFill>
+                      <a:srgbClr val="FFFFFF"/>
+                    </a:solidFill>
+                  </a:tcPr>
+                </a:tc>
+                <a:tc>
+                  <a:txBody>
+                    <a:bodyPr/>
+                    <a:lstStyle/>
+                    <a:p>
+                      <a:pPr algn="l">
+                        <a:defRPr b="0" sz="1000">
+                          <a:solidFill>
+                            <a:srgbClr val="1F2937"/>
+                          </a:solidFill>
+                          <a:latin typeface="Helvetica"/>
+                        </a:defRPr>
+                      </a:pPr>
+                      <a:r>
+                        <a:t>0.003s</a:t>
+                      </a:r>
+                    </a:p>
+                  </a:txBody>
+                  <a:tcPr>
+                    <a:solidFill>
+                      <a:srgbClr val="FFFFFF"/>
+                    </a:solidFill>
+                  </a:tcPr>
+                </a:tc>
+              </a:tr>
+            </a:tbl>
+          </a:graphicData>
+        </a:graphic>
+      </p:graphicFrame>
+      <p:sp>
+        <p:nvSpPr>
+          <p:cNvPr id="5" name="TextBox 4"/>
+          <p:cNvSpPr txBox="1"/>
+          <p:nvPr/>
+        </p:nvSpPr>
+        <p:spPr>
+          <a:xfrm>
+            <a:off x="731520" y="5303520"/>
+            <a:ext cx="10728655" cy="1371600"/>
+          </a:xfrm>
+          <a:prstGeom prst="rect">
+            <a:avLst/>
+          </a:prstGeom>
+          <a:noFill/>
+        </p:spPr>
+        <p:txBody>
+          <a:bodyPr wrap="square" lIns="0" tIns="0" rIns="0" bIns="0">
+            <a:spAutoFit/>
+          </a:bodyPr>
+          <a:lstStyle/>
+          <a:p>
+            <a:pPr>
+              <a:spcAft>
+                <a:spcPts val="800"/>
+              </a:spcAft>
+              <a:defRPr sz="1300">
+                <a:solidFill>
+                  <a:srgbClr val="1F2937"/>
+                </a:solidFill>
+                <a:latin typeface="Helvetica"/>
+              </a:defRPr>
+            </a:pPr>
+            <a:r>
+              <a:t>• SVM achieves peak test accuracy of 98.9% and has a very compact file size (27.0 KB) compared to Random Forest (1,026.0 KB).</a:t>
+            </a:r>
+          </a:p>
+          <a:p>
+            <a:pPr>
+              <a:spcAft>
+                <a:spcPts val="800"/>
+              </a:spcAft>
+              <a:defRPr sz="1300">
+                <a:solidFill>
+                  <a:srgbClr val="1F2937"/>
+                </a:solidFill>
+                <a:latin typeface="Helvetica"/>
+              </a:defRPr>
+            </a:pPr>
+            <a:r>
+              <a:t>• Training time and prediction latency benchmarks are minimal (all under 15ms), facilitating real-time response.</a:t>
+            </a:r>
+          </a:p>
+          <a:p>
+            <a:pPr>
+              <a:spcAft>
+                <a:spcPts val="800"/>
+              </a:spcAft>
+              <a:defRPr sz="1300">
+                <a:solidFill>
+                  <a:srgbClr val="1F2937"/>
+                </a:solidFill>
+                <a:latin typeface="Helvetica"/>
+              </a:defRPr>
+            </a:pPr>
+            <a:r>
+              <a:t>• Companion Regressor: Deployed Random Forest Regressor for continuous scores (R-squared: 0.992).</a:t>
             </a:r>
           </a:p>
         </p:txBody>
